--- a/강의자료/파이썬기초2_6-10차시.pptx
+++ b/강의자료/파이썬기초2_6-10차시.pptx
@@ -5002,7 +5002,7 @@
                 <a:ea typeface="Malgun Gothic" pitchFamily="34" charset="-122"/>
                 <a:cs typeface="Malgun Gothic" pitchFamily="34" charset="-120"/>
               </a:rPr>
-              <a:t>AICE 어소시에이트 실기 · Part 1</a:t>
+              <a:t>AICE 어소시에이트 실기 · Part 2</a:t>
             </a:r>
             <a:endParaRPr lang="en-US" sz="1400" dirty="0"/>
           </a:p>
@@ -6703,7 +6703,7 @@
               <a:buNone/>
             </a:pPr>
             <a:r>
-              <a:rPr lang="en-US" sz="2600" b="1" dirty="0">
+              <a:rPr lang="en-US" sz="2100" b="1" dirty="0">
                 <a:solidFill>
                   <a:srgbClr val="FFFFFF"/>
                 </a:solidFill>
@@ -6713,7 +6713,7 @@
               </a:rPr>
               <a:t>append 는 하나, extend 는 알맹이 전부</a:t>
             </a:r>
-            <a:endParaRPr lang="en-US" sz="2600" dirty="0"/>
+            <a:endParaRPr lang="en-US" sz="2100" dirty="0"/>
           </a:p>
         </p:txBody>
       </p:sp>
@@ -7303,7 +7303,7 @@
               <a:buNone/>
             </a:pPr>
             <a:r>
-              <a:rPr lang="en-US" sz="4000" b="1" dirty="0">
+              <a:rPr lang="en-US" sz="3200" b="1" dirty="0">
                 <a:solidFill>
                   <a:srgbClr val="FFFFFF"/>
                 </a:solidFill>
@@ -7313,7 +7313,7 @@
               </a:rPr>
               <a:t>순번으로 꺼내기 vs 이름으로 삭제</a:t>
             </a:r>
-            <a:endParaRPr lang="en-US" sz="4000" dirty="0"/>
+            <a:endParaRPr lang="en-US" sz="3200" dirty="0"/>
           </a:p>
         </p:txBody>
       </p:sp>
@@ -8135,7 +8135,7 @@
               <a:buNone/>
             </a:pPr>
             <a:r>
-              <a:rPr lang="en-US" sz="2800" b="1" dirty="0">
+              <a:rPr lang="en-US" sz="2300" b="1" dirty="0">
                 <a:solidFill>
                   <a:srgbClr val="0F172A"/>
                 </a:solidFill>
@@ -8145,7 +8145,7 @@
               </a:rPr>
               <a:t>pop(인덱스) — 위치로 꺼내고, 꺼낸 값을 돌려준다</a:t>
             </a:r>
-            <a:endParaRPr lang="en-US" sz="2800" dirty="0"/>
+            <a:endParaRPr lang="en-US" sz="2300" dirty="0"/>
           </a:p>
         </p:txBody>
       </p:sp>
@@ -8204,7 +8204,7 @@
               <a:buNone/>
             </a:pPr>
             <a:r>
-              <a:rPr lang="en-US" sz="1250" dirty="0">
+              <a:rPr lang="en-US" sz="1211" dirty="0">
                 <a:solidFill>
                   <a:srgbClr val="E5E7EB"/>
                 </a:solidFill>
@@ -8221,7 +8221,7 @@
               <a:buNone/>
             </a:pPr>
             <a:r>
-              <a:rPr lang="en-US" sz="1250" dirty="0">
+              <a:rPr lang="en-US" sz="1211" dirty="0">
                 <a:solidFill>
                   <a:srgbClr val="FCD34D"/>
                 </a:solidFill>
@@ -8238,7 +8238,7 @@
               <a:buNone/>
             </a:pPr>
             <a:r>
-              <a:rPr lang="en-US" sz="1250" dirty="0">
+              <a:rPr lang="en-US" sz="1211" dirty="0">
                 <a:solidFill>
                   <a:srgbClr val="E5E7EB"/>
                 </a:solidFill>
@@ -8255,7 +8255,7 @@
               <a:buNone/>
             </a:pPr>
             <a:r>
-              <a:rPr lang="en-US" sz="1250" dirty="0">
+              <a:rPr lang="en-US" sz="1211" dirty="0">
                 <a:solidFill>
                   <a:srgbClr val="FCD34D"/>
                 </a:solidFill>
@@ -8272,7 +8272,7 @@
               <a:buNone/>
             </a:pPr>
             <a:r>
-              <a:rPr lang="en-US" sz="1250" dirty="0">
+              <a:rPr lang="en-US" sz="1211" dirty="0">
                 <a:solidFill>
                   <a:srgbClr val="E5E7EB"/>
                 </a:solidFill>
@@ -8289,7 +8289,7 @@
               <a:buNone/>
             </a:pPr>
             <a:r>
-              <a:rPr lang="en-US" sz="1250" dirty="0">
+              <a:rPr lang="en-US" sz="1211" dirty="0">
                 <a:solidFill>
                   <a:srgbClr val="FCD34D"/>
                 </a:solidFill>
@@ -8306,7 +8306,7 @@
               <a:buNone/>
             </a:pPr>
             <a:r>
-              <a:rPr lang="en-US" sz="1250" dirty="0">
+              <a:rPr lang="en-US" sz="1211" dirty="0">
                 <a:solidFill>
                   <a:srgbClr val="E5E7EB"/>
                 </a:solidFill>
@@ -8323,7 +8323,7 @@
               <a:buNone/>
             </a:pPr>
             <a:r>
-              <a:rPr lang="en-US" sz="1250" dirty="0">
+              <a:rPr lang="en-US" sz="1211" dirty="0">
                 <a:solidFill>
                   <a:srgbClr val="FCD34D"/>
                 </a:solidFill>
@@ -8340,7 +8340,7 @@
               <a:buNone/>
             </a:pPr>
             <a:r>
-              <a:rPr lang="en-US" sz="1250" dirty="0">
+              <a:rPr lang="en-US" sz="1211" dirty="0">
                 <a:solidFill>
                   <a:srgbClr val="E5E7EB"/>
                 </a:solidFill>
@@ -8357,7 +8357,7 @@
               <a:buNone/>
             </a:pPr>
             <a:r>
-              <a:rPr lang="en-US" sz="1250" dirty="0">
+              <a:rPr lang="en-US" sz="1211" dirty="0">
                 <a:solidFill>
                   <a:srgbClr val="FCD34D"/>
                 </a:solidFill>
@@ -8374,7 +8374,7 @@
               <a:buNone/>
             </a:pPr>
             <a:r>
-              <a:rPr lang="en-US" sz="1250" dirty="0">
+              <a:rPr lang="en-US" sz="1211" dirty="0">
                 <a:solidFill>
                   <a:srgbClr val="E5E7EB"/>
                 </a:solidFill>
@@ -8390,17 +8390,17 @@
               </a:lnSpc>
               <a:buNone/>
             </a:pPr>
-            <a:endParaRPr lang="en-US" sz="1250" dirty="0"/>
-          </a:p>
-          <a:p>
-            <a:pPr indent="0" marL="0">
-              <a:lnSpc>
-                <a:spcPct val="115000"/>
-              </a:lnSpc>
-              <a:buNone/>
-            </a:pPr>
-            <a:r>
-              <a:rPr lang="en-US" sz="1250" dirty="0">
+            <a:endParaRPr lang="en-US" sz="1211" dirty="0"/>
+          </a:p>
+          <a:p>
+            <a:pPr indent="0" marL="0">
+              <a:lnSpc>
+                <a:spcPct val="115000"/>
+              </a:lnSpc>
+              <a:buNone/>
+            </a:pPr>
+            <a:r>
+              <a:rPr lang="en-US" sz="1211" dirty="0">
                 <a:solidFill>
                   <a:srgbClr val="E5E7EB"/>
                 </a:solidFill>
@@ -8416,17 +8416,17 @@
               </a:lnSpc>
               <a:buNone/>
             </a:pPr>
-            <a:endParaRPr lang="en-US" sz="1250" dirty="0"/>
-          </a:p>
-          <a:p>
-            <a:pPr indent="0" marL="0">
-              <a:lnSpc>
-                <a:spcPct val="115000"/>
-              </a:lnSpc>
-              <a:buNone/>
-            </a:pPr>
-            <a:r>
-              <a:rPr lang="en-US" sz="1250" b="1" dirty="0">
+            <a:endParaRPr lang="en-US" sz="1211" dirty="0"/>
+          </a:p>
+          <a:p>
+            <a:pPr indent="0" marL="0">
+              <a:lnSpc>
+                <a:spcPct val="115000"/>
+              </a:lnSpc>
+              <a:buNone/>
+            </a:pPr>
+            <a:r>
+              <a:rPr lang="en-US" sz="1211" b="1" dirty="0">
                 <a:solidFill>
                   <a:srgbClr val="93C5FD"/>
                 </a:solidFill>
@@ -8443,7 +8443,7 @@
               <a:buNone/>
             </a:pPr>
             <a:r>
-              <a:rPr lang="en-US" sz="1250" dirty="0">
+              <a:rPr lang="en-US" sz="1211" dirty="0">
                 <a:solidFill>
                   <a:srgbClr val="E5E7EB"/>
                 </a:solidFill>
@@ -8460,7 +8460,7 @@
               <a:buNone/>
             </a:pPr>
             <a:r>
-              <a:rPr lang="en-US" sz="1250" dirty="0">
+              <a:rPr lang="en-US" sz="1211" dirty="0">
                 <a:solidFill>
                   <a:srgbClr val="FCD34D"/>
                 </a:solidFill>
@@ -8477,7 +8477,7 @@
               <a:buNone/>
             </a:pPr>
             <a:r>
-              <a:rPr lang="en-US" sz="1250" dirty="0">
+              <a:rPr lang="en-US" sz="1211" dirty="0">
                 <a:solidFill>
                   <a:srgbClr val="E5E7EB"/>
                 </a:solidFill>
@@ -8493,17 +8493,17 @@
               </a:lnSpc>
               <a:buNone/>
             </a:pPr>
-            <a:endParaRPr lang="en-US" sz="1250" dirty="0"/>
-          </a:p>
-          <a:p>
-            <a:pPr indent="0" marL="0">
-              <a:lnSpc>
-                <a:spcPct val="115000"/>
-              </a:lnSpc>
-              <a:buNone/>
-            </a:pPr>
-            <a:r>
-              <a:rPr lang="en-US" sz="1250" b="1" dirty="0">
+            <a:endParaRPr lang="en-US" sz="1211" dirty="0"/>
+          </a:p>
+          <a:p>
+            <a:pPr indent="0" marL="0">
+              <a:lnSpc>
+                <a:spcPct val="115000"/>
+              </a:lnSpc>
+              <a:buNone/>
+            </a:pPr>
+            <a:r>
+              <a:rPr lang="en-US" sz="1211" b="1" dirty="0">
                 <a:solidFill>
                   <a:srgbClr val="93C5FD"/>
                 </a:solidFill>
@@ -8520,7 +8520,7 @@
               <a:buNone/>
             </a:pPr>
             <a:r>
-              <a:rPr lang="en-US" sz="1250" dirty="0">
+              <a:rPr lang="en-US" sz="1211" dirty="0">
                 <a:solidFill>
                   <a:srgbClr val="E5E7EB"/>
                 </a:solidFill>
@@ -8537,7 +8537,7 @@
               <a:buNone/>
             </a:pPr>
             <a:r>
-              <a:rPr lang="en-US" sz="1250" dirty="0">
+              <a:rPr lang="en-US" sz="1211" dirty="0">
                 <a:solidFill>
                   <a:srgbClr val="FCD34D"/>
                 </a:solidFill>
@@ -8554,7 +8554,7 @@
               <a:buNone/>
             </a:pPr>
             <a:r>
-              <a:rPr lang="en-US" sz="1250" dirty="0">
+              <a:rPr lang="en-US" sz="1211" dirty="0">
                 <a:solidFill>
                   <a:srgbClr val="E5E7EB"/>
                 </a:solidFill>
@@ -8564,7 +8564,7 @@
               </a:rPr>
               <a:t>, queue)</a:t>
             </a:r>
-            <a:endParaRPr lang="en-US" sz="1250" dirty="0"/>
+            <a:endParaRPr lang="en-US" sz="1211" dirty="0"/>
           </a:p>
         </p:txBody>
       </p:sp>
@@ -8662,7 +8662,7 @@
               <a:buNone/>
             </a:pPr>
             <a:r>
-              <a:rPr lang="en-US" sz="1133" dirty="0">
+              <a:rPr lang="en-US" sz="1400" dirty="0">
                 <a:solidFill>
                   <a:srgbClr val="0F172A"/>
                 </a:solidFill>
@@ -8672,17 +8672,17 @@
               </a:rPr>
               <a:t>꺼낸 값: 유저D</a:t>
             </a:r>
-            <a:endParaRPr lang="en-US" sz="1133" dirty="0"/>
-          </a:p>
-          <a:p>
-            <a:pPr indent="0" marL="0">
-              <a:lnSpc>
-                <a:spcPct val="115000"/>
-              </a:lnSpc>
-              <a:buNone/>
-            </a:pPr>
-            <a:r>
-              <a:rPr lang="en-US" sz="1133" dirty="0">
+            <a:endParaRPr lang="en-US" sz="1400" dirty="0"/>
+          </a:p>
+          <a:p>
+            <a:pPr indent="0" marL="0">
+              <a:lnSpc>
+                <a:spcPct val="115000"/>
+              </a:lnSpc>
+              <a:buNone/>
+            </a:pPr>
+            <a:r>
+              <a:rPr lang="en-US" sz="1400" dirty="0">
                 <a:solidFill>
                   <a:srgbClr val="0F172A"/>
                 </a:solidFill>
@@ -8692,7 +8692,7 @@
               </a:rPr>
               <a:t>남은 큐: ['유저A', '유저B', '유저C', '어뷰저']</a:t>
             </a:r>
-            <a:endParaRPr lang="en-US" sz="1133" dirty="0"/>
+            <a:endParaRPr lang="en-US" sz="1400" dirty="0"/>
           </a:p>
         </p:txBody>
       </p:sp>
@@ -8999,7 +8999,7 @@
               <a:buNone/>
             </a:pPr>
             <a:r>
-              <a:rPr lang="en-US" sz="2800" b="1" dirty="0">
+              <a:rPr lang="en-US" sz="2300" b="1" dirty="0">
                 <a:solidFill>
                   <a:srgbClr val="0F172A"/>
                 </a:solidFill>
@@ -9009,7 +9009,7 @@
               </a:rPr>
               <a:t>remove(값) — 이름으로 찾아 첫 번째 것을 지운다</a:t>
             </a:r>
-            <a:endParaRPr lang="en-US" sz="2800" dirty="0"/>
+            <a:endParaRPr lang="en-US" sz="2300" dirty="0"/>
           </a:p>
         </p:txBody>
       </p:sp>
@@ -9068,7 +9068,7 @@
               <a:buNone/>
             </a:pPr>
             <a:r>
-              <a:rPr lang="en-US" sz="1250" dirty="0">
+              <a:rPr lang="en-US" sz="1211" dirty="0">
                 <a:solidFill>
                   <a:srgbClr val="E5E7EB"/>
                 </a:solidFill>
@@ -9085,7 +9085,7 @@
               <a:buNone/>
             </a:pPr>
             <a:r>
-              <a:rPr lang="en-US" sz="1250" dirty="0">
+              <a:rPr lang="en-US" sz="1211" dirty="0">
                 <a:solidFill>
                   <a:srgbClr val="FCD34D"/>
                 </a:solidFill>
@@ -9102,7 +9102,7 @@
               <a:buNone/>
             </a:pPr>
             <a:r>
-              <a:rPr lang="en-US" sz="1250" dirty="0">
+              <a:rPr lang="en-US" sz="1211" dirty="0">
                 <a:solidFill>
                   <a:srgbClr val="E5E7EB"/>
                 </a:solidFill>
@@ -9119,7 +9119,7 @@
               <a:buNone/>
             </a:pPr>
             <a:r>
-              <a:rPr lang="en-US" sz="1250" dirty="0">
+              <a:rPr lang="en-US" sz="1211" dirty="0">
                 <a:solidFill>
                   <a:srgbClr val="FCD34D"/>
                 </a:solidFill>
@@ -9136,7 +9136,7 @@
               <a:buNone/>
             </a:pPr>
             <a:r>
-              <a:rPr lang="en-US" sz="1250" dirty="0">
+              <a:rPr lang="en-US" sz="1211" dirty="0">
                 <a:solidFill>
                   <a:srgbClr val="E5E7EB"/>
                 </a:solidFill>
@@ -9153,7 +9153,7 @@
               <a:buNone/>
             </a:pPr>
             <a:r>
-              <a:rPr lang="en-US" sz="1250" dirty="0">
+              <a:rPr lang="en-US" sz="1211" dirty="0">
                 <a:solidFill>
                   <a:srgbClr val="FCD34D"/>
                 </a:solidFill>
@@ -9170,7 +9170,7 @@
               <a:buNone/>
             </a:pPr>
             <a:r>
-              <a:rPr lang="en-US" sz="1250" dirty="0">
+              <a:rPr lang="en-US" sz="1211" dirty="0">
                 <a:solidFill>
                   <a:srgbClr val="E5E7EB"/>
                 </a:solidFill>
@@ -9187,7 +9187,7 @@
               <a:buNone/>
             </a:pPr>
             <a:r>
-              <a:rPr lang="en-US" sz="1250" dirty="0">
+              <a:rPr lang="en-US" sz="1211" dirty="0">
                 <a:solidFill>
                   <a:srgbClr val="FCD34D"/>
                 </a:solidFill>
@@ -9204,7 +9204,7 @@
               <a:buNone/>
             </a:pPr>
             <a:r>
-              <a:rPr lang="en-US" sz="1250" dirty="0">
+              <a:rPr lang="en-US" sz="1211" dirty="0">
                 <a:solidFill>
                   <a:srgbClr val="E5E7EB"/>
                 </a:solidFill>
@@ -9221,7 +9221,7 @@
               <a:buNone/>
             </a:pPr>
             <a:r>
-              <a:rPr lang="en-US" sz="1250" dirty="0">
+              <a:rPr lang="en-US" sz="1211" dirty="0">
                 <a:solidFill>
                   <a:srgbClr val="FCD34D"/>
                 </a:solidFill>
@@ -9238,7 +9238,7 @@
               <a:buNone/>
             </a:pPr>
             <a:r>
-              <a:rPr lang="en-US" sz="1250" dirty="0">
+              <a:rPr lang="en-US" sz="1211" dirty="0">
                 <a:solidFill>
                   <a:srgbClr val="E5E7EB"/>
                 </a:solidFill>
@@ -9254,17 +9254,17 @@
               </a:lnSpc>
               <a:buNone/>
             </a:pPr>
-            <a:endParaRPr lang="en-US" sz="1250" dirty="0"/>
-          </a:p>
-          <a:p>
-            <a:pPr indent="0" marL="0">
-              <a:lnSpc>
-                <a:spcPct val="115000"/>
-              </a:lnSpc>
-              <a:buNone/>
-            </a:pPr>
-            <a:r>
-              <a:rPr lang="en-US" sz="1250" dirty="0">
+            <a:endParaRPr lang="en-US" sz="1211" dirty="0"/>
+          </a:p>
+          <a:p>
+            <a:pPr indent="0" marL="0">
+              <a:lnSpc>
+                <a:spcPct val="115000"/>
+              </a:lnSpc>
+              <a:buNone/>
+            </a:pPr>
+            <a:r>
+              <a:rPr lang="en-US" sz="1211" dirty="0">
                 <a:solidFill>
                   <a:srgbClr val="E5E7EB"/>
                 </a:solidFill>
@@ -9281,7 +9281,7 @@
               <a:buNone/>
             </a:pPr>
             <a:r>
-              <a:rPr lang="en-US" sz="1250" dirty="0">
+              <a:rPr lang="en-US" sz="1211" dirty="0">
                 <a:solidFill>
                   <a:srgbClr val="FCD34D"/>
                 </a:solidFill>
@@ -9298,7 +9298,7 @@
               <a:buNone/>
             </a:pPr>
             <a:r>
-              <a:rPr lang="en-US" sz="1250" dirty="0">
+              <a:rPr lang="en-US" sz="1211" dirty="0">
                 <a:solidFill>
                   <a:srgbClr val="E5E7EB"/>
                 </a:solidFill>
@@ -9314,17 +9314,17 @@
               </a:lnSpc>
               <a:buNone/>
             </a:pPr>
-            <a:endParaRPr lang="en-US" sz="1250" dirty="0"/>
-          </a:p>
-          <a:p>
-            <a:pPr indent="0" marL="0">
-              <a:lnSpc>
-                <a:spcPct val="115000"/>
-              </a:lnSpc>
-              <a:buNone/>
-            </a:pPr>
-            <a:r>
-              <a:rPr lang="en-US" sz="1250" b="1" dirty="0">
+            <a:endParaRPr lang="en-US" sz="1211" dirty="0"/>
+          </a:p>
+          <a:p>
+            <a:pPr indent="0" marL="0">
+              <a:lnSpc>
+                <a:spcPct val="115000"/>
+              </a:lnSpc>
+              <a:buNone/>
+            </a:pPr>
+            <a:r>
+              <a:rPr lang="en-US" sz="1211" b="1" dirty="0">
                 <a:solidFill>
                   <a:srgbClr val="93C5FD"/>
                 </a:solidFill>
@@ -9341,7 +9341,7 @@
               <a:buNone/>
             </a:pPr>
             <a:r>
-              <a:rPr lang="en-US" sz="1250" dirty="0">
+              <a:rPr lang="en-US" sz="1211" dirty="0">
                 <a:solidFill>
                   <a:srgbClr val="E5E7EB"/>
                 </a:solidFill>
@@ -9358,7 +9358,7 @@
               <a:buNone/>
             </a:pPr>
             <a:r>
-              <a:rPr lang="en-US" sz="1250" dirty="0">
+              <a:rPr lang="en-US" sz="1211" dirty="0">
                 <a:solidFill>
                   <a:srgbClr val="FCD34D"/>
                 </a:solidFill>
@@ -9375,7 +9375,7 @@
               <a:buNone/>
             </a:pPr>
             <a:r>
-              <a:rPr lang="en-US" sz="1250" dirty="0">
+              <a:rPr lang="en-US" sz="1211" dirty="0">
                 <a:solidFill>
                   <a:srgbClr val="E5E7EB"/>
                 </a:solidFill>
@@ -9385,7 +9385,7 @@
               </a:rPr>
               <a:t>, queue)</a:t>
             </a:r>
-            <a:endParaRPr lang="en-US" sz="1250" dirty="0"/>
+            <a:endParaRPr lang="en-US" sz="1211" dirty="0"/>
           </a:p>
         </p:txBody>
       </p:sp>
@@ -9483,7 +9483,7 @@
               <a:buNone/>
             </a:pPr>
             <a:r>
-              <a:rPr lang="en-US" sz="1160" dirty="0">
+              <a:rPr lang="en-US" sz="1014" dirty="0">
                 <a:solidFill>
                   <a:srgbClr val="0F172A"/>
                 </a:solidFill>
@@ -9493,7 +9493,7 @@
               </a:rPr>
               <a:t>정제 후: ['유저A', '유저B', '유저C', '유저D']</a:t>
             </a:r>
-            <a:endParaRPr lang="en-US" sz="1160" dirty="0"/>
+            <a:endParaRPr lang="en-US" sz="1014" dirty="0"/>
           </a:p>
         </p:txBody>
       </p:sp>
@@ -9552,7 +9552,7 @@
               <a:buNone/>
             </a:pPr>
             <a:r>
-              <a:rPr lang="en-US" sz="1244" dirty="0">
+              <a:rPr lang="en-US" sz="1394" dirty="0">
                 <a:solidFill>
                   <a:srgbClr val="E5E7EB"/>
                 </a:solidFill>
@@ -9569,7 +9569,7 @@
               <a:buNone/>
             </a:pPr>
             <a:r>
-              <a:rPr lang="en-US" sz="1244" dirty="0">
+              <a:rPr lang="en-US" sz="1394" dirty="0">
                 <a:solidFill>
                   <a:srgbClr val="FCD34D"/>
                 </a:solidFill>
@@ -9586,7 +9586,7 @@
               <a:buNone/>
             </a:pPr>
             <a:r>
-              <a:rPr lang="en-US" sz="1244" dirty="0">
+              <a:rPr lang="en-US" sz="1394" dirty="0">
                 <a:solidFill>
                   <a:srgbClr val="E5E7EB"/>
                 </a:solidFill>
@@ -9602,17 +9602,17 @@
               </a:lnSpc>
               <a:buNone/>
             </a:pPr>
-            <a:endParaRPr lang="en-US" sz="1244" dirty="0"/>
-          </a:p>
-          <a:p>
-            <a:pPr indent="0" marL="0">
-              <a:lnSpc>
-                <a:spcPct val="115000"/>
-              </a:lnSpc>
-              <a:buNone/>
-            </a:pPr>
-            <a:r>
-              <a:rPr lang="en-US" sz="1244" dirty="0">
+            <a:endParaRPr lang="en-US" sz="1394" dirty="0"/>
+          </a:p>
+          <a:p>
+            <a:pPr indent="0" marL="0">
+              <a:lnSpc>
+                <a:spcPct val="115000"/>
+              </a:lnSpc>
+              <a:buNone/>
+            </a:pPr>
+            <a:r>
+              <a:rPr lang="en-US" sz="1394" dirty="0">
                 <a:solidFill>
                   <a:srgbClr val="94A3B8"/>
                 </a:solidFill>
@@ -9622,7 +9622,7 @@
               </a:rPr>
               <a:t># ValueError: list.remove(x): x not in list</a:t>
             </a:r>
-            <a:endParaRPr lang="en-US" sz="1244" dirty="0"/>
+            <a:endParaRPr lang="en-US" sz="1394" dirty="0"/>
           </a:p>
         </p:txBody>
       </p:sp>
@@ -12059,7 +12059,7 @@
               <a:buNone/>
             </a:pPr>
             <a:r>
-              <a:rPr lang="en-US" sz="1549" dirty="0">
+              <a:rPr lang="en-US" sz="1420" dirty="0">
                 <a:solidFill>
                   <a:srgbClr val="E5E7EB"/>
                 </a:solidFill>
@@ -12076,7 +12076,7 @@
               <a:buNone/>
             </a:pPr>
             <a:r>
-              <a:rPr lang="en-US" sz="1549" dirty="0">
+              <a:rPr lang="en-US" sz="1420" dirty="0">
                 <a:solidFill>
                   <a:srgbClr val="FCD34D"/>
                 </a:solidFill>
@@ -12092,17 +12092,17 @@
               </a:lnSpc>
               <a:buNone/>
             </a:pPr>
-            <a:endParaRPr lang="en-US" sz="1549" dirty="0"/>
-          </a:p>
-          <a:p>
-            <a:pPr indent="0" marL="0">
-              <a:lnSpc>
-                <a:spcPct val="115000"/>
-              </a:lnSpc>
-              <a:buNone/>
-            </a:pPr>
-            <a:r>
-              <a:rPr lang="en-US" sz="1549" b="1" dirty="0">
+            <a:endParaRPr lang="en-US" sz="1420" dirty="0"/>
+          </a:p>
+          <a:p>
+            <a:pPr indent="0" marL="0">
+              <a:lnSpc>
+                <a:spcPct val="115000"/>
+              </a:lnSpc>
+              <a:buNone/>
+            </a:pPr>
+            <a:r>
+              <a:rPr lang="en-US" sz="1420" b="1" dirty="0">
                 <a:solidFill>
                   <a:srgbClr val="93C5FD"/>
                 </a:solidFill>
@@ -12119,7 +12119,7 @@
               <a:buNone/>
             </a:pPr>
             <a:r>
-              <a:rPr lang="en-US" sz="1549" dirty="0">
+              <a:rPr lang="en-US" sz="1420" dirty="0">
                 <a:solidFill>
                   <a:srgbClr val="E5E7EB"/>
                 </a:solidFill>
@@ -12136,7 +12136,7 @@
               <a:buNone/>
             </a:pPr>
             <a:r>
-              <a:rPr lang="en-US" sz="1549" b="1" dirty="0">
+              <a:rPr lang="en-US" sz="1420" b="1" dirty="0">
                 <a:solidFill>
                   <a:srgbClr val="93C5FD"/>
                 </a:solidFill>
@@ -12153,7 +12153,7 @@
               <a:buNone/>
             </a:pPr>
             <a:r>
-              <a:rPr lang="en-US" sz="1549" dirty="0">
+              <a:rPr lang="en-US" sz="1420" dirty="0">
                 <a:solidFill>
                   <a:srgbClr val="E5E7EB"/>
                 </a:solidFill>
@@ -12169,17 +12169,17 @@
               </a:lnSpc>
               <a:buNone/>
             </a:pPr>
-            <a:endParaRPr lang="en-US" sz="1549" dirty="0"/>
-          </a:p>
-          <a:p>
-            <a:pPr indent="0" marL="0">
-              <a:lnSpc>
-                <a:spcPct val="115000"/>
-              </a:lnSpc>
-              <a:buNone/>
-            </a:pPr>
-            <a:r>
-              <a:rPr lang="en-US" sz="1549" dirty="0">
+            <a:endParaRPr lang="en-US" sz="1420" dirty="0"/>
+          </a:p>
+          <a:p>
+            <a:pPr indent="0" marL="0">
+              <a:lnSpc>
+                <a:spcPct val="115000"/>
+              </a:lnSpc>
+              <a:buNone/>
+            </a:pPr>
+            <a:r>
+              <a:rPr lang="en-US" sz="1420" dirty="0">
                 <a:solidFill>
                   <a:srgbClr val="E5E7EB"/>
                 </a:solidFill>
@@ -12195,17 +12195,17 @@
               </a:lnSpc>
               <a:buNone/>
             </a:pPr>
-            <a:endParaRPr lang="en-US" sz="1549" dirty="0"/>
-          </a:p>
-          <a:p>
-            <a:pPr indent="0" marL="0">
-              <a:lnSpc>
-                <a:spcPct val="115000"/>
-              </a:lnSpc>
-              <a:buNone/>
-            </a:pPr>
-            <a:r>
-              <a:rPr lang="en-US" sz="1549" b="1" dirty="0">
+            <a:endParaRPr lang="en-US" sz="1420" dirty="0"/>
+          </a:p>
+          <a:p>
+            <a:pPr indent="0" marL="0">
+              <a:lnSpc>
+                <a:spcPct val="115000"/>
+              </a:lnSpc>
+              <a:buNone/>
+            </a:pPr>
+            <a:r>
+              <a:rPr lang="en-US" sz="1420" b="1" dirty="0">
                 <a:solidFill>
                   <a:srgbClr val="93C5FD"/>
                 </a:solidFill>
@@ -12222,7 +12222,7 @@
               <a:buNone/>
             </a:pPr>
             <a:r>
-              <a:rPr lang="en-US" sz="1549" dirty="0">
+              <a:rPr lang="en-US" sz="1420" dirty="0">
                 <a:solidFill>
                   <a:srgbClr val="E5E7EB"/>
                 </a:solidFill>
@@ -12238,17 +12238,17 @@
               </a:lnSpc>
               <a:buNone/>
             </a:pPr>
-            <a:endParaRPr lang="en-US" sz="1549" dirty="0"/>
-          </a:p>
-          <a:p>
-            <a:pPr indent="0" marL="0">
-              <a:lnSpc>
-                <a:spcPct val="115000"/>
-              </a:lnSpc>
-              <a:buNone/>
-            </a:pPr>
-            <a:r>
-              <a:rPr lang="en-US" sz="1549" dirty="0">
+            <a:endParaRPr lang="en-US" sz="1420" dirty="0"/>
+          </a:p>
+          <a:p>
+            <a:pPr indent="0" marL="0">
+              <a:lnSpc>
+                <a:spcPct val="115000"/>
+              </a:lnSpc>
+              <a:buNone/>
+            </a:pPr>
+            <a:r>
+              <a:rPr lang="en-US" sz="1420" dirty="0">
                 <a:solidFill>
                   <a:srgbClr val="E5E7EB"/>
                 </a:solidFill>
@@ -12265,7 +12265,7 @@
               <a:buNone/>
             </a:pPr>
             <a:r>
-              <a:rPr lang="en-US" sz="1549" b="1" dirty="0">
+              <a:rPr lang="en-US" sz="1420" b="1" dirty="0">
                 <a:solidFill>
                   <a:srgbClr val="93C5FD"/>
                 </a:solidFill>
@@ -12282,7 +12282,7 @@
               <a:buNone/>
             </a:pPr>
             <a:r>
-              <a:rPr lang="en-US" sz="1549" dirty="0">
+              <a:rPr lang="en-US" sz="1420" dirty="0">
                 <a:solidFill>
                   <a:srgbClr val="E5E7EB"/>
                 </a:solidFill>
@@ -12299,7 +12299,7 @@
               <a:buNone/>
             </a:pPr>
             <a:r>
-              <a:rPr lang="en-US" sz="1549" dirty="0">
+              <a:rPr lang="en-US" sz="1420" dirty="0">
                 <a:solidFill>
                   <a:srgbClr val="FCD34D"/>
                 </a:solidFill>
@@ -12316,7 +12316,7 @@
               <a:buNone/>
             </a:pPr>
             <a:r>
-              <a:rPr lang="en-US" sz="1549" dirty="0">
+              <a:rPr lang="en-US" sz="1420" dirty="0">
                 <a:solidFill>
                   <a:srgbClr val="E5E7EB"/>
                 </a:solidFill>
@@ -12326,7 +12326,7 @@
               </a:rPr>
               <a:t>)</a:t>
             </a:r>
-            <a:endParaRPr lang="en-US" sz="1549" dirty="0"/>
+            <a:endParaRPr lang="en-US" sz="1420" dirty="0"/>
           </a:p>
         </p:txBody>
       </p:sp>
@@ -12534,7 +12534,7 @@
               <a:buNone/>
             </a:pPr>
             <a:r>
-              <a:rPr lang="en-US" sz="1250" dirty="0">
+              <a:rPr lang="en-US" sz="933" dirty="0">
                 <a:solidFill>
                   <a:srgbClr val="E5E7EB"/>
                 </a:solidFill>
@@ -12551,7 +12551,7 @@
               <a:buNone/>
             </a:pPr>
             <a:r>
-              <a:rPr lang="en-US" sz="1250" dirty="0">
+              <a:rPr lang="en-US" sz="933" dirty="0">
                 <a:solidFill>
                   <a:srgbClr val="FCD34D"/>
                 </a:solidFill>
@@ -12568,7 +12568,7 @@
               <a:buNone/>
             </a:pPr>
             <a:r>
-              <a:rPr lang="en-US" sz="1250" dirty="0">
+              <a:rPr lang="en-US" sz="933" dirty="0">
                 <a:solidFill>
                   <a:srgbClr val="E5E7EB"/>
                 </a:solidFill>
@@ -12585,7 +12585,7 @@
               <a:buNone/>
             </a:pPr>
             <a:r>
-              <a:rPr lang="en-US" sz="1250" dirty="0">
+              <a:rPr lang="en-US" sz="933" dirty="0">
                 <a:solidFill>
                   <a:srgbClr val="FCD34D"/>
                 </a:solidFill>
@@ -12602,7 +12602,7 @@
               <a:buNone/>
             </a:pPr>
             <a:r>
-              <a:rPr lang="en-US" sz="1250" dirty="0">
+              <a:rPr lang="en-US" sz="933" dirty="0">
                 <a:solidFill>
                   <a:srgbClr val="E5E7EB"/>
                 </a:solidFill>
@@ -12619,7 +12619,7 @@
               <a:buNone/>
             </a:pPr>
             <a:r>
-              <a:rPr lang="en-US" sz="1250" dirty="0">
+              <a:rPr lang="en-US" sz="933" dirty="0">
                 <a:solidFill>
                   <a:srgbClr val="FCD34D"/>
                 </a:solidFill>
@@ -12636,7 +12636,7 @@
               <a:buNone/>
             </a:pPr>
             <a:r>
-              <a:rPr lang="en-US" sz="1250" dirty="0">
+              <a:rPr lang="en-US" sz="933" dirty="0">
                 <a:solidFill>
                   <a:srgbClr val="E5E7EB"/>
                 </a:solidFill>
@@ -12653,7 +12653,7 @@
               <a:buNone/>
             </a:pPr>
             <a:r>
-              <a:rPr lang="en-US" sz="1250" dirty="0">
+              <a:rPr lang="en-US" sz="933" dirty="0">
                 <a:solidFill>
                   <a:srgbClr val="FCD34D"/>
                 </a:solidFill>
@@ -12670,7 +12670,7 @@
               <a:buNone/>
             </a:pPr>
             <a:r>
-              <a:rPr lang="en-US" sz="1250" dirty="0">
+              <a:rPr lang="en-US" sz="933" dirty="0">
                 <a:solidFill>
                   <a:srgbClr val="E5E7EB"/>
                 </a:solidFill>
@@ -12687,7 +12687,7 @@
               <a:buNone/>
             </a:pPr>
             <a:r>
-              <a:rPr lang="en-US" sz="1250" dirty="0">
+              <a:rPr lang="en-US" sz="933" dirty="0">
                 <a:solidFill>
                   <a:srgbClr val="94A3B8"/>
                 </a:solidFill>
@@ -12703,17 +12703,17 @@
               </a:lnSpc>
               <a:buNone/>
             </a:pPr>
-            <a:endParaRPr lang="en-US" sz="1250" dirty="0"/>
-          </a:p>
-          <a:p>
-            <a:pPr indent="0" marL="0">
-              <a:lnSpc>
-                <a:spcPct val="115000"/>
-              </a:lnSpc>
-              <a:buNone/>
-            </a:pPr>
-            <a:r>
-              <a:rPr lang="en-US" sz="1250" dirty="0">
+            <a:endParaRPr lang="en-US" sz="933" dirty="0"/>
+          </a:p>
+          <a:p>
+            <a:pPr indent="0" marL="0">
+              <a:lnSpc>
+                <a:spcPct val="115000"/>
+              </a:lnSpc>
+              <a:buNone/>
+            </a:pPr>
+            <a:r>
+              <a:rPr lang="en-US" sz="933" dirty="0">
                 <a:solidFill>
                   <a:srgbClr val="E5E7EB"/>
                 </a:solidFill>
@@ -12730,7 +12730,7 @@
               <a:buNone/>
             </a:pPr>
             <a:r>
-              <a:rPr lang="en-US" sz="1250" dirty="0">
+              <a:rPr lang="en-US" sz="933" dirty="0">
                 <a:solidFill>
                   <a:srgbClr val="94A3B8"/>
                 </a:solidFill>
@@ -12746,17 +12746,17 @@
               </a:lnSpc>
               <a:buNone/>
             </a:pPr>
-            <a:endParaRPr lang="en-US" sz="1250" dirty="0"/>
-          </a:p>
-          <a:p>
-            <a:pPr indent="0" marL="0">
-              <a:lnSpc>
-                <a:spcPct val="115000"/>
-              </a:lnSpc>
-              <a:buNone/>
-            </a:pPr>
-            <a:r>
-              <a:rPr lang="en-US" sz="1250" dirty="0">
+            <a:endParaRPr lang="en-US" sz="933" dirty="0"/>
+          </a:p>
+          <a:p>
+            <a:pPr indent="0" marL="0">
+              <a:lnSpc>
+                <a:spcPct val="115000"/>
+              </a:lnSpc>
+              <a:buNone/>
+            </a:pPr>
+            <a:r>
+              <a:rPr lang="en-US" sz="933" dirty="0">
                 <a:solidFill>
                   <a:srgbClr val="E5E7EB"/>
                 </a:solidFill>
@@ -12773,7 +12773,7 @@
               <a:buNone/>
             </a:pPr>
             <a:r>
-              <a:rPr lang="en-US" sz="1250" dirty="0">
+              <a:rPr lang="en-US" sz="933" dirty="0">
                 <a:solidFill>
                   <a:srgbClr val="94A3B8"/>
                 </a:solidFill>
@@ -12789,17 +12789,17 @@
               </a:lnSpc>
               <a:buNone/>
             </a:pPr>
-            <a:endParaRPr lang="en-US" sz="1250" dirty="0"/>
-          </a:p>
-          <a:p>
-            <a:pPr indent="0" marL="0">
-              <a:lnSpc>
-                <a:spcPct val="115000"/>
-              </a:lnSpc>
-              <a:buNone/>
-            </a:pPr>
-            <a:r>
-              <a:rPr lang="en-US" sz="1250" b="1" dirty="0">
+            <a:endParaRPr lang="en-US" sz="933" dirty="0"/>
+          </a:p>
+          <a:p>
+            <a:pPr indent="0" marL="0">
+              <a:lnSpc>
+                <a:spcPct val="115000"/>
+              </a:lnSpc>
+              <a:buNone/>
+            </a:pPr>
+            <a:r>
+              <a:rPr lang="en-US" sz="933" b="1" dirty="0">
                 <a:solidFill>
                   <a:srgbClr val="93C5FD"/>
                 </a:solidFill>
@@ -12816,7 +12816,7 @@
               <a:buNone/>
             </a:pPr>
             <a:r>
-              <a:rPr lang="en-US" sz="1250" dirty="0">
+              <a:rPr lang="en-US" sz="933" dirty="0">
                 <a:solidFill>
                   <a:srgbClr val="E5E7EB"/>
                 </a:solidFill>
@@ -12833,7 +12833,7 @@
               <a:buNone/>
             </a:pPr>
             <a:r>
-              <a:rPr lang="en-US" sz="1250" dirty="0">
+              <a:rPr lang="en-US" sz="933" dirty="0">
                 <a:solidFill>
                   <a:srgbClr val="FCD34D"/>
                 </a:solidFill>
@@ -12850,7 +12850,7 @@
               <a:buNone/>
             </a:pPr>
             <a:r>
-              <a:rPr lang="en-US" sz="1250" dirty="0">
+              <a:rPr lang="en-US" sz="933" dirty="0">
                 <a:solidFill>
                   <a:srgbClr val="E5E7EB"/>
                 </a:solidFill>
@@ -12866,17 +12866,17 @@
               </a:lnSpc>
               <a:buNone/>
             </a:pPr>
-            <a:endParaRPr lang="en-US" sz="1250" dirty="0"/>
-          </a:p>
-          <a:p>
-            <a:pPr indent="0" marL="0">
-              <a:lnSpc>
-                <a:spcPct val="115000"/>
-              </a:lnSpc>
-              <a:buNone/>
-            </a:pPr>
-            <a:r>
-              <a:rPr lang="en-US" sz="1250" b="1" dirty="0">
+            <a:endParaRPr lang="en-US" sz="933" dirty="0"/>
+          </a:p>
+          <a:p>
+            <a:pPr indent="0" marL="0">
+              <a:lnSpc>
+                <a:spcPct val="115000"/>
+              </a:lnSpc>
+              <a:buNone/>
+            </a:pPr>
+            <a:r>
+              <a:rPr lang="en-US" sz="933" b="1" dirty="0">
                 <a:solidFill>
                   <a:srgbClr val="93C5FD"/>
                 </a:solidFill>
@@ -12893,7 +12893,7 @@
               <a:buNone/>
             </a:pPr>
             <a:r>
-              <a:rPr lang="en-US" sz="1250" dirty="0">
+              <a:rPr lang="en-US" sz="933" dirty="0">
                 <a:solidFill>
                   <a:srgbClr val="E5E7EB"/>
                 </a:solidFill>
@@ -12910,7 +12910,7 @@
               <a:buNone/>
             </a:pPr>
             <a:r>
-              <a:rPr lang="en-US" sz="1250" dirty="0">
+              <a:rPr lang="en-US" sz="933" dirty="0">
                 <a:solidFill>
                   <a:srgbClr val="FCD34D"/>
                 </a:solidFill>
@@ -12927,7 +12927,7 @@
               <a:buNone/>
             </a:pPr>
             <a:r>
-              <a:rPr lang="en-US" sz="1250" dirty="0">
+              <a:rPr lang="en-US" sz="933" dirty="0">
                 <a:solidFill>
                   <a:srgbClr val="E5E7EB"/>
                 </a:solidFill>
@@ -12937,7 +12937,7 @@
               </a:rPr>
               <a:t>, features)</a:t>
             </a:r>
-            <a:endParaRPr lang="en-US" sz="1250" dirty="0"/>
+            <a:endParaRPr lang="en-US" sz="933" dirty="0"/>
           </a:p>
         </p:txBody>
       </p:sp>
@@ -13035,7 +13035,7 @@
               <a:buNone/>
             </a:pPr>
             <a:r>
-              <a:rPr lang="en-US" sz="1282" dirty="0">
+              <a:rPr lang="en-US" sz="1141" dirty="0">
                 <a:solidFill>
                   <a:srgbClr val="0F172A"/>
                 </a:solidFill>
@@ -13045,17 +13045,17 @@
               </a:rPr>
               <a:t>y: churn</a:t>
             </a:r>
-            <a:endParaRPr lang="en-US" sz="1282" dirty="0"/>
-          </a:p>
-          <a:p>
-            <a:pPr indent="0" marL="0">
-              <a:lnSpc>
-                <a:spcPct val="115000"/>
-              </a:lnSpc>
-              <a:buNone/>
-            </a:pPr>
-            <a:r>
-              <a:rPr lang="en-US" sz="1282" dirty="0">
+            <a:endParaRPr lang="en-US" sz="1141" dirty="0"/>
+          </a:p>
+          <a:p>
+            <a:pPr indent="0" marL="0">
+              <a:lnSpc>
+                <a:spcPct val="115000"/>
+              </a:lnSpc>
+              <a:buNone/>
+            </a:pPr>
+            <a:r>
+              <a:rPr lang="en-US" sz="1141" dirty="0">
                 <a:solidFill>
                   <a:srgbClr val="0F172A"/>
                 </a:solidFill>
@@ -13065,7 +13065,7 @@
               </a:rPr>
               <a:t>X: ['age', 'income', 'score']</a:t>
             </a:r>
-            <a:endParaRPr lang="en-US" sz="1282" dirty="0"/>
+            <a:endParaRPr lang="en-US" sz="1141" dirty="0"/>
           </a:p>
         </p:txBody>
       </p:sp>
@@ -14367,7 +14367,7 @@
               <a:buNone/>
             </a:pPr>
             <a:r>
-              <a:rPr lang="en-US" sz="1150" dirty="0">
+              <a:rPr lang="en-US" sz="1000" dirty="0">
                 <a:solidFill>
                   <a:srgbClr val="334155"/>
                 </a:solidFill>
@@ -14377,7 +14377,7 @@
               </a:rPr>
               <a:t>append()  ·  extend()</a:t>
             </a:r>
-            <a:endParaRPr lang="en-US" sz="1150" dirty="0"/>
+            <a:endParaRPr lang="en-US" sz="1000" dirty="0"/>
           </a:p>
         </p:txBody>
       </p:sp>
@@ -14550,7 +14550,7 @@
               <a:buNone/>
             </a:pPr>
             <a:r>
-              <a:rPr lang="en-US" sz="1150" dirty="0">
+              <a:rPr lang="en-US" sz="1000" dirty="0">
                 <a:solidFill>
                   <a:srgbClr val="334155"/>
                 </a:solidFill>
@@ -14560,7 +14560,7 @@
               </a:rPr>
               <a:t>pop()  ·  remove()</a:t>
             </a:r>
-            <a:endParaRPr lang="en-US" sz="1150" dirty="0"/>
+            <a:endParaRPr lang="en-US" sz="1000" dirty="0"/>
           </a:p>
         </p:txBody>
       </p:sp>
@@ -14733,7 +14733,7 @@
               <a:buNone/>
             </a:pPr>
             <a:r>
-              <a:rPr lang="en-US" sz="1150" dirty="0">
+              <a:rPr lang="en-US" sz="1000" dirty="0">
                 <a:solidFill>
                   <a:srgbClr val="334155"/>
                 </a:solidFill>
@@ -14743,7 +14743,7 @@
               </a:rPr>
               <a:t>for / while  ·  break</a:t>
             </a:r>
-            <a:endParaRPr lang="en-US" sz="1150" dirty="0"/>
+            <a:endParaRPr lang="en-US" sz="1000" dirty="0"/>
           </a:p>
         </p:txBody>
       </p:sp>
@@ -14916,7 +14916,7 @@
               <a:buNone/>
             </a:pPr>
             <a:r>
-              <a:rPr lang="en-US" sz="1150" dirty="0">
+              <a:rPr lang="en-US" sz="1000" dirty="0">
                 <a:solidFill>
                   <a:srgbClr val="334155"/>
                 </a:solidFill>
@@ -14926,7 +14926,7 @@
               </a:rPr>
               <a:t>def  ·  return</a:t>
             </a:r>
-            <a:endParaRPr lang="en-US" sz="1150" dirty="0"/>
+            <a:endParaRPr lang="en-US" sz="1000" dirty="0"/>
           </a:p>
         </p:txBody>
       </p:sp>
@@ -15099,7 +15099,7 @@
               <a:buNone/>
             </a:pPr>
             <a:r>
-              <a:rPr lang="en-US" sz="1150" dirty="0">
+              <a:rPr lang="en-US" sz="1000" dirty="0">
                 <a:solidFill>
                   <a:srgbClr val="334155"/>
                 </a:solidFill>
@@ -15109,7 +15109,7 @@
               </a:rPr>
               <a:t>np.array()  ·  reshape()</a:t>
             </a:r>
-            <a:endParaRPr lang="en-US" sz="1150" dirty="0"/>
+            <a:endParaRPr lang="en-US" sz="1000" dirty="0"/>
           </a:p>
         </p:txBody>
       </p:sp>
@@ -15287,7 +15287,7 @@
               <a:buNone/>
             </a:pPr>
             <a:r>
-              <a:rPr lang="en-US" sz="2600" b="1" dirty="0">
+              <a:rPr lang="en-US" sz="2100" b="1" dirty="0">
                 <a:solidFill>
                   <a:srgbClr val="FFFFFF"/>
                 </a:solidFill>
@@ -15297,7 +15297,7 @@
               </a:rPr>
               <a:t>값이 필요하면 pop, 없애기만 하면 remove</a:t>
             </a:r>
-            <a:endParaRPr lang="en-US" sz="2600" dirty="0"/>
+            <a:endParaRPr lang="en-US" sz="2100" dirty="0"/>
           </a:p>
         </p:txBody>
       </p:sp>
@@ -16788,7 +16788,7 @@
               <a:buNone/>
             </a:pPr>
             <a:r>
-              <a:rPr lang="en-US" sz="1396" b="1" dirty="0">
+              <a:rPr lang="en-US" sz="1600" b="1" dirty="0">
                 <a:solidFill>
                   <a:srgbClr val="93C5FD"/>
                 </a:solidFill>
@@ -16805,7 +16805,7 @@
               <a:buNone/>
             </a:pPr>
             <a:r>
-              <a:rPr lang="en-US" sz="1396" dirty="0">
+              <a:rPr lang="en-US" sz="1600" dirty="0">
                 <a:solidFill>
                   <a:srgbClr val="E5E7EB"/>
                 </a:solidFill>
@@ -16822,7 +16822,7 @@
               <a:buNone/>
             </a:pPr>
             <a:r>
-              <a:rPr lang="en-US" sz="1396" b="1" dirty="0">
+              <a:rPr lang="en-US" sz="1600" b="1" dirty="0">
                 <a:solidFill>
                   <a:srgbClr val="93C5FD"/>
                 </a:solidFill>
@@ -16839,7 +16839,7 @@
               <a:buNone/>
             </a:pPr>
             <a:r>
-              <a:rPr lang="en-US" sz="1396" dirty="0">
+              <a:rPr lang="en-US" sz="1600" dirty="0">
                 <a:solidFill>
                   <a:srgbClr val="E5E7EB"/>
                 </a:solidFill>
@@ -16856,7 +16856,7 @@
               <a:buNone/>
             </a:pPr>
             <a:r>
-              <a:rPr lang="en-US" sz="1396" b="1" dirty="0">
+              <a:rPr lang="en-US" sz="1600" b="1" dirty="0">
                 <a:solidFill>
                   <a:srgbClr val="93C5FD"/>
                 </a:solidFill>
@@ -16873,7 +16873,7 @@
               <a:buNone/>
             </a:pPr>
             <a:r>
-              <a:rPr lang="en-US" sz="1396" dirty="0">
+              <a:rPr lang="en-US" sz="1600" dirty="0">
                 <a:solidFill>
                   <a:srgbClr val="E5E7EB"/>
                 </a:solidFill>
@@ -16889,17 +16889,17 @@
               </a:lnSpc>
               <a:buNone/>
             </a:pPr>
-            <a:endParaRPr lang="en-US" sz="1396" dirty="0"/>
-          </a:p>
-          <a:p>
-            <a:pPr indent="0" marL="0">
-              <a:lnSpc>
-                <a:spcPct val="115000"/>
-              </a:lnSpc>
-              <a:buNone/>
-            </a:pPr>
-            <a:r>
-              <a:rPr lang="en-US" sz="1396" dirty="0">
+            <a:endParaRPr lang="en-US" sz="1600" dirty="0"/>
+          </a:p>
+          <a:p>
+            <a:pPr indent="0" marL="0">
+              <a:lnSpc>
+                <a:spcPct val="115000"/>
+              </a:lnSpc>
+              <a:buNone/>
+            </a:pPr>
+            <a:r>
+              <a:rPr lang="en-US" sz="1600" dirty="0">
                 <a:solidFill>
                   <a:srgbClr val="E5E7EB"/>
                 </a:solidFill>
@@ -16916,7 +16916,7 @@
               <a:buNone/>
             </a:pPr>
             <a:r>
-              <a:rPr lang="en-US" sz="1396" b="1" dirty="0">
+              <a:rPr lang="en-US" sz="1600" b="1" dirty="0">
                 <a:solidFill>
                   <a:srgbClr val="93C5FD"/>
                 </a:solidFill>
@@ -16933,7 +16933,7 @@
               <a:buNone/>
             </a:pPr>
             <a:r>
-              <a:rPr lang="en-US" sz="1396" dirty="0">
+              <a:rPr lang="en-US" sz="1600" dirty="0">
                 <a:solidFill>
                   <a:srgbClr val="E5E7EB"/>
                 </a:solidFill>
@@ -16950,7 +16950,7 @@
               <a:buNone/>
             </a:pPr>
             <a:r>
-              <a:rPr lang="en-US" sz="1396" dirty="0">
+              <a:rPr lang="en-US" sz="1600" dirty="0">
                 <a:solidFill>
                   <a:srgbClr val="FCD34D"/>
                 </a:solidFill>
@@ -16967,7 +16967,7 @@
               <a:buNone/>
             </a:pPr>
             <a:r>
-              <a:rPr lang="en-US" sz="1396" dirty="0">
+              <a:rPr lang="en-US" sz="1600" dirty="0">
                 <a:solidFill>
                   <a:srgbClr val="E5E7EB"/>
                 </a:solidFill>
@@ -16983,17 +16983,17 @@
               </a:lnSpc>
               <a:buNone/>
             </a:pPr>
-            <a:endParaRPr lang="en-US" sz="1396" dirty="0"/>
-          </a:p>
-          <a:p>
-            <a:pPr indent="0" marL="0">
-              <a:lnSpc>
-                <a:spcPct val="115000"/>
-              </a:lnSpc>
-              <a:buNone/>
-            </a:pPr>
-            <a:r>
-              <a:rPr lang="en-US" sz="1396" b="1" dirty="0">
+            <a:endParaRPr lang="en-US" sz="1600" dirty="0"/>
+          </a:p>
+          <a:p>
+            <a:pPr indent="0" marL="0">
+              <a:lnSpc>
+                <a:spcPct val="115000"/>
+              </a:lnSpc>
+              <a:buNone/>
+            </a:pPr>
+            <a:r>
+              <a:rPr lang="en-US" sz="1600" b="1" dirty="0">
                 <a:solidFill>
                   <a:srgbClr val="93C5FD"/>
                 </a:solidFill>
@@ -17010,7 +17010,7 @@
               <a:buNone/>
             </a:pPr>
             <a:r>
-              <a:rPr lang="en-US" sz="1396" dirty="0">
+              <a:rPr lang="en-US" sz="1600" dirty="0">
                 <a:solidFill>
                   <a:srgbClr val="E5E7EB"/>
                 </a:solidFill>
@@ -17027,7 +17027,7 @@
               <a:buNone/>
             </a:pPr>
             <a:r>
-              <a:rPr lang="en-US" sz="1396" dirty="0">
+              <a:rPr lang="en-US" sz="1600" dirty="0">
                 <a:solidFill>
                   <a:srgbClr val="FCD34D"/>
                 </a:solidFill>
@@ -17044,7 +17044,7 @@
               <a:buNone/>
             </a:pPr>
             <a:r>
-              <a:rPr lang="en-US" sz="1396" dirty="0">
+              <a:rPr lang="en-US" sz="1600" dirty="0">
                 <a:solidFill>
                   <a:srgbClr val="E5E7EB"/>
                 </a:solidFill>
@@ -17054,7 +17054,7 @@
               </a:rPr>
               <a:t>)</a:t>
             </a:r>
-            <a:endParaRPr lang="en-US" sz="1396" dirty="0"/>
+            <a:endParaRPr lang="en-US" sz="1600" dirty="0"/>
           </a:p>
         </p:txBody>
       </p:sp>
@@ -17152,7 +17152,7 @@
               <a:buNone/>
             </a:pPr>
             <a:r>
-              <a:rPr lang="en-US" sz="1255" dirty="0">
+              <a:rPr lang="en-US" sz="1141" dirty="0">
                 <a:solidFill>
                   <a:srgbClr val="0F172A"/>
                 </a:solidFill>
@@ -17162,17 +17162,17 @@
               </a:rPr>
               <a:t>학습 중... epoch 1</a:t>
             </a:r>
-            <a:endParaRPr lang="en-US" sz="1255" dirty="0"/>
-          </a:p>
-          <a:p>
-            <a:pPr indent="0" marL="0">
-              <a:lnSpc>
-                <a:spcPct val="115000"/>
-              </a:lnSpc>
-              <a:buNone/>
-            </a:pPr>
-            <a:r>
-              <a:rPr lang="en-US" sz="1255" dirty="0">
+            <a:endParaRPr lang="en-US" sz="1141" dirty="0"/>
+          </a:p>
+          <a:p>
+            <a:pPr indent="0" marL="0">
+              <a:lnSpc>
+                <a:spcPct val="115000"/>
+              </a:lnSpc>
+              <a:buNone/>
+            </a:pPr>
+            <a:r>
+              <a:rPr lang="en-US" sz="1141" dirty="0">
                 <a:solidFill>
                   <a:srgbClr val="0F172A"/>
                 </a:solidFill>
@@ -17182,17 +17182,17 @@
               </a:rPr>
               <a:t>학습 중... epoch 2</a:t>
             </a:r>
-            <a:endParaRPr lang="en-US" sz="1255" dirty="0"/>
-          </a:p>
-          <a:p>
-            <a:pPr indent="0" marL="0">
-              <a:lnSpc>
-                <a:spcPct val="115000"/>
-              </a:lnSpc>
-              <a:buNone/>
-            </a:pPr>
-            <a:r>
-              <a:rPr lang="en-US" sz="1255" dirty="0">
+            <a:endParaRPr lang="en-US" sz="1141" dirty="0"/>
+          </a:p>
+          <a:p>
+            <a:pPr indent="0" marL="0">
+              <a:lnSpc>
+                <a:spcPct val="115000"/>
+              </a:lnSpc>
+              <a:buNone/>
+            </a:pPr>
+            <a:r>
+              <a:rPr lang="en-US" sz="1141" dirty="0">
                 <a:solidFill>
                   <a:srgbClr val="0F172A"/>
                 </a:solidFill>
@@ -17202,17 +17202,17 @@
               </a:rPr>
               <a:t>학습 중... epoch 3</a:t>
             </a:r>
-            <a:endParaRPr lang="en-US" sz="1255" dirty="0"/>
-          </a:p>
-          <a:p>
-            <a:pPr indent="0" marL="0">
-              <a:lnSpc>
-                <a:spcPct val="115000"/>
-              </a:lnSpc>
-              <a:buNone/>
-            </a:pPr>
-            <a:r>
-              <a:rPr lang="en-US" sz="1255" dirty="0">
+            <a:endParaRPr lang="en-US" sz="1141" dirty="0"/>
+          </a:p>
+          <a:p>
+            <a:pPr indent="0" marL="0">
+              <a:lnSpc>
+                <a:spcPct val="115000"/>
+              </a:lnSpc>
+              <a:buNone/>
+            </a:pPr>
+            <a:r>
+              <a:rPr lang="en-US" sz="1141" dirty="0">
                 <a:solidFill>
                   <a:srgbClr val="0F172A"/>
                 </a:solidFill>
@@ -17222,7 +17222,7 @@
               </a:rPr>
               <a:t>끝</a:t>
             </a:r>
-            <a:endParaRPr lang="en-US" sz="1255" dirty="0"/>
+            <a:endParaRPr lang="en-US" sz="1141" dirty="0"/>
           </a:p>
         </p:txBody>
       </p:sp>
@@ -17618,7 +17618,7 @@
               <a:buNone/>
             </a:pPr>
             <a:r>
-              <a:rPr lang="en-US" sz="1216" dirty="0">
+              <a:rPr lang="en-US" sz="1304" dirty="0">
                 <a:solidFill>
                   <a:srgbClr val="E5E7EB"/>
                 </a:solidFill>
@@ -17634,17 +17634,17 @@
               </a:lnSpc>
               <a:buNone/>
             </a:pPr>
-            <a:endParaRPr lang="en-US" sz="1216" dirty="0"/>
-          </a:p>
-          <a:p>
-            <a:pPr indent="0" marL="0">
-              <a:lnSpc>
-                <a:spcPct val="115000"/>
-              </a:lnSpc>
-              <a:buNone/>
-            </a:pPr>
-            <a:r>
-              <a:rPr lang="en-US" sz="1216" dirty="0">
+            <a:endParaRPr lang="en-US" sz="1304" dirty="0"/>
+          </a:p>
+          <a:p>
+            <a:pPr indent="0" marL="0">
+              <a:lnSpc>
+                <a:spcPct val="115000"/>
+              </a:lnSpc>
+              <a:buNone/>
+            </a:pPr>
+            <a:r>
+              <a:rPr lang="en-US" sz="1304" dirty="0">
                 <a:solidFill>
                   <a:srgbClr val="E5E7EB"/>
                 </a:solidFill>
@@ -17660,17 +17660,17 @@
               </a:lnSpc>
               <a:buNone/>
             </a:pPr>
-            <a:endParaRPr lang="en-US" sz="1216" dirty="0"/>
-          </a:p>
-          <a:p>
-            <a:pPr indent="0" marL="0">
-              <a:lnSpc>
-                <a:spcPct val="115000"/>
-              </a:lnSpc>
-              <a:buNone/>
-            </a:pPr>
-            <a:r>
-              <a:rPr lang="en-US" sz="1216" b="1" dirty="0">
+            <a:endParaRPr lang="en-US" sz="1304" dirty="0"/>
+          </a:p>
+          <a:p>
+            <a:pPr indent="0" marL="0">
+              <a:lnSpc>
+                <a:spcPct val="115000"/>
+              </a:lnSpc>
+              <a:buNone/>
+            </a:pPr>
+            <a:r>
+              <a:rPr lang="en-US" sz="1304" b="1" dirty="0">
                 <a:solidFill>
                   <a:srgbClr val="93C5FD"/>
                 </a:solidFill>
@@ -17687,7 +17687,7 @@
               <a:buNone/>
             </a:pPr>
             <a:r>
-              <a:rPr lang="en-US" sz="1216" dirty="0">
+              <a:rPr lang="en-US" sz="1304" dirty="0">
                 <a:solidFill>
                   <a:srgbClr val="E5E7EB"/>
                 </a:solidFill>
@@ -17703,17 +17703,17 @@
               </a:lnSpc>
               <a:buNone/>
             </a:pPr>
-            <a:endParaRPr lang="en-US" sz="1216" dirty="0"/>
-          </a:p>
-          <a:p>
-            <a:pPr indent="0" marL="0">
-              <a:lnSpc>
-                <a:spcPct val="115000"/>
-              </a:lnSpc>
-              <a:buNone/>
-            </a:pPr>
-            <a:r>
-              <a:rPr lang="en-US" sz="1216" dirty="0">
+            <a:endParaRPr lang="en-US" sz="1304" dirty="0"/>
+          </a:p>
+          <a:p>
+            <a:pPr indent="0" marL="0">
+              <a:lnSpc>
+                <a:spcPct val="115000"/>
+              </a:lnSpc>
+              <a:buNone/>
+            </a:pPr>
+            <a:r>
+              <a:rPr lang="en-US" sz="1304" dirty="0">
                 <a:solidFill>
                   <a:srgbClr val="E5E7EB"/>
                 </a:solidFill>
@@ -17729,17 +17729,17 @@
               </a:lnSpc>
               <a:buNone/>
             </a:pPr>
-            <a:endParaRPr lang="en-US" sz="1216" dirty="0"/>
-          </a:p>
-          <a:p>
-            <a:pPr indent="0" marL="0">
-              <a:lnSpc>
-                <a:spcPct val="115000"/>
-              </a:lnSpc>
-              <a:buNone/>
-            </a:pPr>
-            <a:r>
-              <a:rPr lang="en-US" sz="1216" dirty="0">
+            <a:endParaRPr lang="en-US" sz="1304" dirty="0"/>
+          </a:p>
+          <a:p>
+            <a:pPr indent="0" marL="0">
+              <a:lnSpc>
+                <a:spcPct val="115000"/>
+              </a:lnSpc>
+              <a:buNone/>
+            </a:pPr>
+            <a:r>
+              <a:rPr lang="en-US" sz="1304" dirty="0">
                 <a:solidFill>
                   <a:srgbClr val="E5E7EB"/>
                 </a:solidFill>
@@ -17756,7 +17756,7 @@
               <a:buNone/>
             </a:pPr>
             <a:r>
-              <a:rPr lang="en-US" sz="1216" dirty="0">
+              <a:rPr lang="en-US" sz="1304" dirty="0">
                 <a:solidFill>
                   <a:srgbClr val="94A3B8"/>
                 </a:solidFill>
@@ -17772,17 +17772,17 @@
               </a:lnSpc>
               <a:buNone/>
             </a:pPr>
-            <a:endParaRPr lang="en-US" sz="1216" dirty="0"/>
-          </a:p>
-          <a:p>
-            <a:pPr indent="0" marL="0">
-              <a:lnSpc>
-                <a:spcPct val="115000"/>
-              </a:lnSpc>
-              <a:buNone/>
-            </a:pPr>
-            <a:r>
-              <a:rPr lang="en-US" sz="1216" dirty="0">
+            <a:endParaRPr lang="en-US" sz="1304" dirty="0"/>
+          </a:p>
+          <a:p>
+            <a:pPr indent="0" marL="0">
+              <a:lnSpc>
+                <a:spcPct val="115000"/>
+              </a:lnSpc>
+              <a:buNone/>
+            </a:pPr>
+            <a:r>
+              <a:rPr lang="en-US" sz="1304" dirty="0">
                 <a:solidFill>
                   <a:srgbClr val="E5E7EB"/>
                 </a:solidFill>
@@ -17799,7 +17799,7 @@
               <a:buNone/>
             </a:pPr>
             <a:r>
-              <a:rPr lang="en-US" sz="1216" b="1" dirty="0">
+              <a:rPr lang="en-US" sz="1304" b="1" dirty="0">
                 <a:solidFill>
                   <a:srgbClr val="93C5FD"/>
                 </a:solidFill>
@@ -17816,7 +17816,7 @@
               <a:buNone/>
             </a:pPr>
             <a:r>
-              <a:rPr lang="en-US" sz="1216" dirty="0">
+              <a:rPr lang="en-US" sz="1304" dirty="0">
                 <a:solidFill>
                   <a:srgbClr val="E5E7EB"/>
                 </a:solidFill>
@@ -17833,7 +17833,7 @@
               <a:buNone/>
             </a:pPr>
             <a:r>
-              <a:rPr lang="en-US" sz="1216" dirty="0">
+              <a:rPr lang="en-US" sz="1304" dirty="0">
                 <a:solidFill>
                   <a:srgbClr val="FCD34D"/>
                 </a:solidFill>
@@ -17850,7 +17850,7 @@
               <a:buNone/>
             </a:pPr>
             <a:r>
-              <a:rPr lang="en-US" sz="1216" dirty="0">
+              <a:rPr lang="en-US" sz="1304" dirty="0">
                 <a:solidFill>
                   <a:srgbClr val="E5E7EB"/>
                 </a:solidFill>
@@ -17866,17 +17866,17 @@
               </a:lnSpc>
               <a:buNone/>
             </a:pPr>
-            <a:endParaRPr lang="en-US" sz="1216" dirty="0"/>
-          </a:p>
-          <a:p>
-            <a:pPr indent="0" marL="0">
-              <a:lnSpc>
-                <a:spcPct val="115000"/>
-              </a:lnSpc>
-              <a:buNone/>
-            </a:pPr>
-            <a:r>
-              <a:rPr lang="en-US" sz="1216" b="1" dirty="0">
+            <a:endParaRPr lang="en-US" sz="1304" dirty="0"/>
+          </a:p>
+          <a:p>
+            <a:pPr indent="0" marL="0">
+              <a:lnSpc>
+                <a:spcPct val="115000"/>
+              </a:lnSpc>
+              <a:buNone/>
+            </a:pPr>
+            <a:r>
+              <a:rPr lang="en-US" sz="1304" b="1" dirty="0">
                 <a:solidFill>
                   <a:srgbClr val="93C5FD"/>
                 </a:solidFill>
@@ -17893,7 +17893,7 @@
               <a:buNone/>
             </a:pPr>
             <a:r>
-              <a:rPr lang="en-US" sz="1216" dirty="0">
+              <a:rPr lang="en-US" sz="1304" dirty="0">
                 <a:solidFill>
                   <a:srgbClr val="E5E7EB"/>
                 </a:solidFill>
@@ -17910,7 +17910,7 @@
               <a:buNone/>
             </a:pPr>
             <a:r>
-              <a:rPr lang="en-US" sz="1216" dirty="0">
+              <a:rPr lang="en-US" sz="1304" dirty="0">
                 <a:solidFill>
                   <a:srgbClr val="FCD34D"/>
                 </a:solidFill>
@@ -17927,7 +17927,7 @@
               <a:buNone/>
             </a:pPr>
             <a:r>
-              <a:rPr lang="en-US" sz="1216" dirty="0">
+              <a:rPr lang="en-US" sz="1304" dirty="0">
                 <a:solidFill>
                   <a:srgbClr val="E5E7EB"/>
                 </a:solidFill>
@@ -17937,7 +17937,7 @@
               </a:rPr>
               <a:t>)</a:t>
             </a:r>
-            <a:endParaRPr lang="en-US" sz="1216" dirty="0"/>
+            <a:endParaRPr lang="en-US" sz="1304" dirty="0"/>
           </a:p>
         </p:txBody>
       </p:sp>
@@ -18035,7 +18035,7 @@
               <a:buNone/>
             </a:pPr>
             <a:r>
-              <a:rPr lang="en-US" sz="1000" dirty="0">
+              <a:rPr lang="en-US" sz="862" dirty="0">
                 <a:solidFill>
                   <a:srgbClr val="0F172A"/>
                 </a:solidFill>
@@ -18045,17 +18045,17 @@
               </a:rPr>
               <a:t>epoch 1: loss 0.70</a:t>
             </a:r>
-            <a:endParaRPr lang="en-US" sz="1000" dirty="0"/>
-          </a:p>
-          <a:p>
-            <a:pPr indent="0" marL="0">
-              <a:lnSpc>
-                <a:spcPct val="115000"/>
-              </a:lnSpc>
-              <a:buNone/>
-            </a:pPr>
-            <a:r>
-              <a:rPr lang="en-US" sz="1000" dirty="0">
+            <a:endParaRPr lang="en-US" sz="862" dirty="0"/>
+          </a:p>
+          <a:p>
+            <a:pPr indent="0" marL="0">
+              <a:lnSpc>
+                <a:spcPct val="115000"/>
+              </a:lnSpc>
+              <a:buNone/>
+            </a:pPr>
+            <a:r>
+              <a:rPr lang="en-US" sz="862" dirty="0">
                 <a:solidFill>
                   <a:srgbClr val="0F172A"/>
                 </a:solidFill>
@@ -18065,17 +18065,17 @@
               </a:rPr>
               <a:t>epoch 2: loss 0.49</a:t>
             </a:r>
-            <a:endParaRPr lang="en-US" sz="1000" dirty="0"/>
-          </a:p>
-          <a:p>
-            <a:pPr indent="0" marL="0">
-              <a:lnSpc>
-                <a:spcPct val="115000"/>
-              </a:lnSpc>
-              <a:buNone/>
-            </a:pPr>
-            <a:r>
-              <a:rPr lang="en-US" sz="1000" dirty="0">
+            <a:endParaRPr lang="en-US" sz="862" dirty="0"/>
+          </a:p>
+          <a:p>
+            <a:pPr indent="0" marL="0">
+              <a:lnSpc>
+                <a:spcPct val="115000"/>
+              </a:lnSpc>
+              <a:buNone/>
+            </a:pPr>
+            <a:r>
+              <a:rPr lang="en-US" sz="862" dirty="0">
                 <a:solidFill>
                   <a:srgbClr val="0F172A"/>
                 </a:solidFill>
@@ -18085,17 +18085,17 @@
               </a:rPr>
               <a:t>epoch 3: loss 0.34</a:t>
             </a:r>
-            <a:endParaRPr lang="en-US" sz="1000" dirty="0"/>
-          </a:p>
-          <a:p>
-            <a:pPr indent="0" marL="0">
-              <a:lnSpc>
-                <a:spcPct val="115000"/>
-              </a:lnSpc>
-              <a:buNone/>
-            </a:pPr>
-            <a:r>
-              <a:rPr lang="en-US" sz="1000" dirty="0">
+            <a:endParaRPr lang="en-US" sz="862" dirty="0"/>
+          </a:p>
+          <a:p>
+            <a:pPr indent="0" marL="0">
+              <a:lnSpc>
+                <a:spcPct val="115000"/>
+              </a:lnSpc>
+              <a:buNone/>
+            </a:pPr>
+            <a:r>
+              <a:rPr lang="en-US" sz="862" dirty="0">
                 <a:solidFill>
                   <a:srgbClr val="0F172A"/>
                 </a:solidFill>
@@ -18105,17 +18105,17 @@
               </a:rPr>
               <a:t>epoch 4: loss 0.24</a:t>
             </a:r>
-            <a:endParaRPr lang="en-US" sz="1000" dirty="0"/>
-          </a:p>
-          <a:p>
-            <a:pPr indent="0" marL="0">
-              <a:lnSpc>
-                <a:spcPct val="115000"/>
-              </a:lnSpc>
-              <a:buNone/>
-            </a:pPr>
-            <a:r>
-              <a:rPr lang="en-US" sz="1000" dirty="0">
+            <a:endParaRPr lang="en-US" sz="862" dirty="0"/>
+          </a:p>
+          <a:p>
+            <a:pPr indent="0" marL="0">
+              <a:lnSpc>
+                <a:spcPct val="115000"/>
+              </a:lnSpc>
+              <a:buNone/>
+            </a:pPr>
+            <a:r>
+              <a:rPr lang="en-US" sz="862" dirty="0">
                 <a:solidFill>
                   <a:srgbClr val="0F172A"/>
                 </a:solidFill>
@@ -18125,7 +18125,7 @@
               </a:rPr>
               <a:t>목표 도달</a:t>
             </a:r>
-            <a:endParaRPr lang="en-US" sz="1000" dirty="0"/>
+            <a:endParaRPr lang="en-US" sz="862" dirty="0"/>
           </a:p>
         </p:txBody>
       </p:sp>
@@ -18501,7 +18501,7 @@
               <a:buNone/>
             </a:pPr>
             <a:r>
-              <a:rPr lang="en-US" sz="1200" dirty="0">
+              <a:rPr lang="en-US" sz="1176" dirty="0">
                 <a:solidFill>
                   <a:srgbClr val="E5E7EB"/>
                 </a:solidFill>
@@ -18517,17 +18517,17 @@
               </a:lnSpc>
               <a:buNone/>
             </a:pPr>
-            <a:endParaRPr lang="en-US" sz="1200" dirty="0"/>
-          </a:p>
-          <a:p>
-            <a:pPr indent="0" marL="0">
-              <a:lnSpc>
-                <a:spcPct val="115000"/>
-              </a:lnSpc>
-              <a:buNone/>
-            </a:pPr>
-            <a:r>
-              <a:rPr lang="en-US" sz="1200" dirty="0">
+            <a:endParaRPr lang="en-US" sz="1176" dirty="0"/>
+          </a:p>
+          <a:p>
+            <a:pPr indent="0" marL="0">
+              <a:lnSpc>
+                <a:spcPct val="115000"/>
+              </a:lnSpc>
+              <a:buNone/>
+            </a:pPr>
+            <a:r>
+              <a:rPr lang="en-US" sz="1176" dirty="0">
                 <a:solidFill>
                   <a:srgbClr val="E5E7EB"/>
                 </a:solidFill>
@@ -18543,17 +18543,17 @@
               </a:lnSpc>
               <a:buNone/>
             </a:pPr>
-            <a:endParaRPr lang="en-US" sz="1200" dirty="0"/>
-          </a:p>
-          <a:p>
-            <a:pPr indent="0" marL="0">
-              <a:lnSpc>
-                <a:spcPct val="115000"/>
-              </a:lnSpc>
-              <a:buNone/>
-            </a:pPr>
-            <a:r>
-              <a:rPr lang="en-US" sz="1200" b="1" dirty="0">
+            <a:endParaRPr lang="en-US" sz="1176" dirty="0"/>
+          </a:p>
+          <a:p>
+            <a:pPr indent="0" marL="0">
+              <a:lnSpc>
+                <a:spcPct val="115000"/>
+              </a:lnSpc>
+              <a:buNone/>
+            </a:pPr>
+            <a:r>
+              <a:rPr lang="en-US" sz="1176" b="1" dirty="0">
                 <a:solidFill>
                   <a:srgbClr val="93C5FD"/>
                 </a:solidFill>
@@ -18570,7 +18570,7 @@
               <a:buNone/>
             </a:pPr>
             <a:r>
-              <a:rPr lang="en-US" sz="1200" dirty="0">
+              <a:rPr lang="en-US" sz="1176" dirty="0">
                 <a:solidFill>
                   <a:srgbClr val="E5E7EB"/>
                 </a:solidFill>
@@ -18587,7 +18587,7 @@
               <a:buNone/>
             </a:pPr>
             <a:r>
-              <a:rPr lang="en-US" sz="1200" b="1" dirty="0">
+              <a:rPr lang="en-US" sz="1176" b="1" dirty="0">
                 <a:solidFill>
                   <a:srgbClr val="93C5FD"/>
                 </a:solidFill>
@@ -18604,7 +18604,7 @@
               <a:buNone/>
             </a:pPr>
             <a:r>
-              <a:rPr lang="en-US" sz="1200" dirty="0">
+              <a:rPr lang="en-US" sz="1176" dirty="0">
                 <a:solidFill>
                   <a:srgbClr val="E5E7EB"/>
                 </a:solidFill>
@@ -18621,7 +18621,7 @@
               <a:buNone/>
             </a:pPr>
             <a:r>
-              <a:rPr lang="en-US" sz="1200" b="1" dirty="0">
+              <a:rPr lang="en-US" sz="1176" b="1" dirty="0">
                 <a:solidFill>
                   <a:srgbClr val="93C5FD"/>
                 </a:solidFill>
@@ -18638,7 +18638,7 @@
               <a:buNone/>
             </a:pPr>
             <a:r>
-              <a:rPr lang="en-US" sz="1200" dirty="0">
+              <a:rPr lang="en-US" sz="1176" dirty="0">
                 <a:solidFill>
                   <a:srgbClr val="E5E7EB"/>
                 </a:solidFill>
@@ -18654,17 +18654,17 @@
               </a:lnSpc>
               <a:buNone/>
             </a:pPr>
-            <a:endParaRPr lang="en-US" sz="1200" dirty="0"/>
-          </a:p>
-          <a:p>
-            <a:pPr indent="0" marL="0">
-              <a:lnSpc>
-                <a:spcPct val="115000"/>
-              </a:lnSpc>
-              <a:buNone/>
-            </a:pPr>
-            <a:r>
-              <a:rPr lang="en-US" sz="1200" dirty="0">
+            <a:endParaRPr lang="en-US" sz="1176" dirty="0"/>
+          </a:p>
+          <a:p>
+            <a:pPr indent="0" marL="0">
+              <a:lnSpc>
+                <a:spcPct val="115000"/>
+              </a:lnSpc>
+              <a:buNone/>
+            </a:pPr>
+            <a:r>
+              <a:rPr lang="en-US" sz="1176" dirty="0">
                 <a:solidFill>
                   <a:srgbClr val="E5E7EB"/>
                 </a:solidFill>
@@ -18681,7 +18681,7 @@
               <a:buNone/>
             </a:pPr>
             <a:r>
-              <a:rPr lang="en-US" sz="1200" b="1" dirty="0">
+              <a:rPr lang="en-US" sz="1176" b="1" dirty="0">
                 <a:solidFill>
                   <a:srgbClr val="93C5FD"/>
                 </a:solidFill>
@@ -18698,7 +18698,7 @@
               <a:buNone/>
             </a:pPr>
             <a:r>
-              <a:rPr lang="en-US" sz="1200" dirty="0">
+              <a:rPr lang="en-US" sz="1176" dirty="0">
                 <a:solidFill>
                   <a:srgbClr val="E5E7EB"/>
                 </a:solidFill>
@@ -18714,17 +18714,17 @@
               </a:lnSpc>
               <a:buNone/>
             </a:pPr>
-            <a:endParaRPr lang="en-US" sz="1200" dirty="0"/>
-          </a:p>
-          <a:p>
-            <a:pPr indent="0" marL="0">
-              <a:lnSpc>
-                <a:spcPct val="115000"/>
-              </a:lnSpc>
-              <a:buNone/>
-            </a:pPr>
-            <a:r>
-              <a:rPr lang="en-US" sz="1200" dirty="0">
+            <a:endParaRPr lang="en-US" sz="1176" dirty="0"/>
+          </a:p>
+          <a:p>
+            <a:pPr indent="0" marL="0">
+              <a:lnSpc>
+                <a:spcPct val="115000"/>
+              </a:lnSpc>
+              <a:buNone/>
+            </a:pPr>
+            <a:r>
+              <a:rPr lang="en-US" sz="1176" dirty="0">
                 <a:solidFill>
                   <a:srgbClr val="E5E7EB"/>
                 </a:solidFill>
@@ -18741,7 +18741,7 @@
               <a:buNone/>
             </a:pPr>
             <a:r>
-              <a:rPr lang="en-US" sz="1200" b="1" dirty="0">
+              <a:rPr lang="en-US" sz="1176" b="1" dirty="0">
                 <a:solidFill>
                   <a:srgbClr val="93C5FD"/>
                 </a:solidFill>
@@ -18758,7 +18758,7 @@
               <a:buNone/>
             </a:pPr>
             <a:r>
-              <a:rPr lang="en-US" sz="1200" dirty="0">
+              <a:rPr lang="en-US" sz="1176" dirty="0">
                 <a:solidFill>
                   <a:srgbClr val="E5E7EB"/>
                 </a:solidFill>
@@ -18775,7 +18775,7 @@
               <a:buNone/>
             </a:pPr>
             <a:r>
-              <a:rPr lang="en-US" sz="1200" dirty="0">
+              <a:rPr lang="en-US" sz="1176" dirty="0">
                 <a:solidFill>
                   <a:srgbClr val="FCD34D"/>
                 </a:solidFill>
@@ -18792,7 +18792,7 @@
               <a:buNone/>
             </a:pPr>
             <a:r>
-              <a:rPr lang="en-US" sz="1200" dirty="0">
+              <a:rPr lang="en-US" sz="1176" dirty="0">
                 <a:solidFill>
                   <a:srgbClr val="E5E7EB"/>
                 </a:solidFill>
@@ -18808,17 +18808,17 @@
               </a:lnSpc>
               <a:buNone/>
             </a:pPr>
-            <a:endParaRPr lang="en-US" sz="1200" dirty="0"/>
-          </a:p>
-          <a:p>
-            <a:pPr indent="0" marL="0">
-              <a:lnSpc>
-                <a:spcPct val="115000"/>
-              </a:lnSpc>
-              <a:buNone/>
-            </a:pPr>
-            <a:r>
-              <a:rPr lang="en-US" sz="1200" dirty="0">
+            <a:endParaRPr lang="en-US" sz="1176" dirty="0"/>
+          </a:p>
+          <a:p>
+            <a:pPr indent="0" marL="0">
+              <a:lnSpc>
+                <a:spcPct val="115000"/>
+              </a:lnSpc>
+              <a:buNone/>
+            </a:pPr>
+            <a:r>
+              <a:rPr lang="en-US" sz="1176" dirty="0">
                 <a:solidFill>
                   <a:srgbClr val="E5E7EB"/>
                 </a:solidFill>
@@ -18835,7 +18835,7 @@
               <a:buNone/>
             </a:pPr>
             <a:r>
-              <a:rPr lang="en-US" sz="1200" b="1" dirty="0">
+              <a:rPr lang="en-US" sz="1176" b="1" dirty="0">
                 <a:solidFill>
                   <a:srgbClr val="93C5FD"/>
                 </a:solidFill>
@@ -18851,17 +18851,17 @@
               </a:lnSpc>
               <a:buNone/>
             </a:pPr>
-            <a:endParaRPr lang="en-US" sz="1200" dirty="0"/>
-          </a:p>
-          <a:p>
-            <a:pPr indent="0" marL="0">
-              <a:lnSpc>
-                <a:spcPct val="115000"/>
-              </a:lnSpc>
-              <a:buNone/>
-            </a:pPr>
-            <a:r>
-              <a:rPr lang="en-US" sz="1200" dirty="0">
+            <a:endParaRPr lang="en-US" sz="1176" dirty="0"/>
+          </a:p>
+          <a:p>
+            <a:pPr indent="0" marL="0">
+              <a:lnSpc>
+                <a:spcPct val="115000"/>
+              </a:lnSpc>
+              <a:buNone/>
+            </a:pPr>
+            <a:r>
+              <a:rPr lang="en-US" sz="1176" dirty="0">
                 <a:solidFill>
                   <a:srgbClr val="E5E7EB"/>
                 </a:solidFill>
@@ -18878,7 +18878,7 @@
               <a:buNone/>
             </a:pPr>
             <a:r>
-              <a:rPr lang="en-US" sz="1200" b="1" dirty="0">
+              <a:rPr lang="en-US" sz="1176" b="1" dirty="0">
                 <a:solidFill>
                   <a:srgbClr val="93C5FD"/>
                 </a:solidFill>
@@ -18895,7 +18895,7 @@
               <a:buNone/>
             </a:pPr>
             <a:r>
-              <a:rPr lang="en-US" sz="1200" dirty="0">
+              <a:rPr lang="en-US" sz="1176" dirty="0">
                 <a:solidFill>
                   <a:srgbClr val="E5E7EB"/>
                 </a:solidFill>
@@ -18912,7 +18912,7 @@
               <a:buNone/>
             </a:pPr>
             <a:r>
-              <a:rPr lang="en-US" sz="1200" dirty="0">
+              <a:rPr lang="en-US" sz="1176" dirty="0">
                 <a:solidFill>
                   <a:srgbClr val="FCD34D"/>
                 </a:solidFill>
@@ -18929,7 +18929,7 @@
               <a:buNone/>
             </a:pPr>
             <a:r>
-              <a:rPr lang="en-US" sz="1200" dirty="0">
+              <a:rPr lang="en-US" sz="1176" dirty="0">
                 <a:solidFill>
                   <a:srgbClr val="E5E7EB"/>
                 </a:solidFill>
@@ -18939,7 +18939,7 @@
               </a:rPr>
               <a:t>)</a:t>
             </a:r>
-            <a:endParaRPr lang="en-US" sz="1200" dirty="0"/>
+            <a:endParaRPr lang="en-US" sz="1176" dirty="0"/>
           </a:p>
         </p:txBody>
       </p:sp>
@@ -19037,7 +19037,7 @@
               <a:buNone/>
             </a:pPr>
             <a:r>
-              <a:rPr lang="en-US" sz="1000" dirty="0">
+              <a:rPr lang="en-US" sz="824" dirty="0">
                 <a:solidFill>
                   <a:srgbClr val="0F172A"/>
                 </a:solidFill>
@@ -19047,17 +19047,17 @@
               </a:rPr>
               <a:t>정상 학습 중... epoch 1</a:t>
             </a:r>
-            <a:endParaRPr lang="en-US" sz="1000" dirty="0"/>
-          </a:p>
-          <a:p>
-            <a:pPr indent="0" marL="0">
-              <a:lnSpc>
-                <a:spcPct val="115000"/>
-              </a:lnSpc>
-              <a:buNone/>
-            </a:pPr>
-            <a:r>
-              <a:rPr lang="en-US" sz="1000" dirty="0">
+            <a:endParaRPr lang="en-US" sz="824" dirty="0"/>
+          </a:p>
+          <a:p>
+            <a:pPr indent="0" marL="0">
+              <a:lnSpc>
+                <a:spcPct val="115000"/>
+              </a:lnSpc>
+              <a:buNone/>
+            </a:pPr>
+            <a:r>
+              <a:rPr lang="en-US" sz="824" dirty="0">
                 <a:solidFill>
                   <a:srgbClr val="0F172A"/>
                 </a:solidFill>
@@ -19067,17 +19067,17 @@
               </a:rPr>
               <a:t>…</a:t>
             </a:r>
-            <a:endParaRPr lang="en-US" sz="1000" dirty="0"/>
-          </a:p>
-          <a:p>
-            <a:pPr indent="0" marL="0">
-              <a:lnSpc>
-                <a:spcPct val="115000"/>
-              </a:lnSpc>
-              <a:buNone/>
-            </a:pPr>
-            <a:r>
-              <a:rPr lang="en-US" sz="1000" dirty="0">
+            <a:endParaRPr lang="en-US" sz="824" dirty="0"/>
+          </a:p>
+          <a:p>
+            <a:pPr indent="0" marL="0">
+              <a:lnSpc>
+                <a:spcPct val="115000"/>
+              </a:lnSpc>
+              <a:buNone/>
+            </a:pPr>
+            <a:r>
+              <a:rPr lang="en-US" sz="824" dirty="0">
                 <a:solidFill>
                   <a:srgbClr val="0F172A"/>
                 </a:solidFill>
@@ -19087,17 +19087,17 @@
               </a:rPr>
               <a:t>정상 학습 중... epoch 6</a:t>
             </a:r>
-            <a:endParaRPr lang="en-US" sz="1000" dirty="0"/>
-          </a:p>
-          <a:p>
-            <a:pPr indent="0" marL="0">
-              <a:lnSpc>
-                <a:spcPct val="115000"/>
-              </a:lnSpc>
-              <a:buNone/>
-            </a:pPr>
-            <a:r>
-              <a:rPr lang="en-US" sz="1000" dirty="0">
+            <a:endParaRPr lang="en-US" sz="824" dirty="0"/>
+          </a:p>
+          <a:p>
+            <a:pPr indent="0" marL="0">
+              <a:lnSpc>
+                <a:spcPct val="115000"/>
+              </a:lnSpc>
+              <a:buNone/>
+            </a:pPr>
+            <a:r>
+              <a:rPr lang="en-US" sz="824" dirty="0">
                 <a:solidFill>
                   <a:srgbClr val="0F172A"/>
                 </a:solidFill>
@@ -19107,7 +19107,7 @@
               </a:rPr>
               <a:t>조기 종료! (epoch 7에서 break)</a:t>
             </a:r>
-            <a:endParaRPr lang="en-US" sz="1000" dirty="0"/>
+            <a:endParaRPr lang="en-US" sz="824" dirty="0"/>
           </a:p>
         </p:txBody>
       </p:sp>
@@ -19414,7 +19414,7 @@
               <a:buNone/>
             </a:pPr>
             <a:r>
-              <a:rPr lang="en-US" sz="2800" b="1" dirty="0">
+              <a:rPr lang="en-US" sz="2300" b="1" dirty="0">
                 <a:solidFill>
                   <a:srgbClr val="0F172A"/>
                 </a:solidFill>
@@ -19424,7 +19424,7 @@
               </a:rPr>
               <a:t>break vs continue — 헷갈리는 짝</a:t>
             </a:r>
-            <a:endParaRPr lang="en-US" sz="2800" dirty="0"/>
+            <a:endParaRPr lang="en-US" sz="2300" dirty="0"/>
           </a:p>
         </p:txBody>
       </p:sp>
@@ -19483,7 +19483,7 @@
               <a:buNone/>
             </a:pPr>
             <a:r>
-              <a:rPr lang="en-US" sz="1522" b="1" dirty="0">
+              <a:rPr lang="en-US" sz="1600" b="1" dirty="0">
                 <a:solidFill>
                   <a:srgbClr val="93C5FD"/>
                 </a:solidFill>
@@ -19500,7 +19500,7 @@
               <a:buNone/>
             </a:pPr>
             <a:r>
-              <a:rPr lang="en-US" sz="1522" dirty="0">
+              <a:rPr lang="en-US" sz="1600" dirty="0">
                 <a:solidFill>
                   <a:srgbClr val="E5E7EB"/>
                 </a:solidFill>
@@ -19517,7 +19517,7 @@
               <a:buNone/>
             </a:pPr>
             <a:r>
-              <a:rPr lang="en-US" sz="1522" b="1" dirty="0">
+              <a:rPr lang="en-US" sz="1600" b="1" dirty="0">
                 <a:solidFill>
                   <a:srgbClr val="93C5FD"/>
                 </a:solidFill>
@@ -19534,7 +19534,7 @@
               <a:buNone/>
             </a:pPr>
             <a:r>
-              <a:rPr lang="en-US" sz="1522" dirty="0">
+              <a:rPr lang="en-US" sz="1600" dirty="0">
                 <a:solidFill>
                   <a:srgbClr val="E5E7EB"/>
                 </a:solidFill>
@@ -19551,7 +19551,7 @@
               <a:buNone/>
             </a:pPr>
             <a:r>
-              <a:rPr lang="en-US" sz="1522" b="1" dirty="0">
+              <a:rPr lang="en-US" sz="1600" b="1" dirty="0">
                 <a:solidFill>
                   <a:srgbClr val="93C5FD"/>
                 </a:solidFill>
@@ -19568,7 +19568,7 @@
               <a:buNone/>
             </a:pPr>
             <a:r>
-              <a:rPr lang="en-US" sz="1522" dirty="0">
+              <a:rPr lang="en-US" sz="1600" dirty="0">
                 <a:solidFill>
                   <a:srgbClr val="E5E7EB"/>
                 </a:solidFill>
@@ -19584,17 +19584,17 @@
               </a:lnSpc>
               <a:buNone/>
             </a:pPr>
-            <a:endParaRPr lang="en-US" sz="1522" dirty="0"/>
-          </a:p>
-          <a:p>
-            <a:pPr indent="0" marL="0">
-              <a:lnSpc>
-                <a:spcPct val="115000"/>
-              </a:lnSpc>
-              <a:buNone/>
-            </a:pPr>
-            <a:r>
-              <a:rPr lang="en-US" sz="1522" dirty="0">
+            <a:endParaRPr lang="en-US" sz="1600" dirty="0"/>
+          </a:p>
+          <a:p>
+            <a:pPr indent="0" marL="0">
+              <a:lnSpc>
+                <a:spcPct val="115000"/>
+              </a:lnSpc>
+              <a:buNone/>
+            </a:pPr>
+            <a:r>
+              <a:rPr lang="en-US" sz="1600" dirty="0">
                 <a:solidFill>
                   <a:srgbClr val="E5E7EB"/>
                 </a:solidFill>
@@ -19611,7 +19611,7 @@
               <a:buNone/>
             </a:pPr>
             <a:r>
-              <a:rPr lang="en-US" sz="1522" b="1" dirty="0">
+              <a:rPr lang="en-US" sz="1600" b="1" dirty="0">
                 <a:solidFill>
                   <a:srgbClr val="93C5FD"/>
                 </a:solidFill>
@@ -19628,7 +19628,7 @@
               <a:buNone/>
             </a:pPr>
             <a:r>
-              <a:rPr lang="en-US" sz="1522" dirty="0">
+              <a:rPr lang="en-US" sz="1600" dirty="0">
                 <a:solidFill>
                   <a:srgbClr val="E5E7EB"/>
                 </a:solidFill>
@@ -19644,17 +19644,17 @@
               </a:lnSpc>
               <a:buNone/>
             </a:pPr>
-            <a:endParaRPr lang="en-US" sz="1522" dirty="0"/>
-          </a:p>
-          <a:p>
-            <a:pPr indent="0" marL="0">
-              <a:lnSpc>
-                <a:spcPct val="115000"/>
-              </a:lnSpc>
-              <a:buNone/>
-            </a:pPr>
-            <a:r>
-              <a:rPr lang="en-US" sz="1522" dirty="0">
+            <a:endParaRPr lang="en-US" sz="1600" dirty="0"/>
+          </a:p>
+          <a:p>
+            <a:pPr indent="0" marL="0">
+              <a:lnSpc>
+                <a:spcPct val="115000"/>
+              </a:lnSpc>
+              <a:buNone/>
+            </a:pPr>
+            <a:r>
+              <a:rPr lang="en-US" sz="1600" dirty="0">
                 <a:solidFill>
                   <a:srgbClr val="E5E7EB"/>
                 </a:solidFill>
@@ -19671,7 +19671,7 @@
               <a:buNone/>
             </a:pPr>
             <a:r>
-              <a:rPr lang="en-US" sz="1522" b="1" dirty="0">
+              <a:rPr lang="en-US" sz="1600" b="1" dirty="0">
                 <a:solidFill>
                   <a:srgbClr val="93C5FD"/>
                 </a:solidFill>
@@ -19687,17 +19687,17 @@
               </a:lnSpc>
               <a:buNone/>
             </a:pPr>
-            <a:endParaRPr lang="en-US" sz="1522" dirty="0"/>
-          </a:p>
-          <a:p>
-            <a:pPr indent="0" marL="0">
-              <a:lnSpc>
-                <a:spcPct val="115000"/>
-              </a:lnSpc>
-              <a:buNone/>
-            </a:pPr>
-            <a:r>
-              <a:rPr lang="en-US" sz="1522" dirty="0">
+            <a:endParaRPr lang="en-US" sz="1600" dirty="0"/>
+          </a:p>
+          <a:p>
+            <a:pPr indent="0" marL="0">
+              <a:lnSpc>
+                <a:spcPct val="115000"/>
+              </a:lnSpc>
+              <a:buNone/>
+            </a:pPr>
+            <a:r>
+              <a:rPr lang="en-US" sz="1600" dirty="0">
                 <a:solidFill>
                   <a:srgbClr val="E5E7EB"/>
                 </a:solidFill>
@@ -19714,7 +19714,7 @@
               <a:buNone/>
             </a:pPr>
             <a:r>
-              <a:rPr lang="en-US" sz="1522" b="1" dirty="0">
+              <a:rPr lang="en-US" sz="1600" b="1" dirty="0">
                 <a:solidFill>
                   <a:srgbClr val="93C5FD"/>
                 </a:solidFill>
@@ -19731,7 +19731,7 @@
               <a:buNone/>
             </a:pPr>
             <a:r>
-              <a:rPr lang="en-US" sz="1522" dirty="0">
+              <a:rPr lang="en-US" sz="1600" dirty="0">
                 <a:solidFill>
                   <a:srgbClr val="E5E7EB"/>
                 </a:solidFill>
@@ -19747,17 +19747,17 @@
               </a:lnSpc>
               <a:buNone/>
             </a:pPr>
-            <a:endParaRPr lang="en-US" sz="1522" dirty="0"/>
-          </a:p>
-          <a:p>
-            <a:pPr indent="0" marL="0">
-              <a:lnSpc>
-                <a:spcPct val="115000"/>
-              </a:lnSpc>
-              <a:buNone/>
-            </a:pPr>
-            <a:r>
-              <a:rPr lang="en-US" sz="1522" dirty="0">
+            <a:endParaRPr lang="en-US" sz="1600" dirty="0"/>
+          </a:p>
+          <a:p>
+            <a:pPr indent="0" marL="0">
+              <a:lnSpc>
+                <a:spcPct val="115000"/>
+              </a:lnSpc>
+              <a:buNone/>
+            </a:pPr>
+            <a:r>
+              <a:rPr lang="en-US" sz="1600" dirty="0">
                 <a:solidFill>
                   <a:srgbClr val="94A3B8"/>
                 </a:solidFill>
@@ -19767,7 +19767,7 @@
               </a:rPr>
               <a:t># 1 2  ← 3에서 완전히 멈춤</a:t>
             </a:r>
-            <a:endParaRPr lang="en-US" sz="1522" dirty="0"/>
+            <a:endParaRPr lang="en-US" sz="1600" dirty="0"/>
           </a:p>
         </p:txBody>
       </p:sp>
@@ -22136,7 +22136,7 @@
               <a:buNone/>
             </a:pPr>
             <a:r>
-              <a:rPr lang="en-US" sz="2600" b="1" dirty="0">
+              <a:rPr lang="en-US" sz="2100" b="1" dirty="0">
                 <a:solidFill>
                   <a:srgbClr val="FFFFFF"/>
                 </a:solidFill>
@@ -22146,7 +22146,7 @@
               </a:rPr>
               <a:t>횟수를 알면 for, 모르면 while, 멈출 조건은 break</a:t>
             </a:r>
-            <a:endParaRPr lang="en-US" sz="2600" dirty="0"/>
+            <a:endParaRPr lang="en-US" sz="2100" dirty="0"/>
           </a:p>
         </p:txBody>
       </p:sp>
@@ -22736,7 +22736,7 @@
               <a:buNone/>
             </a:pPr>
             <a:r>
-              <a:rPr lang="en-US" sz="4000" b="1" dirty="0">
+              <a:rPr lang="en-US" sz="3200" b="1" dirty="0">
                 <a:solidFill>
                   <a:srgbClr val="FFFFFF"/>
                 </a:solidFill>
@@ -22746,7 +22746,7 @@
               </a:rPr>
               <a:t>리스트 단일 추가 vs 묶음 확장</a:t>
             </a:r>
-            <a:endParaRPr lang="en-US" sz="4000" dirty="0"/>
+            <a:endParaRPr lang="en-US" sz="3200" dirty="0"/>
           </a:p>
         </p:txBody>
       </p:sp>
@@ -23095,7 +23095,7 @@
               <a:buNone/>
             </a:pPr>
             <a:r>
-              <a:rPr lang="en-US" sz="4000" b="1" dirty="0">
+              <a:rPr lang="en-US" sz="3200" b="1" dirty="0">
                 <a:solidFill>
                   <a:srgbClr val="FFFFFF"/>
                 </a:solidFill>
@@ -23105,7 +23105,7 @@
               </a:rPr>
               <a:t>사용자 정의 함수와 결과 반환</a:t>
             </a:r>
-            <a:endParaRPr lang="en-US" sz="4000" dirty="0"/>
+            <a:endParaRPr lang="en-US" sz="3200" dirty="0"/>
           </a:p>
         </p:txBody>
       </p:sp>
@@ -23996,7 +23996,7 @@
               <a:buNone/>
             </a:pPr>
             <a:r>
-              <a:rPr lang="en-US" sz="1200" b="1" dirty="0">
+              <a:rPr lang="en-US" sz="1053" b="1" dirty="0">
                 <a:solidFill>
                   <a:srgbClr val="93C5FD"/>
                 </a:solidFill>
@@ -24013,7 +24013,7 @@
               <a:buNone/>
             </a:pPr>
             <a:r>
-              <a:rPr lang="en-US" sz="1200" dirty="0">
+              <a:rPr lang="en-US" sz="1053" dirty="0">
                 <a:solidFill>
                   <a:srgbClr val="E5E7EB"/>
                 </a:solidFill>
@@ -24029,17 +24029,17 @@
               </a:lnSpc>
               <a:buNone/>
             </a:pPr>
-            <a:endParaRPr lang="en-US" sz="1200" dirty="0"/>
-          </a:p>
-          <a:p>
-            <a:pPr indent="0" marL="0">
-              <a:lnSpc>
-                <a:spcPct val="115000"/>
-              </a:lnSpc>
-              <a:buNone/>
-            </a:pPr>
-            <a:r>
-              <a:rPr lang="en-US" sz="1200" dirty="0">
+            <a:endParaRPr lang="en-US" sz="1053" dirty="0"/>
+          </a:p>
+          <a:p>
+            <a:pPr indent="0" marL="0">
+              <a:lnSpc>
+                <a:spcPct val="115000"/>
+              </a:lnSpc>
+              <a:buNone/>
+            </a:pPr>
+            <a:r>
+              <a:rPr lang="en-US" sz="1053" dirty="0">
                 <a:solidFill>
                   <a:srgbClr val="E5E7EB"/>
                 </a:solidFill>
@@ -24055,17 +24055,17 @@
               </a:lnSpc>
               <a:buNone/>
             </a:pPr>
-            <a:endParaRPr lang="en-US" sz="1200" dirty="0"/>
-          </a:p>
-          <a:p>
-            <a:pPr indent="0" marL="0">
-              <a:lnSpc>
-                <a:spcPct val="115000"/>
-              </a:lnSpc>
-              <a:buNone/>
-            </a:pPr>
-            <a:r>
-              <a:rPr lang="en-US" sz="1200" dirty="0">
+            <a:endParaRPr lang="en-US" sz="1053" dirty="0"/>
+          </a:p>
+          <a:p>
+            <a:pPr indent="0" marL="0">
+              <a:lnSpc>
+                <a:spcPct val="115000"/>
+              </a:lnSpc>
+              <a:buNone/>
+            </a:pPr>
+            <a:r>
+              <a:rPr lang="en-US" sz="1053" dirty="0">
                 <a:solidFill>
                   <a:srgbClr val="E5E7EB"/>
                 </a:solidFill>
@@ -24081,17 +24081,17 @@
               </a:lnSpc>
               <a:buNone/>
             </a:pPr>
-            <a:endParaRPr lang="en-US" sz="1200" dirty="0"/>
-          </a:p>
-          <a:p>
-            <a:pPr indent="0" marL="0">
-              <a:lnSpc>
-                <a:spcPct val="115000"/>
-              </a:lnSpc>
-              <a:buNone/>
-            </a:pPr>
-            <a:r>
-              <a:rPr lang="en-US" sz="1200" dirty="0">
+            <a:endParaRPr lang="en-US" sz="1053" dirty="0"/>
+          </a:p>
+          <a:p>
+            <a:pPr indent="0" marL="0">
+              <a:lnSpc>
+                <a:spcPct val="115000"/>
+              </a:lnSpc>
+              <a:buNone/>
+            </a:pPr>
+            <a:r>
+              <a:rPr lang="en-US" sz="1053" dirty="0">
                 <a:solidFill>
                   <a:srgbClr val="E5E7EB"/>
                 </a:solidFill>
@@ -24108,7 +24108,7 @@
               <a:buNone/>
             </a:pPr>
             <a:r>
-              <a:rPr lang="en-US" sz="1200" b="1" dirty="0">
+              <a:rPr lang="en-US" sz="1053" b="1" dirty="0">
                 <a:solidFill>
                   <a:srgbClr val="93C5FD"/>
                 </a:solidFill>
@@ -24125,7 +24125,7 @@
               <a:buNone/>
             </a:pPr>
             <a:r>
-              <a:rPr lang="en-US" sz="1200" dirty="0">
+              <a:rPr lang="en-US" sz="1053" dirty="0">
                 <a:solidFill>
                   <a:srgbClr val="E5E7EB"/>
                 </a:solidFill>
@@ -24141,26 +24141,26 @@
               </a:lnSpc>
               <a:buNone/>
             </a:pPr>
-            <a:endParaRPr lang="en-US" sz="1200" dirty="0"/>
-          </a:p>
-          <a:p>
-            <a:pPr indent="0" marL="0">
-              <a:lnSpc>
-                <a:spcPct val="115000"/>
-              </a:lnSpc>
-              <a:buNone/>
-            </a:pPr>
-            <a:endParaRPr lang="en-US" sz="1200" dirty="0"/>
-          </a:p>
-          <a:p>
-            <a:pPr indent="0" marL="0">
-              <a:lnSpc>
-                <a:spcPct val="115000"/>
-              </a:lnSpc>
-              <a:buNone/>
-            </a:pPr>
-            <a:r>
-              <a:rPr lang="en-US" sz="1200" dirty="0">
+            <a:endParaRPr lang="en-US" sz="1053" dirty="0"/>
+          </a:p>
+          <a:p>
+            <a:pPr indent="0" marL="0">
+              <a:lnSpc>
+                <a:spcPct val="115000"/>
+              </a:lnSpc>
+              <a:buNone/>
+            </a:pPr>
+            <a:endParaRPr lang="en-US" sz="1053" dirty="0"/>
+          </a:p>
+          <a:p>
+            <a:pPr indent="0" marL="0">
+              <a:lnSpc>
+                <a:spcPct val="115000"/>
+              </a:lnSpc>
+              <a:buNone/>
+            </a:pPr>
+            <a:r>
+              <a:rPr lang="en-US" sz="1053" dirty="0">
                 <a:solidFill>
                   <a:srgbClr val="E5E7EB"/>
                 </a:solidFill>
@@ -24176,17 +24176,17 @@
               </a:lnSpc>
               <a:buNone/>
             </a:pPr>
-            <a:endParaRPr lang="en-US" sz="1200" dirty="0"/>
-          </a:p>
-          <a:p>
-            <a:pPr indent="0" marL="0">
-              <a:lnSpc>
-                <a:spcPct val="115000"/>
-              </a:lnSpc>
-              <a:buNone/>
-            </a:pPr>
-            <a:r>
-              <a:rPr lang="en-US" sz="1200" b="1" dirty="0">
+            <a:endParaRPr lang="en-US" sz="1053" dirty="0"/>
+          </a:p>
+          <a:p>
+            <a:pPr indent="0" marL="0">
+              <a:lnSpc>
+                <a:spcPct val="115000"/>
+              </a:lnSpc>
+              <a:buNone/>
+            </a:pPr>
+            <a:r>
+              <a:rPr lang="en-US" sz="1053" b="1" dirty="0">
                 <a:solidFill>
                   <a:srgbClr val="93C5FD"/>
                 </a:solidFill>
@@ -24203,7 +24203,7 @@
               <a:buNone/>
             </a:pPr>
             <a:r>
-              <a:rPr lang="en-US" sz="1200" dirty="0">
+              <a:rPr lang="en-US" sz="1053" dirty="0">
                 <a:solidFill>
                   <a:srgbClr val="E5E7EB"/>
                 </a:solidFill>
@@ -24220,7 +24220,7 @@
               <a:buNone/>
             </a:pPr>
             <a:r>
-              <a:rPr lang="en-US" sz="1200" dirty="0">
+              <a:rPr lang="en-US" sz="1053" dirty="0">
                 <a:solidFill>
                   <a:srgbClr val="FCD34D"/>
                 </a:solidFill>
@@ -24237,7 +24237,7 @@
               <a:buNone/>
             </a:pPr>
             <a:r>
-              <a:rPr lang="en-US" sz="1200" dirty="0">
+              <a:rPr lang="en-US" sz="1053" dirty="0">
                 <a:solidFill>
                   <a:srgbClr val="E5E7EB"/>
                 </a:solidFill>
@@ -24247,7 +24247,7 @@
               </a:rPr>
               <a:t>)</a:t>
             </a:r>
-            <a:endParaRPr lang="en-US" sz="1200" dirty="0"/>
+            <a:endParaRPr lang="en-US" sz="1053" dirty="0"/>
           </a:p>
         </p:txBody>
       </p:sp>
@@ -24345,7 +24345,7 @@
               <a:buNone/>
             </a:pPr>
             <a:r>
-              <a:rPr lang="en-US" sz="1165" dirty="0">
+              <a:rPr lang="en-US" sz="1014" dirty="0">
                 <a:solidFill>
                   <a:srgbClr val="0F172A"/>
                 </a:solidFill>
@@ -24355,7 +24355,7 @@
               </a:rPr>
               <a:t>원가:25000원, 세금:2500.0원 -&gt; 최종:27500.0원</a:t>
             </a:r>
-            <a:endParaRPr lang="en-US" sz="1165" dirty="0"/>
+            <a:endParaRPr lang="en-US" sz="1014" dirty="0"/>
           </a:p>
         </p:txBody>
       </p:sp>
@@ -24731,7 +24731,7 @@
               <a:buNone/>
             </a:pPr>
             <a:r>
-              <a:rPr lang="en-US" sz="1200" b="1" dirty="0">
+              <a:rPr lang="en-US" sz="852" b="1" dirty="0">
                 <a:solidFill>
                   <a:srgbClr val="93C5FD"/>
                 </a:solidFill>
@@ -24748,7 +24748,7 @@
               <a:buNone/>
             </a:pPr>
             <a:r>
-              <a:rPr lang="en-US" sz="1200" dirty="0">
+              <a:rPr lang="en-US" sz="852" dirty="0">
                 <a:solidFill>
                   <a:srgbClr val="E5E7EB"/>
                 </a:solidFill>
@@ -24764,17 +24764,17 @@
               </a:lnSpc>
               <a:buNone/>
             </a:pPr>
-            <a:endParaRPr lang="en-US" sz="1200" dirty="0"/>
-          </a:p>
-          <a:p>
-            <a:pPr indent="0" marL="0">
-              <a:lnSpc>
-                <a:spcPct val="115000"/>
-              </a:lnSpc>
-              <a:buNone/>
-            </a:pPr>
-            <a:r>
-              <a:rPr lang="en-US" sz="1200" dirty="0">
+            <a:endParaRPr lang="en-US" sz="852" dirty="0"/>
+          </a:p>
+          <a:p>
+            <a:pPr indent="0" marL="0">
+              <a:lnSpc>
+                <a:spcPct val="115000"/>
+              </a:lnSpc>
+              <a:buNone/>
+            </a:pPr>
+            <a:r>
+              <a:rPr lang="en-US" sz="852" dirty="0">
                 <a:solidFill>
                   <a:srgbClr val="E5E7EB"/>
                 </a:solidFill>
@@ -24791,7 +24791,7 @@
               <a:buNone/>
             </a:pPr>
             <a:r>
-              <a:rPr lang="en-US" sz="1200" b="1" dirty="0">
+              <a:rPr lang="en-US" sz="852" b="1" dirty="0">
                 <a:solidFill>
                   <a:srgbClr val="93C5FD"/>
                 </a:solidFill>
@@ -24808,7 +24808,7 @@
               <a:buNone/>
             </a:pPr>
             <a:r>
-              <a:rPr lang="en-US" sz="1200" dirty="0">
+              <a:rPr lang="en-US" sz="852" dirty="0">
                 <a:solidFill>
                   <a:srgbClr val="E5E7EB"/>
                 </a:solidFill>
@@ -24824,17 +24824,17 @@
               </a:lnSpc>
               <a:buNone/>
             </a:pPr>
-            <a:endParaRPr lang="en-US" sz="1200" dirty="0"/>
-          </a:p>
-          <a:p>
-            <a:pPr indent="0" marL="0">
-              <a:lnSpc>
-                <a:spcPct val="115000"/>
-              </a:lnSpc>
-              <a:buNone/>
-            </a:pPr>
-            <a:r>
-              <a:rPr lang="en-US" sz="1200" dirty="0">
+            <a:endParaRPr lang="en-US" sz="852" dirty="0"/>
+          </a:p>
+          <a:p>
+            <a:pPr indent="0" marL="0">
+              <a:lnSpc>
+                <a:spcPct val="115000"/>
+              </a:lnSpc>
+              <a:buNone/>
+            </a:pPr>
+            <a:r>
+              <a:rPr lang="en-US" sz="852" dirty="0">
                 <a:solidFill>
                   <a:srgbClr val="E5E7EB"/>
                 </a:solidFill>
@@ -24851,7 +24851,7 @@
               <a:buNone/>
             </a:pPr>
             <a:r>
-              <a:rPr lang="en-US" sz="1200" b="1" dirty="0">
+              <a:rPr lang="en-US" sz="852" b="1" dirty="0">
                 <a:solidFill>
                   <a:srgbClr val="93C5FD"/>
                 </a:solidFill>
@@ -24868,7 +24868,7 @@
               <a:buNone/>
             </a:pPr>
             <a:r>
-              <a:rPr lang="en-US" sz="1200" dirty="0">
+              <a:rPr lang="en-US" sz="852" dirty="0">
                 <a:solidFill>
                   <a:srgbClr val="E5E7EB"/>
                 </a:solidFill>
@@ -24885,7 +24885,7 @@
               <a:buNone/>
             </a:pPr>
             <a:r>
-              <a:rPr lang="en-US" sz="1200" dirty="0">
+              <a:rPr lang="en-US" sz="852" dirty="0">
                 <a:solidFill>
                   <a:srgbClr val="FCD34D"/>
                 </a:solidFill>
@@ -24901,17 +24901,17 @@
               </a:lnSpc>
               <a:buNone/>
             </a:pPr>
-            <a:endParaRPr lang="en-US" sz="1200" dirty="0"/>
-          </a:p>
-          <a:p>
-            <a:pPr indent="0" marL="0">
-              <a:lnSpc>
-                <a:spcPct val="115000"/>
-              </a:lnSpc>
-              <a:buNone/>
-            </a:pPr>
-            <a:r>
-              <a:rPr lang="en-US" sz="1200" dirty="0">
+            <a:endParaRPr lang="en-US" sz="852" dirty="0"/>
+          </a:p>
+          <a:p>
+            <a:pPr indent="0" marL="0">
+              <a:lnSpc>
+                <a:spcPct val="115000"/>
+              </a:lnSpc>
+              <a:buNone/>
+            </a:pPr>
+            <a:r>
+              <a:rPr lang="en-US" sz="852" dirty="0">
                 <a:solidFill>
                   <a:srgbClr val="E5E7EB"/>
                 </a:solidFill>
@@ -24928,7 +24928,7 @@
               <a:buNone/>
             </a:pPr>
             <a:r>
-              <a:rPr lang="en-US" sz="1200" b="1" dirty="0">
+              <a:rPr lang="en-US" sz="852" b="1" dirty="0">
                 <a:solidFill>
                   <a:srgbClr val="93C5FD"/>
                 </a:solidFill>
@@ -24945,7 +24945,7 @@
               <a:buNone/>
             </a:pPr>
             <a:r>
-              <a:rPr lang="en-US" sz="1200" dirty="0">
+              <a:rPr lang="en-US" sz="852" dirty="0">
                 <a:solidFill>
                   <a:srgbClr val="E5E7EB"/>
                 </a:solidFill>
@@ -24962,7 +24962,7 @@
               <a:buNone/>
             </a:pPr>
             <a:r>
-              <a:rPr lang="en-US" sz="1200" dirty="0">
+              <a:rPr lang="en-US" sz="852" dirty="0">
                 <a:solidFill>
                   <a:srgbClr val="FCD34D"/>
                 </a:solidFill>
@@ -24979,7 +24979,7 @@
               <a:buNone/>
             </a:pPr>
             <a:r>
-              <a:rPr lang="en-US" sz="1200" dirty="0">
+              <a:rPr lang="en-US" sz="852" dirty="0">
                 <a:solidFill>
                   <a:srgbClr val="E5E7EB"/>
                 </a:solidFill>
@@ -24996,7 +24996,7 @@
               <a:buNone/>
             </a:pPr>
             <a:r>
-              <a:rPr lang="en-US" sz="1200" dirty="0">
+              <a:rPr lang="en-US" sz="852" dirty="0">
                 <a:solidFill>
                   <a:srgbClr val="94A3B8"/>
                 </a:solidFill>
@@ -25012,26 +25012,26 @@
               </a:lnSpc>
               <a:buNone/>
             </a:pPr>
-            <a:endParaRPr lang="en-US" sz="1200" dirty="0"/>
-          </a:p>
-          <a:p>
-            <a:pPr indent="0" marL="0">
-              <a:lnSpc>
-                <a:spcPct val="115000"/>
-              </a:lnSpc>
-              <a:buNone/>
-            </a:pPr>
-            <a:endParaRPr lang="en-US" sz="1200" dirty="0"/>
-          </a:p>
-          <a:p>
-            <a:pPr indent="0" marL="0">
-              <a:lnSpc>
-                <a:spcPct val="115000"/>
-              </a:lnSpc>
-              <a:buNone/>
-            </a:pPr>
-            <a:r>
-              <a:rPr lang="en-US" sz="1200" b="1" dirty="0">
+            <a:endParaRPr lang="en-US" sz="852" dirty="0"/>
+          </a:p>
+          <a:p>
+            <a:pPr indent="0" marL="0">
+              <a:lnSpc>
+                <a:spcPct val="115000"/>
+              </a:lnSpc>
+              <a:buNone/>
+            </a:pPr>
+            <a:endParaRPr lang="en-US" sz="852" dirty="0"/>
+          </a:p>
+          <a:p>
+            <a:pPr indent="0" marL="0">
+              <a:lnSpc>
+                <a:spcPct val="115000"/>
+              </a:lnSpc>
+              <a:buNone/>
+            </a:pPr>
+            <a:r>
+              <a:rPr lang="en-US" sz="852" b="1" dirty="0">
                 <a:solidFill>
                   <a:srgbClr val="93C5FD"/>
                 </a:solidFill>
@@ -25048,7 +25048,7 @@
               <a:buNone/>
             </a:pPr>
             <a:r>
-              <a:rPr lang="en-US" sz="1200" dirty="0">
+              <a:rPr lang="en-US" sz="852" dirty="0">
                 <a:solidFill>
                   <a:srgbClr val="E5E7EB"/>
                 </a:solidFill>
@@ -25058,7 +25058,7 @@
               </a:rPr>
               <a:t>(grade(95), grade(70))</a:t>
             </a:r>
-            <a:endParaRPr lang="en-US" sz="1200" dirty="0"/>
+            <a:endParaRPr lang="en-US" sz="852" dirty="0"/>
           </a:p>
         </p:txBody>
       </p:sp>
@@ -25156,7 +25156,7 @@
               <a:buNone/>
             </a:pPr>
             <a:r>
-              <a:rPr lang="en-US" sz="1100" dirty="0">
+              <a:rPr lang="en-US" sz="700" dirty="0">
                 <a:solidFill>
                   <a:srgbClr val="0F172A"/>
                 </a:solidFill>
@@ -25166,7 +25166,7 @@
               </a:rPr>
               <a:t>A B</a:t>
             </a:r>
-            <a:endParaRPr lang="en-US" sz="1100" dirty="0"/>
+            <a:endParaRPr lang="en-US" sz="700" dirty="0"/>
           </a:p>
         </p:txBody>
       </p:sp>
@@ -25225,7 +25225,7 @@
               <a:buNone/>
             </a:pPr>
             <a:r>
-              <a:rPr lang="en-US" sz="1401" b="1" dirty="0">
+              <a:rPr lang="en-US" sz="1600" b="1" dirty="0">
                 <a:solidFill>
                   <a:srgbClr val="93C5FD"/>
                 </a:solidFill>
@@ -25242,7 +25242,7 @@
               <a:buNone/>
             </a:pPr>
             <a:r>
-              <a:rPr lang="en-US" sz="1401" dirty="0">
+              <a:rPr lang="en-US" sz="1600" dirty="0">
                 <a:solidFill>
                   <a:srgbClr val="E5E7EB"/>
                 </a:solidFill>
@@ -25258,17 +25258,17 @@
               </a:lnSpc>
               <a:buNone/>
             </a:pPr>
-            <a:endParaRPr lang="en-US" sz="1401" dirty="0"/>
-          </a:p>
-          <a:p>
-            <a:pPr indent="0" marL="0">
-              <a:lnSpc>
-                <a:spcPct val="115000"/>
-              </a:lnSpc>
-              <a:buNone/>
-            </a:pPr>
-            <a:r>
-              <a:rPr lang="en-US" sz="1401" dirty="0">
+            <a:endParaRPr lang="en-US" sz="1600" dirty="0"/>
+          </a:p>
+          <a:p>
+            <a:pPr indent="0" marL="0">
+              <a:lnSpc>
+                <a:spcPct val="115000"/>
+              </a:lnSpc>
+              <a:buNone/>
+            </a:pPr>
+            <a:r>
+              <a:rPr lang="en-US" sz="1600" dirty="0">
                 <a:solidFill>
                   <a:srgbClr val="E5E7EB"/>
                 </a:solidFill>
@@ -25285,7 +25285,7 @@
               <a:buNone/>
             </a:pPr>
             <a:r>
-              <a:rPr lang="en-US" sz="1401" b="1" dirty="0">
+              <a:rPr lang="en-US" sz="1600" b="1" dirty="0">
                 <a:solidFill>
                   <a:srgbClr val="93C5FD"/>
                 </a:solidFill>
@@ -25302,7 +25302,7 @@
               <a:buNone/>
             </a:pPr>
             <a:r>
-              <a:rPr lang="en-US" sz="1401" dirty="0">
+              <a:rPr lang="en-US" sz="1600" dirty="0">
                 <a:solidFill>
                   <a:srgbClr val="E5E7EB"/>
                 </a:solidFill>
@@ -25318,17 +25318,17 @@
               </a:lnSpc>
               <a:buNone/>
             </a:pPr>
-            <a:endParaRPr lang="en-US" sz="1401" dirty="0"/>
-          </a:p>
-          <a:p>
-            <a:pPr indent="0" marL="0">
-              <a:lnSpc>
-                <a:spcPct val="115000"/>
-              </a:lnSpc>
-              <a:buNone/>
-            </a:pPr>
-            <a:r>
-              <a:rPr lang="en-US" sz="1401" dirty="0">
+            <a:endParaRPr lang="en-US" sz="1600" dirty="0"/>
+          </a:p>
+          <a:p>
+            <a:pPr indent="0" marL="0">
+              <a:lnSpc>
+                <a:spcPct val="115000"/>
+              </a:lnSpc>
+              <a:buNone/>
+            </a:pPr>
+            <a:r>
+              <a:rPr lang="en-US" sz="1600" dirty="0">
                 <a:solidFill>
                   <a:srgbClr val="E5E7EB"/>
                 </a:solidFill>
@@ -25345,7 +25345,7 @@
               <a:buNone/>
             </a:pPr>
             <a:r>
-              <a:rPr lang="en-US" sz="1401" dirty="0">
+              <a:rPr lang="en-US" sz="1600" dirty="0">
                 <a:solidFill>
                   <a:srgbClr val="FCD34D"/>
                 </a:solidFill>
@@ -25361,17 +25361,17 @@
               </a:lnSpc>
               <a:buNone/>
             </a:pPr>
-            <a:endParaRPr lang="en-US" sz="1401" dirty="0"/>
-          </a:p>
-          <a:p>
-            <a:pPr indent="0" marL="0">
-              <a:lnSpc>
-                <a:spcPct val="115000"/>
-              </a:lnSpc>
-              <a:buNone/>
-            </a:pPr>
-            <a:r>
-              <a:rPr lang="en-US" sz="1401" dirty="0">
+            <a:endParaRPr lang="en-US" sz="1600" dirty="0"/>
+          </a:p>
+          <a:p>
+            <a:pPr indent="0" marL="0">
+              <a:lnSpc>
+                <a:spcPct val="115000"/>
+              </a:lnSpc>
+              <a:buNone/>
+            </a:pPr>
+            <a:r>
+              <a:rPr lang="en-US" sz="1600" dirty="0">
                 <a:solidFill>
                   <a:srgbClr val="E5E7EB"/>
                 </a:solidFill>
@@ -25388,7 +25388,7 @@
               <a:buNone/>
             </a:pPr>
             <a:r>
-              <a:rPr lang="en-US" sz="1401" dirty="0">
+              <a:rPr lang="en-US" sz="1600" dirty="0">
                 <a:solidFill>
                   <a:srgbClr val="94A3B8"/>
                 </a:solidFill>
@@ -25404,26 +25404,26 @@
               </a:lnSpc>
               <a:buNone/>
             </a:pPr>
-            <a:endParaRPr lang="en-US" sz="1401" dirty="0"/>
-          </a:p>
-          <a:p>
-            <a:pPr indent="0" marL="0">
-              <a:lnSpc>
-                <a:spcPct val="115000"/>
-              </a:lnSpc>
-              <a:buNone/>
-            </a:pPr>
-            <a:endParaRPr lang="en-US" sz="1401" dirty="0"/>
-          </a:p>
-          <a:p>
-            <a:pPr indent="0" marL="0">
-              <a:lnSpc>
-                <a:spcPct val="115000"/>
-              </a:lnSpc>
-              <a:buNone/>
-            </a:pPr>
-            <a:r>
-              <a:rPr lang="en-US" sz="1401" b="1" dirty="0">
+            <a:endParaRPr lang="en-US" sz="1600" dirty="0"/>
+          </a:p>
+          <a:p>
+            <a:pPr indent="0" marL="0">
+              <a:lnSpc>
+                <a:spcPct val="115000"/>
+              </a:lnSpc>
+              <a:buNone/>
+            </a:pPr>
+            <a:endParaRPr lang="en-US" sz="1600" dirty="0"/>
+          </a:p>
+          <a:p>
+            <a:pPr indent="0" marL="0">
+              <a:lnSpc>
+                <a:spcPct val="115000"/>
+              </a:lnSpc>
+              <a:buNone/>
+            </a:pPr>
+            <a:r>
+              <a:rPr lang="en-US" sz="1600" b="1" dirty="0">
                 <a:solidFill>
                   <a:srgbClr val="93C5FD"/>
                 </a:solidFill>
@@ -25440,7 +25440,7 @@
               <a:buNone/>
             </a:pPr>
             <a:r>
-              <a:rPr lang="en-US" sz="1401" dirty="0">
+              <a:rPr lang="en-US" sz="1600" dirty="0">
                 <a:solidFill>
                   <a:srgbClr val="E5E7EB"/>
                 </a:solidFill>
@@ -25457,7 +25457,7 @@
               <a:buNone/>
             </a:pPr>
             <a:r>
-              <a:rPr lang="en-US" sz="1401" dirty="0">
+              <a:rPr lang="en-US" sz="1600" dirty="0">
                 <a:solidFill>
                   <a:srgbClr val="94A3B8"/>
                 </a:solidFill>
@@ -25467,7 +25467,7 @@
               </a:rPr>
               <a:t># None</a:t>
             </a:r>
-            <a:endParaRPr lang="en-US" sz="1401" dirty="0"/>
+            <a:endParaRPr lang="en-US" sz="1600" dirty="0"/>
           </a:p>
         </p:txBody>
       </p:sp>
@@ -25565,7 +25565,7 @@
               <a:buNone/>
             </a:pPr>
             <a:r>
-              <a:rPr lang="en-US" sz="1100" dirty="0">
+              <a:rPr lang="en-US" sz="700" dirty="0">
                 <a:solidFill>
                   <a:srgbClr val="0F172A"/>
                 </a:solidFill>
@@ -25575,7 +25575,7 @@
               </a:rPr>
               <a:t>None</a:t>
             </a:r>
-            <a:endParaRPr lang="en-US" sz="1100" dirty="0"/>
+            <a:endParaRPr lang="en-US" sz="700" dirty="0"/>
           </a:p>
         </p:txBody>
       </p:sp>
@@ -25849,7 +25849,7 @@
               <a:buNone/>
             </a:pPr>
             <a:r>
-              <a:rPr lang="en-US" sz="1150" b="1" dirty="0">
+              <a:rPr lang="en-US" sz="1137" b="1" dirty="0">
                 <a:solidFill>
                   <a:srgbClr val="93C5FD"/>
                 </a:solidFill>
@@ -25866,7 +25866,7 @@
               <a:buNone/>
             </a:pPr>
             <a:r>
-              <a:rPr lang="en-US" sz="1150" dirty="0">
+              <a:rPr lang="en-US" sz="1137" dirty="0">
                 <a:solidFill>
                   <a:srgbClr val="E5E7EB"/>
                 </a:solidFill>
@@ -25882,17 +25882,17 @@
               </a:lnSpc>
               <a:buNone/>
             </a:pPr>
-            <a:endParaRPr lang="en-US" sz="1150" dirty="0"/>
-          </a:p>
-          <a:p>
-            <a:pPr indent="0" marL="0">
-              <a:lnSpc>
-                <a:spcPct val="115000"/>
-              </a:lnSpc>
-              <a:buNone/>
-            </a:pPr>
-            <a:r>
-              <a:rPr lang="en-US" sz="1150" dirty="0">
+            <a:endParaRPr lang="en-US" sz="1137" dirty="0"/>
+          </a:p>
+          <a:p>
+            <a:pPr indent="0" marL="0">
+              <a:lnSpc>
+                <a:spcPct val="115000"/>
+              </a:lnSpc>
+              <a:buNone/>
+            </a:pPr>
+            <a:r>
+              <a:rPr lang="en-US" sz="1137" dirty="0">
                 <a:solidFill>
                   <a:srgbClr val="E5E7EB"/>
                 </a:solidFill>
@@ -25909,7 +25909,7 @@
               <a:buNone/>
             </a:pPr>
             <a:r>
-              <a:rPr lang="en-US" sz="1150" b="1" dirty="0">
+              <a:rPr lang="en-US" sz="1137" b="1" dirty="0">
                 <a:solidFill>
                   <a:srgbClr val="93C5FD"/>
                 </a:solidFill>
@@ -25926,7 +25926,7 @@
               <a:buNone/>
             </a:pPr>
             <a:r>
-              <a:rPr lang="en-US" sz="1150" dirty="0">
+              <a:rPr lang="en-US" sz="1137" dirty="0">
                 <a:solidFill>
                   <a:srgbClr val="E5E7EB"/>
                 </a:solidFill>
@@ -25943,7 +25943,7 @@
               <a:buNone/>
             </a:pPr>
             <a:r>
-              <a:rPr lang="en-US" sz="1150" b="1" dirty="0">
+              <a:rPr lang="en-US" sz="1137" b="1" dirty="0">
                 <a:solidFill>
                   <a:srgbClr val="93C5FD"/>
                 </a:solidFill>
@@ -25960,7 +25960,7 @@
               <a:buNone/>
             </a:pPr>
             <a:r>
-              <a:rPr lang="en-US" sz="1150" dirty="0">
+              <a:rPr lang="en-US" sz="1137" dirty="0">
                 <a:solidFill>
                   <a:srgbClr val="E5E7EB"/>
                 </a:solidFill>
@@ -25977,7 +25977,7 @@
               <a:buNone/>
             </a:pPr>
             <a:r>
-              <a:rPr lang="en-US" sz="1150" b="1" dirty="0">
+              <a:rPr lang="en-US" sz="1137" b="1" dirty="0">
                 <a:solidFill>
                   <a:srgbClr val="93C5FD"/>
                 </a:solidFill>
@@ -25994,7 +25994,7 @@
               <a:buNone/>
             </a:pPr>
             <a:r>
-              <a:rPr lang="en-US" sz="1150" dirty="0">
+              <a:rPr lang="en-US" sz="1137" dirty="0">
                 <a:solidFill>
                   <a:srgbClr val="E5E7EB"/>
                 </a:solidFill>
@@ -26010,26 +26010,26 @@
               </a:lnSpc>
               <a:buNone/>
             </a:pPr>
-            <a:endParaRPr lang="en-US" sz="1150" dirty="0"/>
-          </a:p>
-          <a:p>
-            <a:pPr indent="0" marL="0">
-              <a:lnSpc>
-                <a:spcPct val="115000"/>
-              </a:lnSpc>
-              <a:buNone/>
-            </a:pPr>
-            <a:endParaRPr lang="en-US" sz="1150" dirty="0"/>
-          </a:p>
-          <a:p>
-            <a:pPr indent="0" marL="0">
-              <a:lnSpc>
-                <a:spcPct val="115000"/>
-              </a:lnSpc>
-              <a:buNone/>
-            </a:pPr>
-            <a:r>
-              <a:rPr lang="en-US" sz="1150" dirty="0">
+            <a:endParaRPr lang="en-US" sz="1137" dirty="0"/>
+          </a:p>
+          <a:p>
+            <a:pPr indent="0" marL="0">
+              <a:lnSpc>
+                <a:spcPct val="115000"/>
+              </a:lnSpc>
+              <a:buNone/>
+            </a:pPr>
+            <a:endParaRPr lang="en-US" sz="1137" dirty="0"/>
+          </a:p>
+          <a:p>
+            <a:pPr indent="0" marL="0">
+              <a:lnSpc>
+                <a:spcPct val="115000"/>
+              </a:lnSpc>
+              <a:buNone/>
+            </a:pPr>
+            <a:r>
+              <a:rPr lang="en-US" sz="1137" dirty="0">
                 <a:solidFill>
                   <a:srgbClr val="E5E7EB"/>
                 </a:solidFill>
@@ -26046,7 +26046,7 @@
               <a:buNone/>
             </a:pPr>
             <a:r>
-              <a:rPr lang="en-US" sz="1150" dirty="0">
+              <a:rPr lang="en-US" sz="1137" dirty="0">
                 <a:solidFill>
                   <a:srgbClr val="94A3B8"/>
                 </a:solidFill>
@@ -26062,17 +26062,17 @@
               </a:lnSpc>
               <a:buNone/>
             </a:pPr>
-            <a:endParaRPr lang="en-US" sz="1150" dirty="0"/>
-          </a:p>
-          <a:p>
-            <a:pPr indent="0" marL="0">
-              <a:lnSpc>
-                <a:spcPct val="115000"/>
-              </a:lnSpc>
-              <a:buNone/>
-            </a:pPr>
-            <a:r>
-              <a:rPr lang="en-US" sz="1150" b="1" dirty="0">
+            <a:endParaRPr lang="en-US" sz="1137" dirty="0"/>
+          </a:p>
+          <a:p>
+            <a:pPr indent="0" marL="0">
+              <a:lnSpc>
+                <a:spcPct val="115000"/>
+              </a:lnSpc>
+              <a:buNone/>
+            </a:pPr>
+            <a:r>
+              <a:rPr lang="en-US" sz="1137" b="1" dirty="0">
                 <a:solidFill>
                   <a:srgbClr val="93C5FD"/>
                 </a:solidFill>
@@ -26089,7 +26089,7 @@
               <a:buNone/>
             </a:pPr>
             <a:r>
-              <a:rPr lang="en-US" sz="1150" dirty="0">
+              <a:rPr lang="en-US" sz="1137" dirty="0">
                 <a:solidFill>
                   <a:srgbClr val="E5E7EB"/>
                 </a:solidFill>
@@ -26105,26 +26105,26 @@
               </a:lnSpc>
               <a:buNone/>
             </a:pPr>
-            <a:endParaRPr lang="en-US" sz="1150" dirty="0"/>
-          </a:p>
-          <a:p>
-            <a:pPr indent="0" marL="0">
-              <a:lnSpc>
-                <a:spcPct val="115000"/>
-              </a:lnSpc>
-              <a:buNone/>
-            </a:pPr>
-            <a:endParaRPr lang="en-US" sz="1150" dirty="0"/>
-          </a:p>
-          <a:p>
-            <a:pPr indent="0" marL="0">
-              <a:lnSpc>
-                <a:spcPct val="115000"/>
-              </a:lnSpc>
-              <a:buNone/>
-            </a:pPr>
-            <a:r>
-              <a:rPr lang="en-US" sz="1150" dirty="0">
+            <a:endParaRPr lang="en-US" sz="1137" dirty="0"/>
+          </a:p>
+          <a:p>
+            <a:pPr indent="0" marL="0">
+              <a:lnSpc>
+                <a:spcPct val="115000"/>
+              </a:lnSpc>
+              <a:buNone/>
+            </a:pPr>
+            <a:endParaRPr lang="en-US" sz="1137" dirty="0"/>
+          </a:p>
+          <a:p>
+            <a:pPr indent="0" marL="0">
+              <a:lnSpc>
+                <a:spcPct val="115000"/>
+              </a:lnSpc>
+              <a:buNone/>
+            </a:pPr>
+            <a:r>
+              <a:rPr lang="en-US" sz="1137" dirty="0">
                 <a:solidFill>
                   <a:srgbClr val="E5E7EB"/>
                 </a:solidFill>
@@ -26141,7 +26141,7 @@
               <a:buNone/>
             </a:pPr>
             <a:r>
-              <a:rPr lang="en-US" sz="1150" dirty="0">
+              <a:rPr lang="en-US" sz="1137" dirty="0">
                 <a:solidFill>
                   <a:srgbClr val="94A3B8"/>
                 </a:solidFill>
@@ -26157,17 +26157,17 @@
               </a:lnSpc>
               <a:buNone/>
             </a:pPr>
-            <a:endParaRPr lang="en-US" sz="1150" dirty="0"/>
-          </a:p>
-          <a:p>
-            <a:pPr indent="0" marL="0">
-              <a:lnSpc>
-                <a:spcPct val="115000"/>
-              </a:lnSpc>
-              <a:buNone/>
-            </a:pPr>
-            <a:r>
-              <a:rPr lang="en-US" sz="1150" b="1" dirty="0">
+            <a:endParaRPr lang="en-US" sz="1137" dirty="0"/>
+          </a:p>
+          <a:p>
+            <a:pPr indent="0" marL="0">
+              <a:lnSpc>
+                <a:spcPct val="115000"/>
+              </a:lnSpc>
+              <a:buNone/>
+            </a:pPr>
+            <a:r>
+              <a:rPr lang="en-US" sz="1137" b="1" dirty="0">
                 <a:solidFill>
                   <a:srgbClr val="93C5FD"/>
                 </a:solidFill>
@@ -26184,7 +26184,7 @@
               <a:buNone/>
             </a:pPr>
             <a:r>
-              <a:rPr lang="en-US" sz="1150" dirty="0">
+              <a:rPr lang="en-US" sz="1137" dirty="0">
                 <a:solidFill>
                   <a:srgbClr val="E5E7EB"/>
                 </a:solidFill>
@@ -26194,7 +26194,7 @@
               </a:rPr>
               <a:t>(result, result[2])</a:t>
             </a:r>
-            <a:endParaRPr lang="en-US" sz="1150" dirty="0"/>
+            <a:endParaRPr lang="en-US" sz="1137" dirty="0"/>
           </a:p>
         </p:txBody>
       </p:sp>
@@ -26292,7 +26292,7 @@
               <a:buNone/>
             </a:pPr>
             <a:r>
-              <a:rPr lang="en-US" sz="1009" dirty="0">
+              <a:rPr lang="en-US" sz="887" dirty="0">
                 <a:solidFill>
                   <a:srgbClr val="0F172A"/>
                 </a:solidFill>
@@ -26302,17 +26302,17 @@
               </a:rPr>
               <a:t>75 90 81.66666666666667</a:t>
             </a:r>
-            <a:endParaRPr lang="en-US" sz="1009" dirty="0"/>
-          </a:p>
-          <a:p>
-            <a:pPr indent="0" marL="0">
-              <a:lnSpc>
-                <a:spcPct val="115000"/>
-              </a:lnSpc>
-              <a:buNone/>
-            </a:pPr>
-            <a:r>
-              <a:rPr lang="en-US" sz="1009" dirty="0">
+            <a:endParaRPr lang="en-US" sz="887" dirty="0"/>
+          </a:p>
+          <a:p>
+            <a:pPr indent="0" marL="0">
+              <a:lnSpc>
+                <a:spcPct val="115000"/>
+              </a:lnSpc>
+              <a:buNone/>
+            </a:pPr>
+            <a:r>
+              <a:rPr lang="en-US" sz="887" dirty="0">
                 <a:solidFill>
                   <a:srgbClr val="0F172A"/>
                 </a:solidFill>
@@ -26322,7 +26322,7 @@
               </a:rPr>
               <a:t>(75, 90, 81.66666666666667) 81.66666666666667</a:t>
             </a:r>
-            <a:endParaRPr lang="en-US" sz="1009" dirty="0"/>
+            <a:endParaRPr lang="en-US" sz="887" dirty="0"/>
           </a:p>
         </p:txBody>
       </p:sp>
@@ -26629,7 +26629,7 @@
               <a:buNone/>
             </a:pPr>
             <a:r>
-              <a:rPr lang="en-US" sz="2800" b="1" dirty="0">
+              <a:rPr lang="en-US" sz="2300" b="1" dirty="0">
                 <a:solidFill>
                   <a:srgbClr val="0F172A"/>
                 </a:solidFill>
@@ -26639,7 +26639,7 @@
               </a:rPr>
               <a:t>AICE 실기 패턴 — apply 로 열 전체에 적용</a:t>
             </a:r>
-            <a:endParaRPr lang="en-US" sz="2800" dirty="0"/>
+            <a:endParaRPr lang="en-US" sz="2300" dirty="0"/>
           </a:p>
         </p:txBody>
       </p:sp>
@@ -26698,7 +26698,7 @@
               <a:buNone/>
             </a:pPr>
             <a:r>
-              <a:rPr lang="en-US" sz="1273" b="1" dirty="0">
+              <a:rPr lang="en-US" sz="1394" b="1" dirty="0">
                 <a:solidFill>
                   <a:srgbClr val="93C5FD"/>
                 </a:solidFill>
@@ -26715,7 +26715,7 @@
               <a:buNone/>
             </a:pPr>
             <a:r>
-              <a:rPr lang="en-US" sz="1273" dirty="0">
+              <a:rPr lang="en-US" sz="1394" dirty="0">
                 <a:solidFill>
                   <a:srgbClr val="E5E7EB"/>
                 </a:solidFill>
@@ -26732,7 +26732,7 @@
               <a:buNone/>
             </a:pPr>
             <a:r>
-              <a:rPr lang="en-US" sz="1273" b="1" dirty="0">
+              <a:rPr lang="en-US" sz="1394" b="1" dirty="0">
                 <a:solidFill>
                   <a:srgbClr val="93C5FD"/>
                 </a:solidFill>
@@ -26749,7 +26749,7 @@
               <a:buNone/>
             </a:pPr>
             <a:r>
-              <a:rPr lang="en-US" sz="1273" dirty="0">
+              <a:rPr lang="en-US" sz="1394" dirty="0">
                 <a:solidFill>
                   <a:srgbClr val="E5E7EB"/>
                 </a:solidFill>
@@ -26765,17 +26765,17 @@
               </a:lnSpc>
               <a:buNone/>
             </a:pPr>
-            <a:endParaRPr lang="en-US" sz="1273" dirty="0"/>
-          </a:p>
-          <a:p>
-            <a:pPr indent="0" marL="0">
-              <a:lnSpc>
-                <a:spcPct val="115000"/>
-              </a:lnSpc>
-              <a:buNone/>
-            </a:pPr>
-            <a:r>
-              <a:rPr lang="en-US" sz="1273" dirty="0">
+            <a:endParaRPr lang="en-US" sz="1394" dirty="0"/>
+          </a:p>
+          <a:p>
+            <a:pPr indent="0" marL="0">
+              <a:lnSpc>
+                <a:spcPct val="115000"/>
+              </a:lnSpc>
+              <a:buNone/>
+            </a:pPr>
+            <a:r>
+              <a:rPr lang="en-US" sz="1394" dirty="0">
                 <a:solidFill>
                   <a:srgbClr val="E5E7EB"/>
                 </a:solidFill>
@@ -26792,7 +26792,7 @@
               <a:buNone/>
             </a:pPr>
             <a:r>
-              <a:rPr lang="en-US" sz="1273" dirty="0">
+              <a:rPr lang="en-US" sz="1394" dirty="0">
                 <a:solidFill>
                   <a:srgbClr val="FCD34D"/>
                 </a:solidFill>
@@ -26809,7 +26809,7 @@
               <a:buNone/>
             </a:pPr>
             <a:r>
-              <a:rPr lang="en-US" sz="1273" dirty="0">
+              <a:rPr lang="en-US" sz="1394" dirty="0">
                 <a:solidFill>
                   <a:srgbClr val="E5E7EB"/>
                 </a:solidFill>
@@ -26825,26 +26825,26 @@
               </a:lnSpc>
               <a:buNone/>
             </a:pPr>
-            <a:endParaRPr lang="en-US" sz="1273" dirty="0"/>
-          </a:p>
-          <a:p>
-            <a:pPr indent="0" marL="0">
-              <a:lnSpc>
-                <a:spcPct val="115000"/>
-              </a:lnSpc>
-              <a:buNone/>
-            </a:pPr>
-            <a:endParaRPr lang="en-US" sz="1273" dirty="0"/>
-          </a:p>
-          <a:p>
-            <a:pPr indent="0" marL="0">
-              <a:lnSpc>
-                <a:spcPct val="115000"/>
-              </a:lnSpc>
-              <a:buNone/>
-            </a:pPr>
-            <a:r>
-              <a:rPr lang="en-US" sz="1273" b="1" dirty="0">
+            <a:endParaRPr lang="en-US" sz="1394" dirty="0"/>
+          </a:p>
+          <a:p>
+            <a:pPr indent="0" marL="0">
+              <a:lnSpc>
+                <a:spcPct val="115000"/>
+              </a:lnSpc>
+              <a:buNone/>
+            </a:pPr>
+            <a:endParaRPr lang="en-US" sz="1394" dirty="0"/>
+          </a:p>
+          <a:p>
+            <a:pPr indent="0" marL="0">
+              <a:lnSpc>
+                <a:spcPct val="115000"/>
+              </a:lnSpc>
+              <a:buNone/>
+            </a:pPr>
+            <a:r>
+              <a:rPr lang="en-US" sz="1394" b="1" dirty="0">
                 <a:solidFill>
                   <a:srgbClr val="93C5FD"/>
                 </a:solidFill>
@@ -26861,7 +26861,7 @@
               <a:buNone/>
             </a:pPr>
             <a:r>
-              <a:rPr lang="en-US" sz="1273" dirty="0">
+              <a:rPr lang="en-US" sz="1394" dirty="0">
                 <a:solidFill>
                   <a:srgbClr val="E5E7EB"/>
                 </a:solidFill>
@@ -26877,17 +26877,17 @@
               </a:lnSpc>
               <a:buNone/>
             </a:pPr>
-            <a:endParaRPr lang="en-US" sz="1273" dirty="0"/>
-          </a:p>
-          <a:p>
-            <a:pPr indent="0" marL="0">
-              <a:lnSpc>
-                <a:spcPct val="115000"/>
-              </a:lnSpc>
-              <a:buNone/>
-            </a:pPr>
-            <a:r>
-              <a:rPr lang="en-US" sz="1273" dirty="0">
+            <a:endParaRPr lang="en-US" sz="1394" dirty="0"/>
+          </a:p>
+          <a:p>
+            <a:pPr indent="0" marL="0">
+              <a:lnSpc>
+                <a:spcPct val="115000"/>
+              </a:lnSpc>
+              <a:buNone/>
+            </a:pPr>
+            <a:r>
+              <a:rPr lang="en-US" sz="1394" dirty="0">
                 <a:solidFill>
                   <a:srgbClr val="E5E7EB"/>
                 </a:solidFill>
@@ -26904,7 +26904,7 @@
               <a:buNone/>
             </a:pPr>
             <a:r>
-              <a:rPr lang="en-US" sz="1273" b="1" dirty="0">
+              <a:rPr lang="en-US" sz="1394" b="1" dirty="0">
                 <a:solidFill>
                   <a:srgbClr val="93C5FD"/>
                 </a:solidFill>
@@ -26921,7 +26921,7 @@
               <a:buNone/>
             </a:pPr>
             <a:r>
-              <a:rPr lang="en-US" sz="1273" dirty="0">
+              <a:rPr lang="en-US" sz="1394" dirty="0">
                 <a:solidFill>
                   <a:srgbClr val="E5E7EB"/>
                 </a:solidFill>
@@ -26937,17 +26937,17 @@
               </a:lnSpc>
               <a:buNone/>
             </a:pPr>
-            <a:endParaRPr lang="en-US" sz="1273" dirty="0"/>
-          </a:p>
-          <a:p>
-            <a:pPr indent="0" marL="0">
-              <a:lnSpc>
-                <a:spcPct val="115000"/>
-              </a:lnSpc>
-              <a:buNone/>
-            </a:pPr>
-            <a:r>
-              <a:rPr lang="en-US" sz="1273" dirty="0">
+            <a:endParaRPr lang="en-US" sz="1394" dirty="0"/>
+          </a:p>
+          <a:p>
+            <a:pPr indent="0" marL="0">
+              <a:lnSpc>
+                <a:spcPct val="115000"/>
+              </a:lnSpc>
+              <a:buNone/>
+            </a:pPr>
+            <a:r>
+              <a:rPr lang="en-US" sz="1394" dirty="0">
                 <a:solidFill>
                   <a:srgbClr val="E5E7EB"/>
                 </a:solidFill>
@@ -26964,7 +26964,7 @@
               <a:buNone/>
             </a:pPr>
             <a:r>
-              <a:rPr lang="en-US" sz="1273" b="1" dirty="0">
+              <a:rPr lang="en-US" sz="1394" b="1" dirty="0">
                 <a:solidFill>
                   <a:srgbClr val="93C5FD"/>
                 </a:solidFill>
@@ -26981,7 +26981,7 @@
               <a:buNone/>
             </a:pPr>
             <a:r>
-              <a:rPr lang="en-US" sz="1273" dirty="0">
+              <a:rPr lang="en-US" sz="1394" dirty="0">
                 <a:solidFill>
                   <a:srgbClr val="E5E7EB"/>
                 </a:solidFill>
@@ -26998,7 +26998,7 @@
               <a:buNone/>
             </a:pPr>
             <a:r>
-              <a:rPr lang="en-US" sz="1273" dirty="0">
+              <a:rPr lang="en-US" sz="1394" dirty="0">
                 <a:solidFill>
                   <a:srgbClr val="FCD34D"/>
                 </a:solidFill>
@@ -27014,17 +27014,17 @@
               </a:lnSpc>
               <a:buNone/>
             </a:pPr>
-            <a:endParaRPr lang="en-US" sz="1273" dirty="0"/>
-          </a:p>
-          <a:p>
-            <a:pPr indent="0" marL="0">
-              <a:lnSpc>
-                <a:spcPct val="115000"/>
-              </a:lnSpc>
-              <a:buNone/>
-            </a:pPr>
-            <a:r>
-              <a:rPr lang="en-US" sz="1273" dirty="0">
+            <a:endParaRPr lang="en-US" sz="1394" dirty="0"/>
+          </a:p>
+          <a:p>
+            <a:pPr indent="0" marL="0">
+              <a:lnSpc>
+                <a:spcPct val="115000"/>
+              </a:lnSpc>
+              <a:buNone/>
+            </a:pPr>
+            <a:r>
+              <a:rPr lang="en-US" sz="1394" dirty="0">
                 <a:solidFill>
                   <a:srgbClr val="E5E7EB"/>
                 </a:solidFill>
@@ -27041,7 +27041,7 @@
               <a:buNone/>
             </a:pPr>
             <a:r>
-              <a:rPr lang="en-US" sz="1273" b="1" dirty="0">
+              <a:rPr lang="en-US" sz="1394" b="1" dirty="0">
                 <a:solidFill>
                   <a:srgbClr val="93C5FD"/>
                 </a:solidFill>
@@ -27058,7 +27058,7 @@
               <a:buNone/>
             </a:pPr>
             <a:r>
-              <a:rPr lang="en-US" sz="1273" dirty="0">
+              <a:rPr lang="en-US" sz="1394" dirty="0">
                 <a:solidFill>
                   <a:srgbClr val="E5E7EB"/>
                 </a:solidFill>
@@ -27074,17 +27074,17 @@
               </a:lnSpc>
               <a:buNone/>
             </a:pPr>
-            <a:endParaRPr lang="en-US" sz="1273" dirty="0"/>
-          </a:p>
-          <a:p>
-            <a:pPr indent="0" marL="0">
-              <a:lnSpc>
-                <a:spcPct val="115000"/>
-              </a:lnSpc>
-              <a:buNone/>
-            </a:pPr>
-            <a:r>
-              <a:rPr lang="en-US" sz="1273" dirty="0">
+            <a:endParaRPr lang="en-US" sz="1394" dirty="0"/>
+          </a:p>
+          <a:p>
+            <a:pPr indent="0" marL="0">
+              <a:lnSpc>
+                <a:spcPct val="115000"/>
+              </a:lnSpc>
+              <a:buNone/>
+            </a:pPr>
+            <a:r>
+              <a:rPr lang="en-US" sz="1394" dirty="0">
                 <a:solidFill>
                   <a:srgbClr val="E5E7EB"/>
                 </a:solidFill>
@@ -27101,7 +27101,7 @@
               <a:buNone/>
             </a:pPr>
             <a:r>
-              <a:rPr lang="en-US" sz="1273" b="1" dirty="0">
+              <a:rPr lang="en-US" sz="1394" b="1" dirty="0">
                 <a:solidFill>
                   <a:srgbClr val="93C5FD"/>
                 </a:solidFill>
@@ -27118,7 +27118,7 @@
               <a:buNone/>
             </a:pPr>
             <a:r>
-              <a:rPr lang="en-US" sz="1273" dirty="0">
+              <a:rPr lang="en-US" sz="1394" dirty="0">
                 <a:solidFill>
                   <a:srgbClr val="E5E7EB"/>
                 </a:solidFill>
@@ -27135,7 +27135,7 @@
               <a:buNone/>
             </a:pPr>
             <a:r>
-              <a:rPr lang="en-US" sz="1273" dirty="0">
+              <a:rPr lang="en-US" sz="1394" dirty="0">
                 <a:solidFill>
                   <a:srgbClr val="FCD34D"/>
                 </a:solidFill>
@@ -27151,17 +27151,17 @@
               </a:lnSpc>
               <a:buNone/>
             </a:pPr>
-            <a:endParaRPr lang="en-US" sz="1273" dirty="0"/>
-          </a:p>
-          <a:p>
-            <a:pPr indent="0" marL="0">
-              <a:lnSpc>
-                <a:spcPct val="115000"/>
-              </a:lnSpc>
-              <a:buNone/>
-            </a:pPr>
-            <a:r>
-              <a:rPr lang="en-US" sz="1273" dirty="0">
+            <a:endParaRPr lang="en-US" sz="1394" dirty="0"/>
+          </a:p>
+          <a:p>
+            <a:pPr indent="0" marL="0">
+              <a:lnSpc>
+                <a:spcPct val="115000"/>
+              </a:lnSpc>
+              <a:buNone/>
+            </a:pPr>
+            <a:r>
+              <a:rPr lang="en-US" sz="1394" dirty="0">
                 <a:solidFill>
                   <a:srgbClr val="E5E7EB"/>
                 </a:solidFill>
@@ -27178,7 +27178,7 @@
               <a:buNone/>
             </a:pPr>
             <a:r>
-              <a:rPr lang="en-US" sz="1273" b="1" dirty="0">
+              <a:rPr lang="en-US" sz="1394" b="1" dirty="0">
                 <a:solidFill>
                   <a:srgbClr val="93C5FD"/>
                 </a:solidFill>
@@ -27195,7 +27195,7 @@
               <a:buNone/>
             </a:pPr>
             <a:r>
-              <a:rPr lang="en-US" sz="1273" dirty="0">
+              <a:rPr lang="en-US" sz="1394" dirty="0">
                 <a:solidFill>
                   <a:srgbClr val="E5E7EB"/>
                 </a:solidFill>
@@ -27212,7 +27212,7 @@
               <a:buNone/>
             </a:pPr>
             <a:r>
-              <a:rPr lang="en-US" sz="1273" dirty="0">
+              <a:rPr lang="en-US" sz="1394" dirty="0">
                 <a:solidFill>
                   <a:srgbClr val="FCD34D"/>
                 </a:solidFill>
@@ -27228,26 +27228,26 @@
               </a:lnSpc>
               <a:buNone/>
             </a:pPr>
-            <a:endParaRPr lang="en-US" sz="1273" dirty="0"/>
-          </a:p>
-          <a:p>
-            <a:pPr indent="0" marL="0">
-              <a:lnSpc>
-                <a:spcPct val="115000"/>
-              </a:lnSpc>
-              <a:buNone/>
-            </a:pPr>
-            <a:endParaRPr lang="en-US" sz="1273" dirty="0"/>
-          </a:p>
-          <a:p>
-            <a:pPr indent="0" marL="0">
-              <a:lnSpc>
-                <a:spcPct val="115000"/>
-              </a:lnSpc>
-              <a:buNone/>
-            </a:pPr>
-            <a:r>
-              <a:rPr lang="en-US" sz="1273" dirty="0">
+            <a:endParaRPr lang="en-US" sz="1394" dirty="0"/>
+          </a:p>
+          <a:p>
+            <a:pPr indent="0" marL="0">
+              <a:lnSpc>
+                <a:spcPct val="115000"/>
+              </a:lnSpc>
+              <a:buNone/>
+            </a:pPr>
+            <a:endParaRPr lang="en-US" sz="1394" dirty="0"/>
+          </a:p>
+          <a:p>
+            <a:pPr indent="0" marL="0">
+              <a:lnSpc>
+                <a:spcPct val="115000"/>
+              </a:lnSpc>
+              <a:buNone/>
+            </a:pPr>
+            <a:r>
+              <a:rPr lang="en-US" sz="1394" dirty="0">
                 <a:solidFill>
                   <a:srgbClr val="E5E7EB"/>
                 </a:solidFill>
@@ -27264,7 +27264,7 @@
               <a:buNone/>
             </a:pPr>
             <a:r>
-              <a:rPr lang="en-US" sz="1273" dirty="0">
+              <a:rPr lang="en-US" sz="1394" dirty="0">
                 <a:solidFill>
                   <a:srgbClr val="FCD34D"/>
                 </a:solidFill>
@@ -27281,7 +27281,7 @@
               <a:buNone/>
             </a:pPr>
             <a:r>
-              <a:rPr lang="en-US" sz="1273" dirty="0">
+              <a:rPr lang="en-US" sz="1394" dirty="0">
                 <a:solidFill>
                   <a:srgbClr val="E5E7EB"/>
                 </a:solidFill>
@@ -27298,7 +27298,7 @@
               <a:buNone/>
             </a:pPr>
             <a:r>
-              <a:rPr lang="en-US" sz="1273" dirty="0">
+              <a:rPr lang="en-US" sz="1394" dirty="0">
                 <a:solidFill>
                   <a:srgbClr val="FCD34D"/>
                 </a:solidFill>
@@ -27315,7 +27315,7 @@
               <a:buNone/>
             </a:pPr>
             <a:r>
-              <a:rPr lang="en-US" sz="1273" dirty="0">
+              <a:rPr lang="en-US" sz="1394" dirty="0">
                 <a:solidFill>
                   <a:srgbClr val="E5E7EB"/>
                 </a:solidFill>
@@ -27331,17 +27331,17 @@
               </a:lnSpc>
               <a:buNone/>
             </a:pPr>
-            <a:endParaRPr lang="en-US" sz="1273" dirty="0"/>
-          </a:p>
-          <a:p>
-            <a:pPr indent="0" marL="0">
-              <a:lnSpc>
-                <a:spcPct val="115000"/>
-              </a:lnSpc>
-              <a:buNone/>
-            </a:pPr>
-            <a:r>
-              <a:rPr lang="en-US" sz="1273" b="1" dirty="0">
+            <a:endParaRPr lang="en-US" sz="1394" dirty="0"/>
+          </a:p>
+          <a:p>
+            <a:pPr indent="0" marL="0">
+              <a:lnSpc>
+                <a:spcPct val="115000"/>
+              </a:lnSpc>
+              <a:buNone/>
+            </a:pPr>
+            <a:r>
+              <a:rPr lang="en-US" sz="1394" b="1" dirty="0">
                 <a:solidFill>
                   <a:srgbClr val="93C5FD"/>
                 </a:solidFill>
@@ -27358,7 +27358,7 @@
               <a:buNone/>
             </a:pPr>
             <a:r>
-              <a:rPr lang="en-US" sz="1273" dirty="0">
+              <a:rPr lang="en-US" sz="1394" dirty="0">
                 <a:solidFill>
                   <a:srgbClr val="E5E7EB"/>
                 </a:solidFill>
@@ -27368,7 +27368,7 @@
               </a:rPr>
               <a:t>(df)</a:t>
             </a:r>
-            <a:endParaRPr lang="en-US" sz="1273" dirty="0"/>
+            <a:endParaRPr lang="en-US" sz="1394" dirty="0"/>
           </a:p>
         </p:txBody>
       </p:sp>
@@ -27466,7 +27466,7 @@
               <a:buNone/>
             </a:pPr>
             <a:r>
-              <a:rPr lang="en-US" sz="1255" dirty="0">
+              <a:rPr lang="en-US" sz="1141" dirty="0">
                 <a:solidFill>
                   <a:srgbClr val="0F172A"/>
                 </a:solidFill>
@@ -27476,17 +27476,17 @@
               </a:rPr>
               <a:t>   score        tier</a:t>
             </a:r>
-            <a:endParaRPr lang="en-US" sz="1255" dirty="0"/>
-          </a:p>
-          <a:p>
-            <a:pPr indent="0" marL="0">
-              <a:lnSpc>
-                <a:spcPct val="115000"/>
-              </a:lnSpc>
-              <a:buNone/>
-            </a:pPr>
-            <a:r>
-              <a:rPr lang="en-US" sz="1255" dirty="0">
+            <a:endParaRPr lang="en-US" sz="1141" dirty="0"/>
+          </a:p>
+          <a:p>
+            <a:pPr indent="0" marL="0">
+              <a:lnSpc>
+                <a:spcPct val="115000"/>
+              </a:lnSpc>
+              <a:buNone/>
+            </a:pPr>
+            <a:r>
+              <a:rPr lang="en-US" sz="1141" dirty="0">
                 <a:solidFill>
                   <a:srgbClr val="0F172A"/>
                 </a:solidFill>
@@ -27496,17 +27496,17 @@
               </a:rPr>
               <a:t>0     95  CHALLENGER</a:t>
             </a:r>
-            <a:endParaRPr lang="en-US" sz="1255" dirty="0"/>
-          </a:p>
-          <a:p>
-            <a:pPr indent="0" marL="0">
-              <a:lnSpc>
-                <a:spcPct val="115000"/>
-              </a:lnSpc>
-              <a:buNone/>
-            </a:pPr>
-            <a:r>
-              <a:rPr lang="en-US" sz="1255" dirty="0">
+            <a:endParaRPr lang="en-US" sz="1141" dirty="0"/>
+          </a:p>
+          <a:p>
+            <a:pPr indent="0" marL="0">
+              <a:lnSpc>
+                <a:spcPct val="115000"/>
+              </a:lnSpc>
+              <a:buNone/>
+            </a:pPr>
+            <a:r>
+              <a:rPr lang="en-US" sz="1141" dirty="0">
                 <a:solidFill>
                   <a:srgbClr val="0F172A"/>
                 </a:solidFill>
@@ -27516,17 +27516,17 @@
               </a:rPr>
               <a:t>1     82        GOLD</a:t>
             </a:r>
-            <a:endParaRPr lang="en-US" sz="1255" dirty="0"/>
-          </a:p>
-          <a:p>
-            <a:pPr indent="0" marL="0">
-              <a:lnSpc>
-                <a:spcPct val="115000"/>
-              </a:lnSpc>
-              <a:buNone/>
-            </a:pPr>
-            <a:r>
-              <a:rPr lang="en-US" sz="1255" dirty="0">
+            <a:endParaRPr lang="en-US" sz="1141" dirty="0"/>
+          </a:p>
+          <a:p>
+            <a:pPr indent="0" marL="0">
+              <a:lnSpc>
+                <a:spcPct val="115000"/>
+              </a:lnSpc>
+              <a:buNone/>
+            </a:pPr>
+            <a:r>
+              <a:rPr lang="en-US" sz="1141" dirty="0">
                 <a:solidFill>
                   <a:srgbClr val="0F172A"/>
                 </a:solidFill>
@@ -27536,7 +27536,7 @@
               </a:rPr>
               <a:t>2     67      BRONZE</a:t>
             </a:r>
-            <a:endParaRPr lang="en-US" sz="1255" dirty="0"/>
+            <a:endParaRPr lang="en-US" sz="1141" dirty="0"/>
           </a:p>
         </p:txBody>
       </p:sp>
@@ -29488,7 +29488,7 @@
               <a:buNone/>
             </a:pPr>
             <a:r>
-              <a:rPr lang="en-US" sz="2600" b="1" dirty="0">
+              <a:rPr lang="en-US" sz="2100" b="1" dirty="0">
                 <a:solidFill>
                   <a:srgbClr val="FFFFFF"/>
                 </a:solidFill>
@@ -29498,7 +29498,7 @@
               </a:rPr>
               <a:t>def 로 규칙을 만들고, return 으로 값을 돌려준다</a:t>
             </a:r>
-            <a:endParaRPr lang="en-US" sz="2600" dirty="0"/>
+            <a:endParaRPr lang="en-US" sz="2100" dirty="0"/>
           </a:p>
         </p:txBody>
       </p:sp>
@@ -30088,7 +30088,7 @@
               <a:buNone/>
             </a:pPr>
             <a:r>
-              <a:rPr lang="en-US" sz="4000" b="1" dirty="0">
+              <a:rPr lang="en-US" sz="3200" b="1" dirty="0">
                 <a:solidFill>
                   <a:srgbClr val="FFFFFF"/>
                 </a:solidFill>
@@ -30098,7 +30098,7 @@
               </a:rPr>
               <a:t>넘파이 배열 생성과 차원 변경</a:t>
             </a:r>
-            <a:endParaRPr lang="en-US" sz="4000" dirty="0"/>
+            <a:endParaRPr lang="en-US" sz="3200" dirty="0"/>
           </a:p>
         </p:txBody>
       </p:sp>
@@ -31393,7 +31393,7 @@
               <a:buNone/>
             </a:pPr>
             <a:r>
-              <a:rPr lang="en-US" sz="2800" b="1" dirty="0">
+              <a:rPr lang="en-US" sz="2300" b="1" dirty="0">
                 <a:solidFill>
                   <a:srgbClr val="0F172A"/>
                 </a:solidFill>
@@ -31403,7 +31403,7 @@
               </a:rPr>
               <a:t>np.array() — 리스트를 넘파이 배열로</a:t>
             </a:r>
-            <a:endParaRPr lang="en-US" sz="2800" dirty="0"/>
+            <a:endParaRPr lang="en-US" sz="2300" dirty="0"/>
           </a:p>
         </p:txBody>
       </p:sp>
@@ -31462,7 +31462,7 @@
               <a:buNone/>
             </a:pPr>
             <a:r>
-              <a:rPr lang="en-US" sz="1250" b="1" dirty="0">
+              <a:rPr lang="en-US" sz="1424" b="1" dirty="0">
                 <a:solidFill>
                   <a:srgbClr val="93C5FD"/>
                 </a:solidFill>
@@ -31479,7 +31479,7 @@
               <a:buNone/>
             </a:pPr>
             <a:r>
-              <a:rPr lang="en-US" sz="1250" dirty="0">
+              <a:rPr lang="en-US" sz="1424" dirty="0">
                 <a:solidFill>
                   <a:srgbClr val="E5E7EB"/>
                 </a:solidFill>
@@ -31496,7 +31496,7 @@
               <a:buNone/>
             </a:pPr>
             <a:r>
-              <a:rPr lang="en-US" sz="1250" b="1" dirty="0">
+              <a:rPr lang="en-US" sz="1424" b="1" dirty="0">
                 <a:solidFill>
                   <a:srgbClr val="93C5FD"/>
                 </a:solidFill>
@@ -31513,7 +31513,7 @@
               <a:buNone/>
             </a:pPr>
             <a:r>
-              <a:rPr lang="en-US" sz="1250" dirty="0">
+              <a:rPr lang="en-US" sz="1424" dirty="0">
                 <a:solidFill>
                   <a:srgbClr val="E5E7EB"/>
                 </a:solidFill>
@@ -31529,17 +31529,17 @@
               </a:lnSpc>
               <a:buNone/>
             </a:pPr>
-            <a:endParaRPr lang="en-US" sz="1250" dirty="0"/>
-          </a:p>
-          <a:p>
-            <a:pPr indent="0" marL="0">
-              <a:lnSpc>
-                <a:spcPct val="115000"/>
-              </a:lnSpc>
-              <a:buNone/>
-            </a:pPr>
-            <a:r>
-              <a:rPr lang="en-US" sz="1250" dirty="0">
+            <a:endParaRPr lang="en-US" sz="1424" dirty="0"/>
+          </a:p>
+          <a:p>
+            <a:pPr indent="0" marL="0">
+              <a:lnSpc>
+                <a:spcPct val="115000"/>
+              </a:lnSpc>
+              <a:buNone/>
+            </a:pPr>
+            <a:r>
+              <a:rPr lang="en-US" sz="1424" dirty="0">
                 <a:solidFill>
                   <a:srgbClr val="E5E7EB"/>
                 </a:solidFill>
@@ -31555,17 +31555,17 @@
               </a:lnSpc>
               <a:buNone/>
             </a:pPr>
-            <a:endParaRPr lang="en-US" sz="1250" dirty="0"/>
-          </a:p>
-          <a:p>
-            <a:pPr indent="0" marL="0">
-              <a:lnSpc>
-                <a:spcPct val="115000"/>
-              </a:lnSpc>
-              <a:buNone/>
-            </a:pPr>
-            <a:r>
-              <a:rPr lang="en-US" sz="1250" b="1" dirty="0">
+            <a:endParaRPr lang="en-US" sz="1424" dirty="0"/>
+          </a:p>
+          <a:p>
+            <a:pPr indent="0" marL="0">
+              <a:lnSpc>
+                <a:spcPct val="115000"/>
+              </a:lnSpc>
+              <a:buNone/>
+            </a:pPr>
+            <a:r>
+              <a:rPr lang="en-US" sz="1424" b="1" dirty="0">
                 <a:solidFill>
                   <a:srgbClr val="93C5FD"/>
                 </a:solidFill>
@@ -31582,7 +31582,7 @@
               <a:buNone/>
             </a:pPr>
             <a:r>
-              <a:rPr lang="en-US" sz="1250" dirty="0">
+              <a:rPr lang="en-US" sz="1424" dirty="0">
                 <a:solidFill>
                   <a:srgbClr val="E5E7EB"/>
                 </a:solidFill>
@@ -31598,17 +31598,17 @@
               </a:lnSpc>
               <a:buNone/>
             </a:pPr>
-            <a:endParaRPr lang="en-US" sz="1250" dirty="0"/>
-          </a:p>
-          <a:p>
-            <a:pPr indent="0" marL="0">
-              <a:lnSpc>
-                <a:spcPct val="115000"/>
-              </a:lnSpc>
-              <a:buNone/>
-            </a:pPr>
-            <a:r>
-              <a:rPr lang="en-US" sz="1250" b="1" dirty="0">
+            <a:endParaRPr lang="en-US" sz="1424" dirty="0"/>
+          </a:p>
+          <a:p>
+            <a:pPr indent="0" marL="0">
+              <a:lnSpc>
+                <a:spcPct val="115000"/>
+              </a:lnSpc>
+              <a:buNone/>
+            </a:pPr>
+            <a:r>
+              <a:rPr lang="en-US" sz="1424" b="1" dirty="0">
                 <a:solidFill>
                   <a:srgbClr val="93C5FD"/>
                 </a:solidFill>
@@ -31625,7 +31625,7 @@
               <a:buNone/>
             </a:pPr>
             <a:r>
-              <a:rPr lang="en-US" sz="1250" dirty="0">
+              <a:rPr lang="en-US" sz="1424" dirty="0">
                 <a:solidFill>
                   <a:srgbClr val="E5E7EB"/>
                 </a:solidFill>
@@ -31642,7 +31642,7 @@
               <a:buNone/>
             </a:pPr>
             <a:r>
-              <a:rPr lang="en-US" sz="1250" dirty="0">
+              <a:rPr lang="en-US" sz="1424" dirty="0">
                 <a:solidFill>
                   <a:srgbClr val="94A3B8"/>
                 </a:solidFill>
@@ -31658,17 +31658,17 @@
               </a:lnSpc>
               <a:buNone/>
             </a:pPr>
-            <a:endParaRPr lang="en-US" sz="1250" dirty="0"/>
-          </a:p>
-          <a:p>
-            <a:pPr indent="0" marL="0">
-              <a:lnSpc>
-                <a:spcPct val="115000"/>
-              </a:lnSpc>
-              <a:buNone/>
-            </a:pPr>
-            <a:r>
-              <a:rPr lang="en-US" sz="1250" b="1" dirty="0">
+            <a:endParaRPr lang="en-US" sz="1424" dirty="0"/>
+          </a:p>
+          <a:p>
+            <a:pPr indent="0" marL="0">
+              <a:lnSpc>
+                <a:spcPct val="115000"/>
+              </a:lnSpc>
+              <a:buNone/>
+            </a:pPr>
+            <a:r>
+              <a:rPr lang="en-US" sz="1424" b="1" dirty="0">
                 <a:solidFill>
                   <a:srgbClr val="93C5FD"/>
                 </a:solidFill>
@@ -31685,7 +31685,7 @@
               <a:buNone/>
             </a:pPr>
             <a:r>
-              <a:rPr lang="en-US" sz="1250" dirty="0">
+              <a:rPr lang="en-US" sz="1424" dirty="0">
                 <a:solidFill>
                   <a:srgbClr val="E5E7EB"/>
                 </a:solidFill>
@@ -31702,7 +31702,7 @@
               <a:buNone/>
             </a:pPr>
             <a:r>
-              <a:rPr lang="en-US" sz="1250" dirty="0">
+              <a:rPr lang="en-US" sz="1424" dirty="0">
                 <a:solidFill>
                   <a:srgbClr val="94A3B8"/>
                 </a:solidFill>
@@ -31712,7 +31712,7 @@
               </a:rPr>
               <a:t># 전체에 한 번에 계산</a:t>
             </a:r>
-            <a:endParaRPr lang="en-US" sz="1250" dirty="0"/>
+            <a:endParaRPr lang="en-US" sz="1424" dirty="0"/>
           </a:p>
         </p:txBody>
       </p:sp>
@@ -31810,7 +31810,7 @@
               <a:buNone/>
             </a:pPr>
             <a:r>
-              <a:rPr lang="en-US" sz="1400" dirty="0">
+              <a:rPr lang="en-US" sz="1268" dirty="0">
                 <a:solidFill>
                   <a:srgbClr val="0F172A"/>
                 </a:solidFill>
@@ -31820,17 +31820,17 @@
               </a:rPr>
               <a:t>[10 20 30 40 50 60]</a:t>
             </a:r>
-            <a:endParaRPr lang="en-US" sz="1400" dirty="0"/>
-          </a:p>
-          <a:p>
-            <a:pPr indent="0" marL="0">
-              <a:lnSpc>
-                <a:spcPct val="115000"/>
-              </a:lnSpc>
-              <a:buNone/>
-            </a:pPr>
-            <a:r>
-              <a:rPr lang="en-US" sz="1400" dirty="0">
+            <a:endParaRPr lang="en-US" sz="1268" dirty="0"/>
+          </a:p>
+          <a:p>
+            <a:pPr indent="0" marL="0">
+              <a:lnSpc>
+                <a:spcPct val="115000"/>
+              </a:lnSpc>
+              <a:buNone/>
+            </a:pPr>
+            <a:r>
+              <a:rPr lang="en-US" sz="1268" dirty="0">
                 <a:solidFill>
                   <a:srgbClr val="0F172A"/>
                 </a:solidFill>
@@ -31840,17 +31840,17 @@
               </a:rPr>
               <a:t>(6,)</a:t>
             </a:r>
-            <a:endParaRPr lang="en-US" sz="1400" dirty="0"/>
-          </a:p>
-          <a:p>
-            <a:pPr indent="0" marL="0">
-              <a:lnSpc>
-                <a:spcPct val="115000"/>
-              </a:lnSpc>
-              <a:buNone/>
-            </a:pPr>
-            <a:r>
-              <a:rPr lang="en-US" sz="1400" dirty="0">
+            <a:endParaRPr lang="en-US" sz="1268" dirty="0"/>
+          </a:p>
+          <a:p>
+            <a:pPr indent="0" marL="0">
+              <a:lnSpc>
+                <a:spcPct val="115000"/>
+              </a:lnSpc>
+              <a:buNone/>
+            </a:pPr>
+            <a:r>
+              <a:rPr lang="en-US" sz="1268" dirty="0">
                 <a:solidFill>
                   <a:srgbClr val="0F172A"/>
                 </a:solidFill>
@@ -31860,7 +31860,7 @@
               </a:rPr>
               <a:t>[ 20  40  60  80 100 120]</a:t>
             </a:r>
-            <a:endParaRPr lang="en-US" sz="1400" dirty="0"/>
+            <a:endParaRPr lang="en-US" sz="1268" dirty="0"/>
           </a:p>
         </p:txBody>
       </p:sp>
@@ -32167,7 +32167,7 @@
               <a:buNone/>
             </a:pPr>
             <a:r>
-              <a:rPr lang="en-US" sz="2800" b="1" dirty="0">
+              <a:rPr lang="en-US" sz="2300" b="1" dirty="0">
                 <a:solidFill>
                   <a:srgbClr val="0F172A"/>
                 </a:solidFill>
@@ -32177,7 +32177,7 @@
               </a:rPr>
               <a:t>reshape() — 개수는 그대로, 모양만 바꾼다</a:t>
             </a:r>
-            <a:endParaRPr lang="en-US" sz="2800" dirty="0"/>
+            <a:endParaRPr lang="en-US" sz="2300" dirty="0"/>
           </a:p>
         </p:txBody>
       </p:sp>
@@ -32236,7 +32236,7 @@
               <a:buNone/>
             </a:pPr>
             <a:r>
-              <a:rPr lang="en-US" sz="1258" dirty="0">
+              <a:rPr lang="en-US" sz="1515" dirty="0">
                 <a:solidFill>
                   <a:srgbClr val="E5E7EB"/>
                 </a:solidFill>
@@ -32252,17 +32252,17 @@
               </a:lnSpc>
               <a:buNone/>
             </a:pPr>
-            <a:endParaRPr lang="en-US" sz="1258" dirty="0"/>
-          </a:p>
-          <a:p>
-            <a:pPr indent="0" marL="0">
-              <a:lnSpc>
-                <a:spcPct val="115000"/>
-              </a:lnSpc>
-              <a:buNone/>
-            </a:pPr>
-            <a:r>
-              <a:rPr lang="en-US" sz="1258" b="1" dirty="0">
+            <a:endParaRPr lang="en-US" sz="1515" dirty="0"/>
+          </a:p>
+          <a:p>
+            <a:pPr indent="0" marL="0">
+              <a:lnSpc>
+                <a:spcPct val="115000"/>
+              </a:lnSpc>
+              <a:buNone/>
+            </a:pPr>
+            <a:r>
+              <a:rPr lang="en-US" sz="1515" b="1" dirty="0">
                 <a:solidFill>
                   <a:srgbClr val="93C5FD"/>
                 </a:solidFill>
@@ -32279,7 +32279,7 @@
               <a:buNone/>
             </a:pPr>
             <a:r>
-              <a:rPr lang="en-US" sz="1258" dirty="0">
+              <a:rPr lang="en-US" sz="1515" dirty="0">
                 <a:solidFill>
                   <a:srgbClr val="E5E7EB"/>
                 </a:solidFill>
@@ -32296,7 +32296,7 @@
               <a:buNone/>
             </a:pPr>
             <a:r>
-              <a:rPr lang="en-US" sz="1258" dirty="0">
+              <a:rPr lang="en-US" sz="1515" dirty="0">
                 <a:solidFill>
                   <a:srgbClr val="FCD34D"/>
                 </a:solidFill>
@@ -32313,7 +32313,7 @@
               <a:buNone/>
             </a:pPr>
             <a:r>
-              <a:rPr lang="en-US" sz="1258" dirty="0">
+              <a:rPr lang="en-US" sz="1515" dirty="0">
                 <a:solidFill>
                   <a:srgbClr val="E5E7EB"/>
                 </a:solidFill>
@@ -32329,17 +32329,17 @@
               </a:lnSpc>
               <a:buNone/>
             </a:pPr>
-            <a:endParaRPr lang="en-US" sz="1258" dirty="0"/>
-          </a:p>
-          <a:p>
-            <a:pPr indent="0" marL="0">
-              <a:lnSpc>
-                <a:spcPct val="115000"/>
-              </a:lnSpc>
-              <a:buNone/>
-            </a:pPr>
-            <a:r>
-              <a:rPr lang="en-US" sz="1258" b="1" dirty="0">
+            <a:endParaRPr lang="en-US" sz="1515" dirty="0"/>
+          </a:p>
+          <a:p>
+            <a:pPr indent="0" marL="0">
+              <a:lnSpc>
+                <a:spcPct val="115000"/>
+              </a:lnSpc>
+              <a:buNone/>
+            </a:pPr>
+            <a:r>
+              <a:rPr lang="en-US" sz="1515" b="1" dirty="0">
                 <a:solidFill>
                   <a:srgbClr val="93C5FD"/>
                 </a:solidFill>
@@ -32356,7 +32356,7 @@
               <a:buNone/>
             </a:pPr>
             <a:r>
-              <a:rPr lang="en-US" sz="1258" dirty="0">
+              <a:rPr lang="en-US" sz="1515" dirty="0">
                 <a:solidFill>
                   <a:srgbClr val="E5E7EB"/>
                 </a:solidFill>
@@ -32373,7 +32373,7 @@
               <a:buNone/>
             </a:pPr>
             <a:r>
-              <a:rPr lang="en-US" sz="1258" dirty="0">
+              <a:rPr lang="en-US" sz="1515" dirty="0">
                 <a:solidFill>
                   <a:srgbClr val="FCD34D"/>
                 </a:solidFill>
@@ -32390,7 +32390,7 @@
               <a:buNone/>
             </a:pPr>
             <a:r>
-              <a:rPr lang="en-US" sz="1258" dirty="0">
+              <a:rPr lang="en-US" sz="1515" dirty="0">
                 <a:solidFill>
                   <a:srgbClr val="E5E7EB"/>
                 </a:solidFill>
@@ -32406,17 +32406,17 @@
               </a:lnSpc>
               <a:buNone/>
             </a:pPr>
-            <a:endParaRPr lang="en-US" sz="1258" dirty="0"/>
-          </a:p>
-          <a:p>
-            <a:pPr indent="0" marL="0">
-              <a:lnSpc>
-                <a:spcPct val="115000"/>
-              </a:lnSpc>
-              <a:buNone/>
-            </a:pPr>
-            <a:r>
-              <a:rPr lang="en-US" sz="1258" b="1" dirty="0">
+            <a:endParaRPr lang="en-US" sz="1515" dirty="0"/>
+          </a:p>
+          <a:p>
+            <a:pPr indent="0" marL="0">
+              <a:lnSpc>
+                <a:spcPct val="115000"/>
+              </a:lnSpc>
+              <a:buNone/>
+            </a:pPr>
+            <a:r>
+              <a:rPr lang="en-US" sz="1515" b="1" dirty="0">
                 <a:solidFill>
                   <a:srgbClr val="93C5FD"/>
                 </a:solidFill>
@@ -32433,7 +32433,7 @@
               <a:buNone/>
             </a:pPr>
             <a:r>
-              <a:rPr lang="en-US" sz="1258" dirty="0">
+              <a:rPr lang="en-US" sz="1515" dirty="0">
                 <a:solidFill>
                   <a:srgbClr val="E5E7EB"/>
                 </a:solidFill>
@@ -32443,7 +32443,7 @@
               </a:rPr>
               <a:t>(matrix)</a:t>
             </a:r>
-            <a:endParaRPr lang="en-US" sz="1258" dirty="0"/>
+            <a:endParaRPr lang="en-US" sz="1515" dirty="0"/>
           </a:p>
         </p:txBody>
       </p:sp>
@@ -32541,7 +32541,7 @@
               <a:buNone/>
             </a:pPr>
             <a:r>
-              <a:rPr lang="en-US" sz="1400" dirty="0">
+              <a:rPr lang="en-US" sz="1331" dirty="0">
                 <a:solidFill>
                   <a:srgbClr val="0F172A"/>
                 </a:solidFill>
@@ -32551,17 +32551,17 @@
               </a:rPr>
               <a:t>1차원 원본 shape: (6,)</a:t>
             </a:r>
-            <a:endParaRPr lang="en-US" sz="1400" dirty="0"/>
-          </a:p>
-          <a:p>
-            <a:pPr indent="0" marL="0">
-              <a:lnSpc>
-                <a:spcPct val="115000"/>
-              </a:lnSpc>
-              <a:buNone/>
-            </a:pPr>
-            <a:r>
-              <a:rPr lang="en-US" sz="1400" dirty="0">
+            <a:endParaRPr lang="en-US" sz="1331" dirty="0"/>
+          </a:p>
+          <a:p>
+            <a:pPr indent="0" marL="0">
+              <a:lnSpc>
+                <a:spcPct val="115000"/>
+              </a:lnSpc>
+              <a:buNone/>
+            </a:pPr>
+            <a:r>
+              <a:rPr lang="en-US" sz="1331" dirty="0">
                 <a:solidFill>
                   <a:srgbClr val="0F172A"/>
                 </a:solidFill>
@@ -32571,17 +32571,17 @@
               </a:rPr>
               <a:t>변환된 2차원 shape: (2, 3)</a:t>
             </a:r>
-            <a:endParaRPr lang="en-US" sz="1400" dirty="0"/>
-          </a:p>
-          <a:p>
-            <a:pPr indent="0" marL="0">
-              <a:lnSpc>
-                <a:spcPct val="115000"/>
-              </a:lnSpc>
-              <a:buNone/>
-            </a:pPr>
-            <a:r>
-              <a:rPr lang="en-US" sz="1400" dirty="0">
+            <a:endParaRPr lang="en-US" sz="1331" dirty="0"/>
+          </a:p>
+          <a:p>
+            <a:pPr indent="0" marL="0">
+              <a:lnSpc>
+                <a:spcPct val="115000"/>
+              </a:lnSpc>
+              <a:buNone/>
+            </a:pPr>
+            <a:r>
+              <a:rPr lang="en-US" sz="1331" dirty="0">
                 <a:solidFill>
                   <a:srgbClr val="0F172A"/>
                 </a:solidFill>
@@ -32591,17 +32591,17 @@
               </a:rPr>
               <a:t>[[10 20 30]</a:t>
             </a:r>
-            <a:endParaRPr lang="en-US" sz="1400" dirty="0"/>
-          </a:p>
-          <a:p>
-            <a:pPr indent="0" marL="0">
-              <a:lnSpc>
-                <a:spcPct val="115000"/>
-              </a:lnSpc>
-              <a:buNone/>
-            </a:pPr>
-            <a:r>
-              <a:rPr lang="en-US" sz="1400" dirty="0">
+            <a:endParaRPr lang="en-US" sz="1331" dirty="0"/>
+          </a:p>
+          <a:p>
+            <a:pPr indent="0" marL="0">
+              <a:lnSpc>
+                <a:spcPct val="115000"/>
+              </a:lnSpc>
+              <a:buNone/>
+            </a:pPr>
+            <a:r>
+              <a:rPr lang="en-US" sz="1331" dirty="0">
                 <a:solidFill>
                   <a:srgbClr val="0F172A"/>
                 </a:solidFill>
@@ -32611,7 +32611,7 @@
               </a:rPr>
               <a:t> [40 50 60]]</a:t>
             </a:r>
-            <a:endParaRPr lang="en-US" sz="1400" dirty="0"/>
+            <a:endParaRPr lang="en-US" sz="1331" dirty="0"/>
           </a:p>
         </p:txBody>
       </p:sp>
@@ -33053,7 +33053,7 @@
               <a:buNone/>
             </a:pPr>
             <a:r>
-              <a:rPr lang="en-US" sz="1243" dirty="0">
+              <a:rPr lang="en-US" sz="1426" dirty="0">
                 <a:solidFill>
                   <a:srgbClr val="E5E7EB"/>
                 </a:solidFill>
@@ -33069,17 +33069,17 @@
               </a:lnSpc>
               <a:buNone/>
             </a:pPr>
-            <a:endParaRPr lang="en-US" sz="1243" dirty="0"/>
-          </a:p>
-          <a:p>
-            <a:pPr indent="0" marL="0">
-              <a:lnSpc>
-                <a:spcPct val="115000"/>
-              </a:lnSpc>
-              <a:buNone/>
-            </a:pPr>
-            <a:r>
-              <a:rPr lang="en-US" sz="1243" dirty="0">
+            <a:endParaRPr lang="en-US" sz="1426" dirty="0"/>
+          </a:p>
+          <a:p>
+            <a:pPr indent="0" marL="0">
+              <a:lnSpc>
+                <a:spcPct val="115000"/>
+              </a:lnSpc>
+              <a:buNone/>
+            </a:pPr>
+            <a:r>
+              <a:rPr lang="en-US" sz="1426" dirty="0">
                 <a:solidFill>
                   <a:srgbClr val="E5E7EB"/>
                 </a:solidFill>
@@ -33089,7 +33089,7 @@
               </a:rPr>
               <a:t> [40 50 60]]</a:t>
             </a:r>
-            <a:endParaRPr lang="en-US" sz="1243" dirty="0"/>
+            <a:endParaRPr lang="en-US" sz="1426" dirty="0"/>
           </a:p>
         </p:txBody>
       </p:sp>
@@ -33731,7 +33731,7 @@
               <a:buNone/>
             </a:pPr>
             <a:r>
-              <a:rPr lang="en-US" sz="1249" dirty="0">
+              <a:rPr lang="en-US" sz="1433" dirty="0">
                 <a:solidFill>
                   <a:srgbClr val="E5E7EB"/>
                 </a:solidFill>
@@ -33741,7 +33741,7 @@
               </a:rPr>
               <a:t>[[10 20 30 40 50 60]]</a:t>
             </a:r>
-            <a:endParaRPr lang="en-US" sz="1249" dirty="0"/>
+            <a:endParaRPr lang="en-US" sz="1433" dirty="0"/>
           </a:p>
         </p:txBody>
       </p:sp>
@@ -34489,7 +34489,7 @@
               <a:buNone/>
             </a:pPr>
             <a:r>
-              <a:rPr lang="en-US" sz="1482" dirty="0">
+              <a:rPr lang="en-US" sz="1600" dirty="0">
                 <a:solidFill>
                   <a:srgbClr val="E5E7EB"/>
                 </a:solidFill>
@@ -34505,17 +34505,17 @@
               </a:lnSpc>
               <a:buNone/>
             </a:pPr>
-            <a:endParaRPr lang="en-US" sz="1482" dirty="0"/>
-          </a:p>
-          <a:p>
-            <a:pPr indent="0" marL="0">
-              <a:lnSpc>
-                <a:spcPct val="115000"/>
-              </a:lnSpc>
-              <a:buNone/>
-            </a:pPr>
-            <a:r>
-              <a:rPr lang="en-US" sz="1482" b="1" dirty="0">
+            <a:endParaRPr lang="en-US" sz="1600" dirty="0"/>
+          </a:p>
+          <a:p>
+            <a:pPr indent="0" marL="0">
+              <a:lnSpc>
+                <a:spcPct val="115000"/>
+              </a:lnSpc>
+              <a:buNone/>
+            </a:pPr>
+            <a:r>
+              <a:rPr lang="en-US" sz="1600" b="1" dirty="0">
                 <a:solidFill>
                   <a:srgbClr val="93C5FD"/>
                 </a:solidFill>
@@ -34532,7 +34532,7 @@
               <a:buNone/>
             </a:pPr>
             <a:r>
-              <a:rPr lang="en-US" sz="1482" dirty="0">
+              <a:rPr lang="en-US" sz="1600" dirty="0">
                 <a:solidFill>
                   <a:srgbClr val="E5E7EB"/>
                 </a:solidFill>
@@ -34549,7 +34549,7 @@
               <a:buNone/>
             </a:pPr>
             <a:r>
-              <a:rPr lang="en-US" sz="1482" dirty="0">
+              <a:rPr lang="en-US" sz="1600" dirty="0">
                 <a:solidFill>
                   <a:srgbClr val="94A3B8"/>
                 </a:solidFill>
@@ -34565,17 +34565,17 @@
               </a:lnSpc>
               <a:buNone/>
             </a:pPr>
-            <a:endParaRPr lang="en-US" sz="1482" dirty="0"/>
-          </a:p>
-          <a:p>
-            <a:pPr indent="0" marL="0">
-              <a:lnSpc>
-                <a:spcPct val="115000"/>
-              </a:lnSpc>
-              <a:buNone/>
-            </a:pPr>
-            <a:r>
-              <a:rPr lang="en-US" sz="1482" b="1" dirty="0">
+            <a:endParaRPr lang="en-US" sz="1600" dirty="0"/>
+          </a:p>
+          <a:p>
+            <a:pPr indent="0" marL="0">
+              <a:lnSpc>
+                <a:spcPct val="115000"/>
+              </a:lnSpc>
+              <a:buNone/>
+            </a:pPr>
+            <a:r>
+              <a:rPr lang="en-US" sz="1600" b="1" dirty="0">
                 <a:solidFill>
                   <a:srgbClr val="93C5FD"/>
                 </a:solidFill>
@@ -34592,7 +34592,7 @@
               <a:buNone/>
             </a:pPr>
             <a:r>
-              <a:rPr lang="en-US" sz="1482" dirty="0">
+              <a:rPr lang="en-US" sz="1600" dirty="0">
                 <a:solidFill>
                   <a:srgbClr val="E5E7EB"/>
                 </a:solidFill>
@@ -34609,7 +34609,7 @@
               <a:buNone/>
             </a:pPr>
             <a:r>
-              <a:rPr lang="en-US" sz="1482" dirty="0">
+              <a:rPr lang="en-US" sz="1600" dirty="0">
                 <a:solidFill>
                   <a:srgbClr val="94A3B8"/>
                 </a:solidFill>
@@ -34619,7 +34619,7 @@
               </a:rPr>
               <a:t># (3, 1)  ← 모델에 넣을 모양</a:t>
             </a:r>
-            <a:endParaRPr lang="en-US" sz="1482" dirty="0"/>
+            <a:endParaRPr lang="en-US" sz="1600" dirty="0"/>
           </a:p>
         </p:txBody>
       </p:sp>
@@ -34758,7 +34758,7 @@
               <a:buNone/>
             </a:pPr>
             <a:r>
-              <a:rPr lang="en-US" sz="2800" b="1" dirty="0">
+              <a:rPr lang="en-US" sz="2300" b="1" dirty="0">
                 <a:solidFill>
                   <a:srgbClr val="0F172A"/>
                 </a:solidFill>
@@ -34768,7 +34768,7 @@
               </a:rPr>
               <a:t>AICE 실기 패턴 — fit 에러 한 줄로 해결</a:t>
             </a:r>
-            <a:endParaRPr lang="en-US" sz="2800" dirty="0"/>
+            <a:endParaRPr lang="en-US" sz="2300" dirty="0"/>
           </a:p>
         </p:txBody>
       </p:sp>
@@ -34827,7 +34827,7 @@
               <a:buNone/>
             </a:pPr>
             <a:r>
-              <a:rPr lang="en-US" sz="1150" dirty="0">
+              <a:rPr lang="en-US" sz="990" dirty="0">
                 <a:solidFill>
                   <a:srgbClr val="E5E7EB"/>
                 </a:solidFill>
@@ -34844,7 +34844,7 @@
               <a:buNone/>
             </a:pPr>
             <a:r>
-              <a:rPr lang="en-US" sz="1150" b="1" dirty="0">
+              <a:rPr lang="en-US" sz="990" b="1" dirty="0">
                 <a:solidFill>
                   <a:srgbClr val="93C5FD"/>
                 </a:solidFill>
@@ -34861,7 +34861,7 @@
               <a:buNone/>
             </a:pPr>
             <a:r>
-              <a:rPr lang="en-US" sz="1150" dirty="0">
+              <a:rPr lang="en-US" sz="990" dirty="0">
                 <a:solidFill>
                   <a:srgbClr val="E5E7EB"/>
                 </a:solidFill>
@@ -34877,17 +34877,17 @@
               </a:lnSpc>
               <a:buNone/>
             </a:pPr>
-            <a:endParaRPr lang="en-US" sz="1150" dirty="0"/>
-          </a:p>
-          <a:p>
-            <a:pPr indent="0" marL="0">
-              <a:lnSpc>
-                <a:spcPct val="115000"/>
-              </a:lnSpc>
-              <a:buNone/>
-            </a:pPr>
-            <a:r>
-              <a:rPr lang="en-US" sz="1150" dirty="0">
+            <a:endParaRPr lang="en-US" sz="990" dirty="0"/>
+          </a:p>
+          <a:p>
+            <a:pPr indent="0" marL="0">
+              <a:lnSpc>
+                <a:spcPct val="115000"/>
+              </a:lnSpc>
+              <a:buNone/>
+            </a:pPr>
+            <a:r>
+              <a:rPr lang="en-US" sz="990" dirty="0">
                 <a:solidFill>
                   <a:srgbClr val="E5E7EB"/>
                 </a:solidFill>
@@ -34904,7 +34904,7 @@
               <a:buNone/>
             </a:pPr>
             <a:r>
-              <a:rPr lang="en-US" sz="1150" dirty="0">
+              <a:rPr lang="en-US" sz="990" dirty="0">
                 <a:solidFill>
                   <a:srgbClr val="FCD34D"/>
                 </a:solidFill>
@@ -34921,7 +34921,7 @@
               <a:buNone/>
             </a:pPr>
             <a:r>
-              <a:rPr lang="en-US" sz="1150" dirty="0">
+              <a:rPr lang="en-US" sz="990" dirty="0">
                 <a:solidFill>
                   <a:srgbClr val="E5E7EB"/>
                 </a:solidFill>
@@ -34938,7 +34938,7 @@
               <a:buNone/>
             </a:pPr>
             <a:r>
-              <a:rPr lang="en-US" sz="1150" dirty="0">
+              <a:rPr lang="en-US" sz="990" dirty="0">
                 <a:solidFill>
                   <a:srgbClr val="94A3B8"/>
                 </a:solidFill>
@@ -34954,17 +34954,17 @@
               </a:lnSpc>
               <a:buNone/>
             </a:pPr>
-            <a:endParaRPr lang="en-US" sz="1150" dirty="0"/>
-          </a:p>
-          <a:p>
-            <a:pPr indent="0" marL="0">
-              <a:lnSpc>
-                <a:spcPct val="115000"/>
-              </a:lnSpc>
-              <a:buNone/>
-            </a:pPr>
-            <a:r>
-              <a:rPr lang="en-US" sz="1150" dirty="0">
+            <a:endParaRPr lang="en-US" sz="990" dirty="0"/>
+          </a:p>
+          <a:p>
+            <a:pPr indent="0" marL="0">
+              <a:lnSpc>
+                <a:spcPct val="115000"/>
+              </a:lnSpc>
+              <a:buNone/>
+            </a:pPr>
+            <a:r>
+              <a:rPr lang="en-US" sz="990" dirty="0">
                 <a:solidFill>
                   <a:srgbClr val="E5E7EB"/>
                 </a:solidFill>
@@ -34981,7 +34981,7 @@
               <a:buNone/>
             </a:pPr>
             <a:r>
-              <a:rPr lang="en-US" sz="1150" dirty="0">
+              <a:rPr lang="en-US" sz="990" dirty="0">
                 <a:solidFill>
                   <a:srgbClr val="FCD34D"/>
                 </a:solidFill>
@@ -34998,7 +34998,7 @@
               <a:buNone/>
             </a:pPr>
             <a:r>
-              <a:rPr lang="en-US" sz="1150" dirty="0">
+              <a:rPr lang="en-US" sz="990" dirty="0">
                 <a:solidFill>
                   <a:srgbClr val="E5E7EB"/>
                 </a:solidFill>
@@ -35014,26 +35014,26 @@
               </a:lnSpc>
               <a:buNone/>
             </a:pPr>
-            <a:endParaRPr lang="en-US" sz="1150" dirty="0"/>
-          </a:p>
-          <a:p>
-            <a:pPr indent="0" marL="0">
-              <a:lnSpc>
-                <a:spcPct val="115000"/>
-              </a:lnSpc>
-              <a:buNone/>
-            </a:pPr>
-            <a:endParaRPr lang="en-US" sz="1150" dirty="0"/>
-          </a:p>
-          <a:p>
-            <a:pPr indent="0" marL="0">
-              <a:lnSpc>
-                <a:spcPct val="115000"/>
-              </a:lnSpc>
-              <a:buNone/>
-            </a:pPr>
-            <a:r>
-              <a:rPr lang="en-US" sz="1150" dirty="0">
+            <a:endParaRPr lang="en-US" sz="990" dirty="0"/>
+          </a:p>
+          <a:p>
+            <a:pPr indent="0" marL="0">
+              <a:lnSpc>
+                <a:spcPct val="115000"/>
+              </a:lnSpc>
+              <a:buNone/>
+            </a:pPr>
+            <a:endParaRPr lang="en-US" sz="990" dirty="0"/>
+          </a:p>
+          <a:p>
+            <a:pPr indent="0" marL="0">
+              <a:lnSpc>
+                <a:spcPct val="115000"/>
+              </a:lnSpc>
+              <a:buNone/>
+            </a:pPr>
+            <a:r>
+              <a:rPr lang="en-US" sz="990" dirty="0">
                 <a:solidFill>
                   <a:srgbClr val="E5E7EB"/>
                 </a:solidFill>
@@ -35049,17 +35049,17 @@
               </a:lnSpc>
               <a:buNone/>
             </a:pPr>
-            <a:endParaRPr lang="en-US" sz="1150" dirty="0"/>
-          </a:p>
-          <a:p>
-            <a:pPr indent="0" marL="0">
-              <a:lnSpc>
-                <a:spcPct val="115000"/>
-              </a:lnSpc>
-              <a:buNone/>
-            </a:pPr>
-            <a:r>
-              <a:rPr lang="en-US" sz="1150" dirty="0">
+            <a:endParaRPr lang="en-US" sz="990" dirty="0"/>
+          </a:p>
+          <a:p>
+            <a:pPr indent="0" marL="0">
+              <a:lnSpc>
+                <a:spcPct val="115000"/>
+              </a:lnSpc>
+              <a:buNone/>
+            </a:pPr>
+            <a:r>
+              <a:rPr lang="en-US" sz="990" dirty="0">
                 <a:solidFill>
                   <a:srgbClr val="94A3B8"/>
                 </a:solidFill>
@@ -35075,17 +35075,17 @@
               </a:lnSpc>
               <a:buNone/>
             </a:pPr>
-            <a:endParaRPr lang="en-US" sz="1150" dirty="0"/>
-          </a:p>
-          <a:p>
-            <a:pPr indent="0" marL="0">
-              <a:lnSpc>
-                <a:spcPct val="115000"/>
-              </a:lnSpc>
-              <a:buNone/>
-            </a:pPr>
-            <a:r>
-              <a:rPr lang="en-US" sz="1150" dirty="0">
+            <a:endParaRPr lang="en-US" sz="990" dirty="0"/>
+          </a:p>
+          <a:p>
+            <a:pPr indent="0" marL="0">
+              <a:lnSpc>
+                <a:spcPct val="115000"/>
+              </a:lnSpc>
+              <a:buNone/>
+            </a:pPr>
+            <a:r>
+              <a:rPr lang="en-US" sz="990" dirty="0">
                 <a:solidFill>
                   <a:srgbClr val="E5E7EB"/>
                 </a:solidFill>
@@ -35102,7 +35102,7 @@
               <a:buNone/>
             </a:pPr>
             <a:r>
-              <a:rPr lang="en-US" sz="1150" dirty="0">
+              <a:rPr lang="en-US" sz="990" dirty="0">
                 <a:solidFill>
                   <a:srgbClr val="94A3B8"/>
                 </a:solidFill>
@@ -35112,7 +35112,7 @@
               </a:rPr>
               <a:t># OK  (100, 1)</a:t>
             </a:r>
-            <a:endParaRPr lang="en-US" sz="1150" dirty="0"/>
+            <a:endParaRPr lang="en-US" sz="990" dirty="0"/>
           </a:p>
         </p:txBody>
       </p:sp>
@@ -35427,7 +35427,7 @@
               <a:buNone/>
             </a:pPr>
             <a:r>
-              <a:rPr lang="en-US" sz="2800" b="1" dirty="0">
+              <a:rPr lang="en-US" sz="2300" b="1" dirty="0">
                 <a:solidFill>
                   <a:srgbClr val="0F172A"/>
                 </a:solidFill>
@@ -35437,7 +35437,7 @@
               </a:rPr>
               <a:t>실습 — 앱 10차시 (10분) · 확인 퀴즈</a:t>
             </a:r>
-            <a:endParaRPr lang="en-US" sz="2800" dirty="0"/>
+            <a:endParaRPr lang="en-US" sz="2300" dirty="0"/>
           </a:p>
         </p:txBody>
       </p:sp>
@@ -36299,7 +36299,7 @@
               <a:buNone/>
             </a:pPr>
             <a:r>
-              <a:rPr lang="en-US" sz="2600" b="1" dirty="0">
+              <a:rPr lang="en-US" sz="2100" b="1" dirty="0">
                 <a:solidFill>
                   <a:srgbClr val="FFFFFF"/>
                 </a:solidFill>
@@ -36309,7 +36309,7 @@
               </a:rPr>
               <a:t>np.array 로 배열, reshape 으로 모양 — 개수는 그대로</a:t>
             </a:r>
-            <a:endParaRPr lang="en-US" sz="2600" dirty="0"/>
+            <a:endParaRPr lang="en-US" sz="2100" dirty="0"/>
           </a:p>
         </p:txBody>
       </p:sp>
@@ -36899,7 +36899,7 @@
               <a:buNone/>
             </a:pPr>
             <a:r>
-              <a:rPr lang="en-US" sz="2800" b="1" dirty="0">
+              <a:rPr lang="en-US" sz="2300" b="1" dirty="0">
                 <a:solidFill>
                   <a:srgbClr val="0F172A"/>
                 </a:solidFill>
@@ -36909,7 +36909,7 @@
               </a:rPr>
               <a:t>append() — 아이템 하나를 원소로 덧붙인다</a:t>
             </a:r>
-            <a:endParaRPr lang="en-US" sz="2800" dirty="0"/>
+            <a:endParaRPr lang="en-US" sz="2300" dirty="0"/>
           </a:p>
         </p:txBody>
       </p:sp>
@@ -37661,7 +37661,7 @@
               <a:buNone/>
             </a:pPr>
             <a:r>
-              <a:rPr lang="en-US" sz="2800" b="1" dirty="0">
+              <a:rPr lang="en-US" sz="2300" b="1" dirty="0">
                 <a:solidFill>
                   <a:srgbClr val="0F172A"/>
                 </a:solidFill>
@@ -37671,7 +37671,7 @@
               </a:rPr>
               <a:t>extend() — 다른 리스트의 알맹이를 꺼내 붙인다</a:t>
             </a:r>
-            <a:endParaRPr lang="en-US" sz="2800" dirty="0"/>
+            <a:endParaRPr lang="en-US" sz="2300" dirty="0"/>
           </a:p>
         </p:txBody>
       </p:sp>
@@ -37730,7 +37730,7 @@
               <a:buNone/>
             </a:pPr>
             <a:r>
-              <a:rPr lang="en-US" sz="1300" dirty="0">
+              <a:rPr lang="en-US" sz="1540" dirty="0">
                 <a:solidFill>
                   <a:srgbClr val="E5E7EB"/>
                 </a:solidFill>
@@ -37747,7 +37747,7 @@
               <a:buNone/>
             </a:pPr>
             <a:r>
-              <a:rPr lang="en-US" sz="1300" dirty="0">
+              <a:rPr lang="en-US" sz="1540" dirty="0">
                 <a:solidFill>
                   <a:srgbClr val="FCD34D"/>
                 </a:solidFill>
@@ -37764,7 +37764,7 @@
               <a:buNone/>
             </a:pPr>
             <a:r>
-              <a:rPr lang="en-US" sz="1300" dirty="0">
+              <a:rPr lang="en-US" sz="1540" dirty="0">
                 <a:solidFill>
                   <a:srgbClr val="E5E7EB"/>
                 </a:solidFill>
@@ -37781,7 +37781,7 @@
               <a:buNone/>
             </a:pPr>
             <a:r>
-              <a:rPr lang="en-US" sz="1300" dirty="0">
+              <a:rPr lang="en-US" sz="1540" dirty="0">
                 <a:solidFill>
                   <a:srgbClr val="FCD34D"/>
                 </a:solidFill>
@@ -37798,7 +37798,7 @@
               <a:buNone/>
             </a:pPr>
             <a:r>
-              <a:rPr lang="en-US" sz="1300" dirty="0">
+              <a:rPr lang="en-US" sz="1540" dirty="0">
                 <a:solidFill>
                   <a:srgbClr val="E5E7EB"/>
                 </a:solidFill>
@@ -37814,17 +37814,17 @@
               </a:lnSpc>
               <a:buNone/>
             </a:pPr>
-            <a:endParaRPr lang="en-US" sz="1300" dirty="0"/>
-          </a:p>
-          <a:p>
-            <a:pPr indent="0" marL="0">
-              <a:lnSpc>
-                <a:spcPct val="115000"/>
-              </a:lnSpc>
-              <a:buNone/>
-            </a:pPr>
-            <a:r>
-              <a:rPr lang="en-US" sz="1300" dirty="0">
+            <a:endParaRPr lang="en-US" sz="1540" dirty="0"/>
+          </a:p>
+          <a:p>
+            <a:pPr indent="0" marL="0">
+              <a:lnSpc>
+                <a:spcPct val="115000"/>
+              </a:lnSpc>
+              <a:buNone/>
+            </a:pPr>
+            <a:r>
+              <a:rPr lang="en-US" sz="1540" dirty="0">
                 <a:solidFill>
                   <a:srgbClr val="E5E7EB"/>
                 </a:solidFill>
@@ -37841,7 +37841,7 @@
               <a:buNone/>
             </a:pPr>
             <a:r>
-              <a:rPr lang="en-US" sz="1300" dirty="0">
+              <a:rPr lang="en-US" sz="1540" dirty="0">
                 <a:solidFill>
                   <a:srgbClr val="FCD34D"/>
                 </a:solidFill>
@@ -37858,7 +37858,7 @@
               <a:buNone/>
             </a:pPr>
             <a:r>
-              <a:rPr lang="en-US" sz="1300" dirty="0">
+              <a:rPr lang="en-US" sz="1540" dirty="0">
                 <a:solidFill>
                   <a:srgbClr val="E5E7EB"/>
                 </a:solidFill>
@@ -37875,7 +37875,7 @@
               <a:buNone/>
             </a:pPr>
             <a:r>
-              <a:rPr lang="en-US" sz="1300" dirty="0">
+              <a:rPr lang="en-US" sz="1540" dirty="0">
                 <a:solidFill>
                   <a:srgbClr val="FCD34D"/>
                 </a:solidFill>
@@ -37892,7 +37892,7 @@
               <a:buNone/>
             </a:pPr>
             <a:r>
-              <a:rPr lang="en-US" sz="1300" dirty="0">
+              <a:rPr lang="en-US" sz="1540" dirty="0">
                 <a:solidFill>
                   <a:srgbClr val="E5E7EB"/>
                 </a:solidFill>
@@ -37908,17 +37908,17 @@
               </a:lnSpc>
               <a:buNone/>
             </a:pPr>
-            <a:endParaRPr lang="en-US" sz="1300" dirty="0"/>
-          </a:p>
-          <a:p>
-            <a:pPr indent="0" marL="0">
-              <a:lnSpc>
-                <a:spcPct val="115000"/>
-              </a:lnSpc>
-              <a:buNone/>
-            </a:pPr>
-            <a:r>
-              <a:rPr lang="en-US" sz="1300" b="1" dirty="0">
+            <a:endParaRPr lang="en-US" sz="1540" dirty="0"/>
+          </a:p>
+          <a:p>
+            <a:pPr indent="0" marL="0">
+              <a:lnSpc>
+                <a:spcPct val="115000"/>
+              </a:lnSpc>
+              <a:buNone/>
+            </a:pPr>
+            <a:r>
+              <a:rPr lang="en-US" sz="1540" b="1" dirty="0">
                 <a:solidFill>
                   <a:srgbClr val="93C5FD"/>
                 </a:solidFill>
@@ -37935,7 +37935,7 @@
               <a:buNone/>
             </a:pPr>
             <a:r>
-              <a:rPr lang="en-US" sz="1300" dirty="0">
+              <a:rPr lang="en-US" sz="1540" dirty="0">
                 <a:solidFill>
                   <a:srgbClr val="E5E7EB"/>
                 </a:solidFill>
@@ -37951,17 +37951,17 @@
               </a:lnSpc>
               <a:buNone/>
             </a:pPr>
-            <a:endParaRPr lang="en-US" sz="1300" dirty="0"/>
-          </a:p>
-          <a:p>
-            <a:pPr indent="0" marL="0">
-              <a:lnSpc>
-                <a:spcPct val="115000"/>
-              </a:lnSpc>
-              <a:buNone/>
-            </a:pPr>
-            <a:r>
-              <a:rPr lang="en-US" sz="1300" b="1" dirty="0">
+            <a:endParaRPr lang="en-US" sz="1540" dirty="0"/>
+          </a:p>
+          <a:p>
+            <a:pPr indent="0" marL="0">
+              <a:lnSpc>
+                <a:spcPct val="115000"/>
+              </a:lnSpc>
+              <a:buNone/>
+            </a:pPr>
+            <a:r>
+              <a:rPr lang="en-US" sz="1540" b="1" dirty="0">
                 <a:solidFill>
                   <a:srgbClr val="93C5FD"/>
                 </a:solidFill>
@@ -37978,7 +37978,7 @@
               <a:buNone/>
             </a:pPr>
             <a:r>
-              <a:rPr lang="en-US" sz="1300" dirty="0">
+              <a:rPr lang="en-US" sz="1540" dirty="0">
                 <a:solidFill>
                   <a:srgbClr val="E5E7EB"/>
                 </a:solidFill>
@@ -37995,7 +37995,7 @@
               <a:buNone/>
             </a:pPr>
             <a:r>
-              <a:rPr lang="en-US" sz="1300" b="1" dirty="0">
+              <a:rPr lang="en-US" sz="1540" b="1" dirty="0">
                 <a:solidFill>
                   <a:srgbClr val="93C5FD"/>
                 </a:solidFill>
@@ -38012,7 +38012,7 @@
               <a:buNone/>
             </a:pPr>
             <a:r>
-              <a:rPr lang="en-US" sz="1300" dirty="0">
+              <a:rPr lang="en-US" sz="1540" dirty="0">
                 <a:solidFill>
                   <a:srgbClr val="E5E7EB"/>
                 </a:solidFill>
@@ -38022,7 +38022,7 @@
               </a:rPr>
               <a:t>(inventory))</a:t>
             </a:r>
-            <a:endParaRPr lang="en-US" sz="1300" dirty="0"/>
+            <a:endParaRPr lang="en-US" sz="1540" dirty="0"/>
           </a:p>
         </p:txBody>
       </p:sp>
@@ -38120,7 +38120,7 @@
               <a:buNone/>
             </a:pPr>
             <a:r>
-              <a:rPr lang="en-US" sz="1269" dirty="0">
+              <a:rPr lang="en-US" sz="1400" dirty="0">
                 <a:solidFill>
                   <a:srgbClr val="0F172A"/>
                 </a:solidFill>
@@ -38130,17 +38130,17 @@
               </a:rPr>
               <a:t>['기본검', '물약', '보석_1', '보석_2']</a:t>
             </a:r>
-            <a:endParaRPr lang="en-US" sz="1269" dirty="0"/>
-          </a:p>
-          <a:p>
-            <a:pPr indent="0" marL="0">
-              <a:lnSpc>
-                <a:spcPct val="115000"/>
-              </a:lnSpc>
-              <a:buNone/>
-            </a:pPr>
-            <a:r>
-              <a:rPr lang="en-US" sz="1269" dirty="0">
+            <a:endParaRPr lang="en-US" sz="1400" dirty="0"/>
+          </a:p>
+          <a:p>
+            <a:pPr indent="0" marL="0">
+              <a:lnSpc>
+                <a:spcPct val="115000"/>
+              </a:lnSpc>
+              <a:buNone/>
+            </a:pPr>
+            <a:r>
+              <a:rPr lang="en-US" sz="1400" dirty="0">
                 <a:solidFill>
                   <a:srgbClr val="0F172A"/>
                 </a:solidFill>
@@ -38150,7 +38150,7 @@
               </a:rPr>
               <a:t>4</a:t>
             </a:r>
-            <a:endParaRPr lang="en-US" sz="1269" dirty="0"/>
+            <a:endParaRPr lang="en-US" sz="1400" dirty="0"/>
           </a:p>
         </p:txBody>
       </p:sp>
@@ -38526,7 +38526,7 @@
               <a:buNone/>
             </a:pPr>
             <a:r>
-              <a:rPr lang="en-US" sz="1354" dirty="0">
+              <a:rPr lang="en-US" sz="1554" dirty="0">
                 <a:solidFill>
                   <a:srgbClr val="E5E7EB"/>
                 </a:solidFill>
@@ -38542,17 +38542,17 @@
               </a:lnSpc>
               <a:buNone/>
             </a:pPr>
-            <a:endParaRPr lang="en-US" sz="1354" dirty="0"/>
-          </a:p>
-          <a:p>
-            <a:pPr indent="0" marL="0">
-              <a:lnSpc>
-                <a:spcPct val="115000"/>
-              </a:lnSpc>
-              <a:buNone/>
-            </a:pPr>
-            <a:r>
-              <a:rPr lang="en-US" sz="1354" dirty="0">
+            <a:endParaRPr lang="en-US" sz="1554" dirty="0"/>
+          </a:p>
+          <a:p>
+            <a:pPr indent="0" marL="0">
+              <a:lnSpc>
+                <a:spcPct val="115000"/>
+              </a:lnSpc>
+              <a:buNone/>
+            </a:pPr>
+            <a:r>
+              <a:rPr lang="en-US" sz="1554" dirty="0">
                 <a:solidFill>
                   <a:srgbClr val="E5E7EB"/>
                 </a:solidFill>
@@ -38568,17 +38568,17 @@
               </a:lnSpc>
               <a:buNone/>
             </a:pPr>
-            <a:endParaRPr lang="en-US" sz="1354" dirty="0"/>
-          </a:p>
-          <a:p>
-            <a:pPr indent="0" marL="0">
-              <a:lnSpc>
-                <a:spcPct val="115000"/>
-              </a:lnSpc>
-              <a:buNone/>
-            </a:pPr>
-            <a:r>
-              <a:rPr lang="en-US" sz="1354" b="1" dirty="0">
+            <a:endParaRPr lang="en-US" sz="1554" dirty="0"/>
+          </a:p>
+          <a:p>
+            <a:pPr indent="0" marL="0">
+              <a:lnSpc>
+                <a:spcPct val="115000"/>
+              </a:lnSpc>
+              <a:buNone/>
+            </a:pPr>
+            <a:r>
+              <a:rPr lang="en-US" sz="1554" b="1" dirty="0">
                 <a:solidFill>
                   <a:srgbClr val="93C5FD"/>
                 </a:solidFill>
@@ -38595,7 +38595,7 @@
               <a:buNone/>
             </a:pPr>
             <a:r>
-              <a:rPr lang="en-US" sz="1354" dirty="0">
+              <a:rPr lang="en-US" sz="1554" dirty="0">
                 <a:solidFill>
                   <a:srgbClr val="E5E7EB"/>
                 </a:solidFill>
@@ -38612,7 +38612,7 @@
               <a:buNone/>
             </a:pPr>
             <a:r>
-              <a:rPr lang="en-US" sz="1354" dirty="0">
+              <a:rPr lang="en-US" sz="1554" dirty="0">
                 <a:solidFill>
                   <a:srgbClr val="94A3B8"/>
                 </a:solidFill>
@@ -38628,17 +38628,17 @@
               </a:lnSpc>
               <a:buNone/>
             </a:pPr>
-            <a:endParaRPr lang="en-US" sz="1354" dirty="0"/>
-          </a:p>
-          <a:p>
-            <a:pPr indent="0" marL="0">
-              <a:lnSpc>
-                <a:spcPct val="115000"/>
-              </a:lnSpc>
-              <a:buNone/>
-            </a:pPr>
-            <a:r>
-              <a:rPr lang="en-US" sz="1354" b="1" dirty="0">
+            <a:endParaRPr lang="en-US" sz="1554" dirty="0"/>
+          </a:p>
+          <a:p>
+            <a:pPr indent="0" marL="0">
+              <a:lnSpc>
+                <a:spcPct val="115000"/>
+              </a:lnSpc>
+              <a:buNone/>
+            </a:pPr>
+            <a:r>
+              <a:rPr lang="en-US" sz="1554" b="1" dirty="0">
                 <a:solidFill>
                   <a:srgbClr val="93C5FD"/>
                 </a:solidFill>
@@ -38655,7 +38655,7 @@
               <a:buNone/>
             </a:pPr>
             <a:r>
-              <a:rPr lang="en-US" sz="1354" dirty="0">
+              <a:rPr lang="en-US" sz="1554" dirty="0">
                 <a:solidFill>
                   <a:srgbClr val="E5E7EB"/>
                 </a:solidFill>
@@ -38672,7 +38672,7 @@
               <a:buNone/>
             </a:pPr>
             <a:r>
-              <a:rPr lang="en-US" sz="1354" b="1" dirty="0">
+              <a:rPr lang="en-US" sz="1554" b="1" dirty="0">
                 <a:solidFill>
                   <a:srgbClr val="93C5FD"/>
                 </a:solidFill>
@@ -38689,7 +38689,7 @@
               <a:buNone/>
             </a:pPr>
             <a:r>
-              <a:rPr lang="en-US" sz="1354" dirty="0">
+              <a:rPr lang="en-US" sz="1554" dirty="0">
                 <a:solidFill>
                   <a:srgbClr val="E5E7EB"/>
                 </a:solidFill>
@@ -38706,7 +38706,7 @@
               <a:buNone/>
             </a:pPr>
             <a:r>
-              <a:rPr lang="en-US" sz="1354" dirty="0">
+              <a:rPr lang="en-US" sz="1554" dirty="0">
                 <a:solidFill>
                   <a:srgbClr val="94A3B8"/>
                 </a:solidFill>
@@ -38716,7 +38716,7 @@
               </a:rPr>
               <a:t># 3</a:t>
             </a:r>
-            <a:endParaRPr lang="en-US" sz="1354" dirty="0"/>
+            <a:endParaRPr lang="en-US" sz="1554" dirty="0"/>
           </a:p>
         </p:txBody>
       </p:sp>
@@ -38775,7 +38775,7 @@
               <a:buNone/>
             </a:pPr>
             <a:r>
-              <a:rPr lang="en-US" sz="1451" dirty="0">
+              <a:rPr lang="en-US" sz="1600" dirty="0">
                 <a:solidFill>
                   <a:srgbClr val="E5E7EB"/>
                 </a:solidFill>
@@ -38791,17 +38791,17 @@
               </a:lnSpc>
               <a:buNone/>
             </a:pPr>
-            <a:endParaRPr lang="en-US" sz="1451" dirty="0"/>
-          </a:p>
-          <a:p>
-            <a:pPr indent="0" marL="0">
-              <a:lnSpc>
-                <a:spcPct val="115000"/>
-              </a:lnSpc>
-              <a:buNone/>
-            </a:pPr>
-            <a:r>
-              <a:rPr lang="en-US" sz="1451" dirty="0">
+            <a:endParaRPr lang="en-US" sz="1600" dirty="0"/>
+          </a:p>
+          <a:p>
+            <a:pPr indent="0" marL="0">
+              <a:lnSpc>
+                <a:spcPct val="115000"/>
+              </a:lnSpc>
+              <a:buNone/>
+            </a:pPr>
+            <a:r>
+              <a:rPr lang="en-US" sz="1600" dirty="0">
                 <a:solidFill>
                   <a:srgbClr val="E5E7EB"/>
                 </a:solidFill>
@@ -38817,17 +38817,17 @@
               </a:lnSpc>
               <a:buNone/>
             </a:pPr>
-            <a:endParaRPr lang="en-US" sz="1451" dirty="0"/>
-          </a:p>
-          <a:p>
-            <a:pPr indent="0" marL="0">
-              <a:lnSpc>
-                <a:spcPct val="115000"/>
-              </a:lnSpc>
-              <a:buNone/>
-            </a:pPr>
-            <a:r>
-              <a:rPr lang="en-US" sz="1451" b="1" dirty="0">
+            <a:endParaRPr lang="en-US" sz="1600" dirty="0"/>
+          </a:p>
+          <a:p>
+            <a:pPr indent="0" marL="0">
+              <a:lnSpc>
+                <a:spcPct val="115000"/>
+              </a:lnSpc>
+              <a:buNone/>
+            </a:pPr>
+            <a:r>
+              <a:rPr lang="en-US" sz="1600" b="1" dirty="0">
                 <a:solidFill>
                   <a:srgbClr val="93C5FD"/>
                 </a:solidFill>
@@ -38844,7 +38844,7 @@
               <a:buNone/>
             </a:pPr>
             <a:r>
-              <a:rPr lang="en-US" sz="1451" dirty="0">
+              <a:rPr lang="en-US" sz="1600" dirty="0">
                 <a:solidFill>
                   <a:srgbClr val="E5E7EB"/>
                 </a:solidFill>
@@ -38861,7 +38861,7 @@
               <a:buNone/>
             </a:pPr>
             <a:r>
-              <a:rPr lang="en-US" sz="1451" dirty="0">
+              <a:rPr lang="en-US" sz="1600" dirty="0">
                 <a:solidFill>
                   <a:srgbClr val="94A3B8"/>
                 </a:solidFill>
@@ -38877,17 +38877,17 @@
               </a:lnSpc>
               <a:buNone/>
             </a:pPr>
-            <a:endParaRPr lang="en-US" sz="1451" dirty="0"/>
-          </a:p>
-          <a:p>
-            <a:pPr indent="0" marL="0">
-              <a:lnSpc>
-                <a:spcPct val="115000"/>
-              </a:lnSpc>
-              <a:buNone/>
-            </a:pPr>
-            <a:r>
-              <a:rPr lang="en-US" sz="1451" b="1" dirty="0">
+            <a:endParaRPr lang="en-US" sz="1600" dirty="0"/>
+          </a:p>
+          <a:p>
+            <a:pPr indent="0" marL="0">
+              <a:lnSpc>
+                <a:spcPct val="115000"/>
+              </a:lnSpc>
+              <a:buNone/>
+            </a:pPr>
+            <a:r>
+              <a:rPr lang="en-US" sz="1600" b="1" dirty="0">
                 <a:solidFill>
                   <a:srgbClr val="93C5FD"/>
                 </a:solidFill>
@@ -38904,7 +38904,7 @@
               <a:buNone/>
             </a:pPr>
             <a:r>
-              <a:rPr lang="en-US" sz="1451" dirty="0">
+              <a:rPr lang="en-US" sz="1600" dirty="0">
                 <a:solidFill>
                   <a:srgbClr val="E5E7EB"/>
                 </a:solidFill>
@@ -38921,7 +38921,7 @@
               <a:buNone/>
             </a:pPr>
             <a:r>
-              <a:rPr lang="en-US" sz="1451" b="1" dirty="0">
+              <a:rPr lang="en-US" sz="1600" b="1" dirty="0">
                 <a:solidFill>
                   <a:srgbClr val="93C5FD"/>
                 </a:solidFill>
@@ -38938,7 +38938,7 @@
               <a:buNone/>
             </a:pPr>
             <a:r>
-              <a:rPr lang="en-US" sz="1451" dirty="0">
+              <a:rPr lang="en-US" sz="1600" dirty="0">
                 <a:solidFill>
                   <a:srgbClr val="E5E7EB"/>
                 </a:solidFill>
@@ -38955,7 +38955,7 @@
               <a:buNone/>
             </a:pPr>
             <a:r>
-              <a:rPr lang="en-US" sz="1451" dirty="0">
+              <a:rPr lang="en-US" sz="1600" dirty="0">
                 <a:solidFill>
                   <a:srgbClr val="94A3B8"/>
                 </a:solidFill>
@@ -38965,7 +38965,7 @@
               </a:rPr>
               <a:t># 4</a:t>
             </a:r>
-            <a:endParaRPr lang="en-US" sz="1451" dirty="0"/>
+            <a:endParaRPr lang="en-US" sz="1600" dirty="0"/>
           </a:p>
         </p:txBody>
       </p:sp>
@@ -40102,7 +40102,7 @@
               <a:buNone/>
             </a:pPr>
             <a:r>
-              <a:rPr lang="en-US" sz="1258" dirty="0">
+              <a:rPr lang="en-US" sz="1515" dirty="0">
                 <a:solidFill>
                   <a:srgbClr val="E5E7EB"/>
                 </a:solidFill>
@@ -40118,17 +40118,17 @@
               </a:lnSpc>
               <a:buNone/>
             </a:pPr>
-            <a:endParaRPr lang="en-US" sz="1258" dirty="0"/>
-          </a:p>
-          <a:p>
-            <a:pPr indent="0" marL="0">
-              <a:lnSpc>
-                <a:spcPct val="115000"/>
-              </a:lnSpc>
-              <a:buNone/>
-            </a:pPr>
-            <a:r>
-              <a:rPr lang="en-US" sz="1258" b="1" dirty="0">
+            <a:endParaRPr lang="en-US" sz="1515" dirty="0"/>
+          </a:p>
+          <a:p>
+            <a:pPr indent="0" marL="0">
+              <a:lnSpc>
+                <a:spcPct val="115000"/>
+              </a:lnSpc>
+              <a:buNone/>
+            </a:pPr>
+            <a:r>
+              <a:rPr lang="en-US" sz="1515" b="1" dirty="0">
                 <a:solidFill>
                   <a:srgbClr val="93C5FD"/>
                 </a:solidFill>
@@ -40145,7 +40145,7 @@
               <a:buNone/>
             </a:pPr>
             <a:r>
-              <a:rPr lang="en-US" sz="1258" dirty="0">
+              <a:rPr lang="en-US" sz="1515" dirty="0">
                 <a:solidFill>
                   <a:srgbClr val="E5E7EB"/>
                 </a:solidFill>
@@ -40162,7 +40162,7 @@
               <a:buNone/>
             </a:pPr>
             <a:r>
-              <a:rPr lang="en-US" sz="1258" b="1" dirty="0">
+              <a:rPr lang="en-US" sz="1515" b="1" dirty="0">
                 <a:solidFill>
                   <a:srgbClr val="93C5FD"/>
                 </a:solidFill>
@@ -40179,7 +40179,7 @@
               <a:buNone/>
             </a:pPr>
             <a:r>
-              <a:rPr lang="en-US" sz="1258" dirty="0">
+              <a:rPr lang="en-US" sz="1515" dirty="0">
                 <a:solidFill>
                   <a:srgbClr val="E5E7EB"/>
                 </a:solidFill>
@@ -40196,7 +40196,7 @@
               <a:buNone/>
             </a:pPr>
             <a:r>
-              <a:rPr lang="en-US" sz="1258" b="1" dirty="0">
+              <a:rPr lang="en-US" sz="1515" b="1" dirty="0">
                 <a:solidFill>
                   <a:srgbClr val="93C5FD"/>
                 </a:solidFill>
@@ -40213,7 +40213,7 @@
               <a:buNone/>
             </a:pPr>
             <a:r>
-              <a:rPr lang="en-US" sz="1258" dirty="0">
+              <a:rPr lang="en-US" sz="1515" dirty="0">
                 <a:solidFill>
                   <a:srgbClr val="E5E7EB"/>
                 </a:solidFill>
@@ -40229,17 +40229,17 @@
               </a:lnSpc>
               <a:buNone/>
             </a:pPr>
-            <a:endParaRPr lang="en-US" sz="1258" dirty="0"/>
-          </a:p>
-          <a:p>
-            <a:pPr indent="0" marL="0">
-              <a:lnSpc>
-                <a:spcPct val="115000"/>
-              </a:lnSpc>
-              <a:buNone/>
-            </a:pPr>
-            <a:r>
-              <a:rPr lang="en-US" sz="1258" dirty="0">
+            <a:endParaRPr lang="en-US" sz="1515" dirty="0"/>
+          </a:p>
+          <a:p>
+            <a:pPr indent="0" marL="0">
+              <a:lnSpc>
+                <a:spcPct val="115000"/>
+              </a:lnSpc>
+              <a:buNone/>
+            </a:pPr>
+            <a:r>
+              <a:rPr lang="en-US" sz="1515" dirty="0">
                 <a:solidFill>
                   <a:srgbClr val="E5E7EB"/>
                 </a:solidFill>
@@ -40256,7 +40256,7 @@
               <a:buNone/>
             </a:pPr>
             <a:r>
-              <a:rPr lang="en-US" sz="1258" dirty="0">
+              <a:rPr lang="en-US" sz="1515" dirty="0">
                 <a:solidFill>
                   <a:srgbClr val="94A3B8"/>
                 </a:solidFill>
@@ -40272,17 +40272,17 @@
               </a:lnSpc>
               <a:buNone/>
             </a:pPr>
-            <a:endParaRPr lang="en-US" sz="1258" dirty="0"/>
-          </a:p>
-          <a:p>
-            <a:pPr indent="0" marL="0">
-              <a:lnSpc>
-                <a:spcPct val="115000"/>
-              </a:lnSpc>
-              <a:buNone/>
-            </a:pPr>
-            <a:r>
-              <a:rPr lang="en-US" sz="1258" dirty="0">
+            <a:endParaRPr lang="en-US" sz="1515" dirty="0"/>
+          </a:p>
+          <a:p>
+            <a:pPr indent="0" marL="0">
+              <a:lnSpc>
+                <a:spcPct val="115000"/>
+              </a:lnSpc>
+              <a:buNone/>
+            </a:pPr>
+            <a:r>
+              <a:rPr lang="en-US" sz="1515" dirty="0">
                 <a:solidFill>
                   <a:srgbClr val="E5E7EB"/>
                 </a:solidFill>
@@ -40298,17 +40298,17 @@
               </a:lnSpc>
               <a:buNone/>
             </a:pPr>
-            <a:endParaRPr lang="en-US" sz="1258" dirty="0"/>
-          </a:p>
-          <a:p>
-            <a:pPr indent="0" marL="0">
-              <a:lnSpc>
-                <a:spcPct val="115000"/>
-              </a:lnSpc>
-              <a:buNone/>
-            </a:pPr>
-            <a:r>
-              <a:rPr lang="en-US" sz="1258" b="1" dirty="0">
+            <a:endParaRPr lang="en-US" sz="1515" dirty="0"/>
+          </a:p>
+          <a:p>
+            <a:pPr indent="0" marL="0">
+              <a:lnSpc>
+                <a:spcPct val="115000"/>
+              </a:lnSpc>
+              <a:buNone/>
+            </a:pPr>
+            <a:r>
+              <a:rPr lang="en-US" sz="1515" b="1" dirty="0">
                 <a:solidFill>
                   <a:srgbClr val="93C5FD"/>
                 </a:solidFill>
@@ -40325,7 +40325,7 @@
               <a:buNone/>
             </a:pPr>
             <a:r>
-              <a:rPr lang="en-US" sz="1258" dirty="0">
+              <a:rPr lang="en-US" sz="1515" dirty="0">
                 <a:solidFill>
                   <a:srgbClr val="E5E7EB"/>
                 </a:solidFill>
@@ -40341,17 +40341,17 @@
               </a:lnSpc>
               <a:buNone/>
             </a:pPr>
-            <a:endParaRPr lang="en-US" sz="1258" dirty="0"/>
-          </a:p>
-          <a:p>
-            <a:pPr indent="0" marL="0">
-              <a:lnSpc>
-                <a:spcPct val="115000"/>
-              </a:lnSpc>
-              <a:buNone/>
-            </a:pPr>
-            <a:r>
-              <a:rPr lang="en-US" sz="1258" b="1" dirty="0">
+            <a:endParaRPr lang="en-US" sz="1515" dirty="0"/>
+          </a:p>
+          <a:p>
+            <a:pPr indent="0" marL="0">
+              <a:lnSpc>
+                <a:spcPct val="115000"/>
+              </a:lnSpc>
+              <a:buNone/>
+            </a:pPr>
+            <a:r>
+              <a:rPr lang="en-US" sz="1515" b="1" dirty="0">
                 <a:solidFill>
                   <a:srgbClr val="93C5FD"/>
                 </a:solidFill>
@@ -40368,7 +40368,7 @@
               <a:buNone/>
             </a:pPr>
             <a:r>
-              <a:rPr lang="en-US" sz="1258" dirty="0">
+              <a:rPr lang="en-US" sz="1515" dirty="0">
                 <a:solidFill>
                   <a:srgbClr val="E5E7EB"/>
                 </a:solidFill>
@@ -40385,7 +40385,7 @@
               <a:buNone/>
             </a:pPr>
             <a:r>
-              <a:rPr lang="en-US" sz="1258" dirty="0">
+              <a:rPr lang="en-US" sz="1515" dirty="0">
                 <a:solidFill>
                   <a:srgbClr val="FCD34D"/>
                 </a:solidFill>
@@ -40402,7 +40402,7 @@
               <a:buNone/>
             </a:pPr>
             <a:r>
-              <a:rPr lang="en-US" sz="1258" dirty="0">
+              <a:rPr lang="en-US" sz="1515" dirty="0">
                 <a:solidFill>
                   <a:srgbClr val="E5E7EB"/>
                 </a:solidFill>
@@ -40419,7 +40419,7 @@
               <a:buNone/>
             </a:pPr>
             <a:r>
-              <a:rPr lang="en-US" sz="1258" b="1" dirty="0">
+              <a:rPr lang="en-US" sz="1515" b="1" dirty="0">
                 <a:solidFill>
                   <a:srgbClr val="93C5FD"/>
                 </a:solidFill>
@@ -40436,7 +40436,7 @@
               <a:buNone/>
             </a:pPr>
             <a:r>
-              <a:rPr lang="en-US" sz="1258" dirty="0">
+              <a:rPr lang="en-US" sz="1515" dirty="0">
                 <a:solidFill>
                   <a:srgbClr val="E5E7EB"/>
                 </a:solidFill>
@@ -40453,7 +40453,7 @@
               <a:buNone/>
             </a:pPr>
             <a:r>
-              <a:rPr lang="en-US" sz="1258" b="1" dirty="0">
+              <a:rPr lang="en-US" sz="1515" b="1" dirty="0">
                 <a:solidFill>
                   <a:srgbClr val="93C5FD"/>
                 </a:solidFill>
@@ -40470,7 +40470,7 @@
               <a:buNone/>
             </a:pPr>
             <a:r>
-              <a:rPr lang="en-US" sz="1258" dirty="0">
+              <a:rPr lang="en-US" sz="1515" dirty="0">
                 <a:solidFill>
                   <a:srgbClr val="E5E7EB"/>
                 </a:solidFill>
@@ -40480,7 +40480,7 @@
               </a:rPr>
               <a:t>(scores))</a:t>
             </a:r>
-            <a:endParaRPr lang="en-US" sz="1258" dirty="0"/>
+            <a:endParaRPr lang="en-US" sz="1515" dirty="0"/>
           </a:p>
         </p:txBody>
       </p:sp>
@@ -40578,7 +40578,7 @@
               <a:buNone/>
             </a:pPr>
             <a:r>
-              <a:rPr lang="en-US" sz="1282" dirty="0">
+              <a:rPr lang="en-US" sz="1141" dirty="0">
                 <a:solidFill>
                   <a:srgbClr val="0F172A"/>
                 </a:solidFill>
@@ -40588,17 +40588,17 @@
               </a:rPr>
               <a:t>[80, 82, 84, 86, 88]</a:t>
             </a:r>
-            <a:endParaRPr lang="en-US" sz="1282" dirty="0"/>
-          </a:p>
-          <a:p>
-            <a:pPr indent="0" marL="0">
-              <a:lnSpc>
-                <a:spcPct val="115000"/>
-              </a:lnSpc>
-              <a:buNone/>
-            </a:pPr>
-            <a:r>
-              <a:rPr lang="en-US" sz="1282" dirty="0">
+            <a:endParaRPr lang="en-US" sz="1141" dirty="0"/>
+          </a:p>
+          <a:p>
+            <a:pPr indent="0" marL="0">
+              <a:lnSpc>
+                <a:spcPct val="115000"/>
+              </a:lnSpc>
+              <a:buNone/>
+            </a:pPr>
+            <a:r>
+              <a:rPr lang="en-US" sz="1141" dirty="0">
                 <a:solidFill>
                   <a:srgbClr val="0F172A"/>
                 </a:solidFill>
@@ -40608,7 +40608,7 @@
               </a:rPr>
               <a:t>평균: 84.0</a:t>
             </a:r>
-            <a:endParaRPr lang="en-US" sz="1282" dirty="0"/>
+            <a:endParaRPr lang="en-US" sz="1141" dirty="0"/>
           </a:p>
         </p:txBody>
       </p:sp>

--- a/강의자료/파이썬기초2_6-10차시.pptx
+++ b/강의자료/파이썬기초2_6-10차시.pptx
@@ -5160,8 +5160,8 @@
         </p:nvSpPr>
         <p:spPr>
           <a:xfrm>
-            <a:off x="658368" y="3456432"/>
-            <a:ext cx="1280160" cy="621792"/>
+            <a:off x="658368" y="3438144"/>
+            <a:ext cx="1298448" cy="658368"/>
           </a:xfrm>
           <a:prstGeom prst="rect">
             <a:avLst/>
@@ -5174,10 +5174,13 @@
           <a:lstStyle/>
           <a:p>
             <a:pPr indent="0" marL="0">
-              <a:buNone/>
-            </a:pPr>
-            <a:r>
-              <a:rPr lang="en-US" sz="1200" b="1" dirty="0">
+              <a:lnSpc>
+                <a:spcPct val="105000"/>
+              </a:lnSpc>
+              <a:buNone/>
+            </a:pPr>
+            <a:r>
+              <a:rPr lang="en-US" sz="1100" b="1" dirty="0">
                 <a:solidFill>
                   <a:srgbClr val="FFFFFF"/>
                 </a:solidFill>
@@ -5187,14 +5190,17 @@
               </a:rPr>
               <a:t>append()</a:t>
             </a:r>
-            <a:endParaRPr lang="en-US" sz="1200" dirty="0"/>
-          </a:p>
-          <a:p>
-            <a:pPr indent="0" marL="0">
-              <a:buNone/>
-            </a:pPr>
-            <a:r>
-              <a:rPr lang="en-US" sz="1200" b="1" dirty="0">
+            <a:endParaRPr lang="en-US" sz="1100" dirty="0"/>
+          </a:p>
+          <a:p>
+            <a:pPr indent="0" marL="0">
+              <a:lnSpc>
+                <a:spcPct val="105000"/>
+              </a:lnSpc>
+              <a:buNone/>
+            </a:pPr>
+            <a:r>
+              <a:rPr lang="en-US" sz="1100" b="1" dirty="0">
                 <a:solidFill>
                   <a:srgbClr val="FFFFFF"/>
                 </a:solidFill>
@@ -5204,7 +5210,7 @@
               </a:rPr>
               <a:t>extend()</a:t>
             </a:r>
-            <a:endParaRPr lang="en-US" sz="1200" dirty="0"/>
+            <a:endParaRPr lang="en-US" sz="1100" dirty="0"/>
           </a:p>
         </p:txBody>
       </p:sp>
@@ -5282,8 +5288,8 @@
         </p:nvSpPr>
         <p:spPr>
           <a:xfrm>
-            <a:off x="2267712" y="3456432"/>
-            <a:ext cx="1280160" cy="621792"/>
+            <a:off x="2267712" y="3438144"/>
+            <a:ext cx="1298448" cy="658368"/>
           </a:xfrm>
           <a:prstGeom prst="rect">
             <a:avLst/>
@@ -5296,10 +5302,13 @@
           <a:lstStyle/>
           <a:p>
             <a:pPr indent="0" marL="0">
-              <a:buNone/>
-            </a:pPr>
-            <a:r>
-              <a:rPr lang="en-US" sz="1200" b="1" dirty="0">
+              <a:lnSpc>
+                <a:spcPct val="105000"/>
+              </a:lnSpc>
+              <a:buNone/>
+            </a:pPr>
+            <a:r>
+              <a:rPr lang="en-US" sz="1100" b="1" dirty="0">
                 <a:solidFill>
                   <a:srgbClr val="FFFFFF"/>
                 </a:solidFill>
@@ -5309,14 +5318,17 @@
               </a:rPr>
               <a:t>pop()</a:t>
             </a:r>
-            <a:endParaRPr lang="en-US" sz="1200" dirty="0"/>
-          </a:p>
-          <a:p>
-            <a:pPr indent="0" marL="0">
-              <a:buNone/>
-            </a:pPr>
-            <a:r>
-              <a:rPr lang="en-US" sz="1200" b="1" dirty="0">
+            <a:endParaRPr lang="en-US" sz="1100" dirty="0"/>
+          </a:p>
+          <a:p>
+            <a:pPr indent="0" marL="0">
+              <a:lnSpc>
+                <a:spcPct val="105000"/>
+              </a:lnSpc>
+              <a:buNone/>
+            </a:pPr>
+            <a:r>
+              <a:rPr lang="en-US" sz="1100" b="1" dirty="0">
                 <a:solidFill>
                   <a:srgbClr val="FFFFFF"/>
                 </a:solidFill>
@@ -5326,7 +5338,7 @@
               </a:rPr>
               <a:t>remove()</a:t>
             </a:r>
-            <a:endParaRPr lang="en-US" sz="1200" dirty="0"/>
+            <a:endParaRPr lang="en-US" sz="1100" dirty="0"/>
           </a:p>
         </p:txBody>
       </p:sp>
@@ -5404,8 +5416,8 @@
         </p:nvSpPr>
         <p:spPr>
           <a:xfrm>
-            <a:off x="3877056" y="3456432"/>
-            <a:ext cx="1280160" cy="621792"/>
+            <a:off x="3877056" y="3438144"/>
+            <a:ext cx="1298448" cy="658368"/>
           </a:xfrm>
           <a:prstGeom prst="rect">
             <a:avLst/>
@@ -5418,10 +5430,13 @@
           <a:lstStyle/>
           <a:p>
             <a:pPr indent="0" marL="0">
-              <a:buNone/>
-            </a:pPr>
-            <a:r>
-              <a:rPr lang="en-US" sz="1200" b="1" dirty="0">
+              <a:lnSpc>
+                <a:spcPct val="105000"/>
+              </a:lnSpc>
+              <a:buNone/>
+            </a:pPr>
+            <a:r>
+              <a:rPr lang="en-US" sz="1100" b="1" dirty="0">
                 <a:solidFill>
                   <a:srgbClr val="FFFFFF"/>
                 </a:solidFill>
@@ -5431,14 +5446,17 @@
               </a:rPr>
               <a:t>for / while</a:t>
             </a:r>
-            <a:endParaRPr lang="en-US" sz="1200" dirty="0"/>
-          </a:p>
-          <a:p>
-            <a:pPr indent="0" marL="0">
-              <a:buNone/>
-            </a:pPr>
-            <a:r>
-              <a:rPr lang="en-US" sz="1200" b="1" dirty="0">
+            <a:endParaRPr lang="en-US" sz="1100" dirty="0"/>
+          </a:p>
+          <a:p>
+            <a:pPr indent="0" marL="0">
+              <a:lnSpc>
+                <a:spcPct val="105000"/>
+              </a:lnSpc>
+              <a:buNone/>
+            </a:pPr>
+            <a:r>
+              <a:rPr lang="en-US" sz="1100" b="1" dirty="0">
                 <a:solidFill>
                   <a:srgbClr val="FFFFFF"/>
                 </a:solidFill>
@@ -5448,7 +5466,7 @@
               </a:rPr>
               <a:t>break</a:t>
             </a:r>
-            <a:endParaRPr lang="en-US" sz="1200" dirty="0"/>
+            <a:endParaRPr lang="en-US" sz="1100" dirty="0"/>
           </a:p>
         </p:txBody>
       </p:sp>
@@ -5526,8 +5544,8 @@
         </p:nvSpPr>
         <p:spPr>
           <a:xfrm>
-            <a:off x="5486400" y="3456432"/>
-            <a:ext cx="1280160" cy="621792"/>
+            <a:off x="5486400" y="3438144"/>
+            <a:ext cx="1298448" cy="658368"/>
           </a:xfrm>
           <a:prstGeom prst="rect">
             <a:avLst/>
@@ -5540,10 +5558,13 @@
           <a:lstStyle/>
           <a:p>
             <a:pPr indent="0" marL="0">
-              <a:buNone/>
-            </a:pPr>
-            <a:r>
-              <a:rPr lang="en-US" sz="1200" b="1" dirty="0">
+              <a:lnSpc>
+                <a:spcPct val="105000"/>
+              </a:lnSpc>
+              <a:buNone/>
+            </a:pPr>
+            <a:r>
+              <a:rPr lang="en-US" sz="1100" b="1" dirty="0">
                 <a:solidFill>
                   <a:srgbClr val="FFFFFF"/>
                 </a:solidFill>
@@ -5553,14 +5574,17 @@
               </a:rPr>
               <a:t>def</a:t>
             </a:r>
-            <a:endParaRPr lang="en-US" sz="1200" dirty="0"/>
-          </a:p>
-          <a:p>
-            <a:pPr indent="0" marL="0">
-              <a:buNone/>
-            </a:pPr>
-            <a:r>
-              <a:rPr lang="en-US" sz="1200" b="1" dirty="0">
+            <a:endParaRPr lang="en-US" sz="1100" dirty="0"/>
+          </a:p>
+          <a:p>
+            <a:pPr indent="0" marL="0">
+              <a:lnSpc>
+                <a:spcPct val="105000"/>
+              </a:lnSpc>
+              <a:buNone/>
+            </a:pPr>
+            <a:r>
+              <a:rPr lang="en-US" sz="1100" b="1" dirty="0">
                 <a:solidFill>
                   <a:srgbClr val="FFFFFF"/>
                 </a:solidFill>
@@ -5570,7 +5594,7 @@
               </a:rPr>
               <a:t>return</a:t>
             </a:r>
-            <a:endParaRPr lang="en-US" sz="1200" dirty="0"/>
+            <a:endParaRPr lang="en-US" sz="1100" dirty="0"/>
           </a:p>
         </p:txBody>
       </p:sp>
@@ -5648,8 +5672,8 @@
         </p:nvSpPr>
         <p:spPr>
           <a:xfrm>
-            <a:off x="7095744" y="3456432"/>
-            <a:ext cx="1280160" cy="621792"/>
+            <a:off x="7095744" y="3438144"/>
+            <a:ext cx="1298448" cy="658368"/>
           </a:xfrm>
           <a:prstGeom prst="rect">
             <a:avLst/>
@@ -5662,10 +5686,13 @@
           <a:lstStyle/>
           <a:p>
             <a:pPr indent="0" marL="0">
-              <a:buNone/>
-            </a:pPr>
-            <a:r>
-              <a:rPr lang="en-US" sz="1200" b="1" dirty="0">
+              <a:lnSpc>
+                <a:spcPct val="105000"/>
+              </a:lnSpc>
+              <a:buNone/>
+            </a:pPr>
+            <a:r>
+              <a:rPr lang="en-US" sz="1100" b="1" dirty="0">
                 <a:solidFill>
                   <a:srgbClr val="FFFFFF"/>
                 </a:solidFill>
@@ -5675,14 +5702,17 @@
               </a:rPr>
               <a:t>np.array()</a:t>
             </a:r>
-            <a:endParaRPr lang="en-US" sz="1200" dirty="0"/>
-          </a:p>
-          <a:p>
-            <a:pPr indent="0" marL="0">
-              <a:buNone/>
-            </a:pPr>
-            <a:r>
-              <a:rPr lang="en-US" sz="1200" b="1" dirty="0">
+            <a:endParaRPr lang="en-US" sz="1100" dirty="0"/>
+          </a:p>
+          <a:p>
+            <a:pPr indent="0" marL="0">
+              <a:lnSpc>
+                <a:spcPct val="105000"/>
+              </a:lnSpc>
+              <a:buNone/>
+            </a:pPr>
+            <a:r>
+              <a:rPr lang="en-US" sz="1100" b="1" dirty="0">
                 <a:solidFill>
                   <a:srgbClr val="FFFFFF"/>
                 </a:solidFill>
@@ -5692,7 +5722,7 @@
               </a:rPr>
               <a:t>reshape()</a:t>
             </a:r>
-            <a:endParaRPr lang="en-US" sz="1200" dirty="0"/>
+            <a:endParaRPr lang="en-US" sz="1100" dirty="0"/>
           </a:p>
         </p:txBody>
       </p:sp>
